--- a/publish/hub/docs/NutriSync-Historia-Storyline-2026-08.pptx
+++ b/publish/hub/docs/NutriSync-Historia-Storyline-2026-08.pptx
@@ -10,8 +10,8 @@
   <p:notesMasterIdLst>
     <p:notesMasterId r:id="rId3"/>
   </p:notesMasterIdLst>
-  <p:sldSz cx="9144000" cy="5143500"/>
-  <p:notesSz cx="5143500" cy="9144000"/>
+  <p:sldSz cx="12192000" cy="6858000"/>
+  <p:notesSz cx="6858000" cy="12192000"/>
   <p:defaultTextStyle>
     <a:lvl1pPr marL="0" algn="l" defTabSz="914400" rtl="0" eaLnBrk="1" latinLnBrk="0" hangingPunct="1">
       <a:defRPr sz="1800" kern="1200">
@@ -877,14 +877,80 @@
       </p:grpSpPr>
       <p:sp>
         <p:nvSpPr>
-          <p:cNvPr id="2" name="Text 0"/>
-          <p:cNvSpPr/>
-          <p:nvPr/>
-        </p:nvSpPr>
-        <p:spPr>
-          <a:xfrm>
-            <a:off x="457200" y="256032"/>
-            <a:ext cx="8229600" cy="777240"/>
+          <p:cNvPr id="2" name="Shape 0"/>
+          <p:cNvSpPr/>
+          <p:nvPr/>
+        </p:nvSpPr>
+        <p:spPr>
+          <a:xfrm>
+            <a:off x="-1463040" y="-1645920"/>
+            <a:ext cx="4754880" cy="4754880"/>
+          </a:xfrm>
+          <a:prstGeom prst="ellipse">
+            <a:avLst/>
+          </a:prstGeom>
+          <a:solidFill>
+            <a:srgbClr val="FF7600">
+              <a:alpha val="7000"/>
+            </a:srgbClr>
+          </a:solidFill>
+          <a:ln/>
+        </p:spPr>
+      </p:sp>
+      <p:sp>
+        <p:nvSpPr>
+          <p:cNvPr id="3" name="Shape 1"/>
+          <p:cNvSpPr/>
+          <p:nvPr/>
+        </p:nvSpPr>
+        <p:spPr>
+          <a:xfrm>
+            <a:off x="9509760" y="4206240"/>
+            <a:ext cx="4389120" cy="4389120"/>
+          </a:xfrm>
+          <a:prstGeom prst="ellipse">
+            <a:avLst/>
+          </a:prstGeom>
+          <a:solidFill>
+            <a:srgbClr val="FD400C">
+              <a:alpha val="7000"/>
+            </a:srgbClr>
+          </a:solidFill>
+          <a:ln/>
+        </p:spPr>
+      </p:sp>
+      <p:sp>
+        <p:nvSpPr>
+          <p:cNvPr id="4" name="Shape 2"/>
+          <p:cNvSpPr/>
+          <p:nvPr/>
+        </p:nvSpPr>
+        <p:spPr>
+          <a:xfrm>
+            <a:off x="5120640" y="-2194560"/>
+            <a:ext cx="3291840" cy="3291840"/>
+          </a:xfrm>
+          <a:prstGeom prst="ellipse">
+            <a:avLst/>
+          </a:prstGeom>
+          <a:solidFill>
+            <a:srgbClr val="0F6E56">
+              <a:alpha val="6000"/>
+            </a:srgbClr>
+          </a:solidFill>
+          <a:ln/>
+        </p:spPr>
+      </p:sp>
+      <p:sp>
+        <p:nvSpPr>
+          <p:cNvPr id="5" name="Text 3"/>
+          <p:cNvSpPr/>
+          <p:nvPr/>
+        </p:nvSpPr>
+        <p:spPr>
+          <a:xfrm>
+            <a:off x="685800" y="274320"/>
+            <a:ext cx="10789920" cy="685800"/>
           </a:xfrm>
           <a:prstGeom prst="rect">
             <a:avLst/>
@@ -900,126 +966,252 @@
               <a:buNone/>
             </a:pPr>
             <a:r>
-              <a:rPr lang="en-US" sz="2500" b="1" dirty="0">
+              <a:rPr lang="en-US" sz="4000" b="1" dirty="0">
+                <a:solidFill>
+                  <a:srgbClr val="FD400C"/>
+                </a:solidFill>
+                <a:latin typeface="Arial" pitchFamily="34" charset="0"/>
+                <a:ea typeface="Arial" pitchFamily="34" charset="-122"/>
+                <a:cs typeface="Arial" pitchFamily="34" charset="-120"/>
+              </a:rPr>
+              <a:t>NutriSync</a:t>
+            </a:r>
+            <a:pPr indent="0" marL="0">
+              <a:buNone/>
+            </a:pPr>
+            <a:r>
+              <a:rPr lang="en-US" sz="4000" b="1" dirty="0">
                 <a:solidFill>
                   <a:srgbClr val="241D1A"/>
                 </a:solidFill>
-              </a:rPr>
-              <a:t>NutriSync — de la idea al mercado</a:t>
-            </a:r>
-            <a:endParaRPr lang="en-US" sz="2500" dirty="0"/>
-          </a:p>
+                <a:latin typeface="Arial" pitchFamily="34" charset="0"/>
+                <a:ea typeface="Arial" pitchFamily="34" charset="-122"/>
+                <a:cs typeface="Arial" pitchFamily="34" charset="-120"/>
+              </a:rPr>
+              <a:t>  —  de la idea al mercado</a:t>
+            </a:r>
+            <a:endParaRPr lang="en-US" sz="4000" dirty="0"/>
+          </a:p>
+        </p:txBody>
+      </p:sp>
+      <p:sp>
+        <p:nvSpPr>
+          <p:cNvPr id="6" name="Text 4"/>
+          <p:cNvSpPr/>
+          <p:nvPr/>
+        </p:nvSpPr>
+        <p:spPr>
+          <a:xfrm>
+            <a:off x="713232" y="932688"/>
+            <a:ext cx="10789920" cy="310896"/>
+          </a:xfrm>
+          <a:prstGeom prst="rect">
+            <a:avLst/>
+          </a:prstGeom>
+          <a:noFill/>
+          <a:ln/>
+        </p:spPr>
+        <p:txBody>
+          <a:bodyPr wrap="square" lIns="0" tIns="0" rIns="0" bIns="0" rtlCol="0" anchor="ctr"/>
+          <a:lstStyle/>
           <a:p>
             <a:pPr indent="0" marL="0">
               <a:buNone/>
             </a:pPr>
             <a:r>
-              <a:rPr lang="en-US" sz="1200" dirty="0">
+              <a:rPr lang="en-US" sz="1400" i="1" dirty="0">
                 <a:solidFill>
                   <a:srgbClr val="8A7F78"/>
                 </a:solidFill>
-              </a:rPr>
-              <a:t>from idea to market · junio → 8 de octubre de 2026</a:t>
-            </a:r>
-            <a:endParaRPr lang="en-US" sz="2500" dirty="0"/>
+                <a:latin typeface="Arial" pitchFamily="34" charset="0"/>
+                <a:ea typeface="Arial" pitchFamily="34" charset="-122"/>
+                <a:cs typeface="Arial" pitchFamily="34" charset="-120"/>
+              </a:rPr>
+              <a:t>from idea to market  ·  junio 2026 → 8 de octubre de 2026  ·  ciencia del ciclo, hecha producto</a:t>
+            </a:r>
+            <a:endParaRPr lang="en-US" sz="1400" dirty="0"/>
           </a:p>
         </p:txBody>
       </p:sp>
       <p:sp>
         <p:nvSpPr>
-          <p:cNvPr id="3" name="Shape 1"/>
-          <p:cNvSpPr/>
-          <p:nvPr/>
-        </p:nvSpPr>
-        <p:spPr>
-          <a:xfrm>
-            <a:off x="640080" y="2761488"/>
-            <a:ext cx="7863840" cy="0"/>
-          </a:xfrm>
-          <a:prstGeom prst="line">
-            <a:avLst/>
-          </a:prstGeom>
-          <a:noFill/>
-          <a:ln w="31750">
-            <a:solidFill>
-              <a:srgbClr val="F3C8B8"/>
-            </a:solidFill>
-            <a:prstDash val="solid"/>
-          </a:ln>
-        </p:spPr>
-      </p:sp>
-      <p:sp>
-        <p:nvSpPr>
-          <p:cNvPr id="4" name="Shape 2"/>
-          <p:cNvSpPr/>
-          <p:nvPr/>
-        </p:nvSpPr>
-        <p:spPr>
-          <a:xfrm>
-            <a:off x="1133856" y="2679192"/>
-            <a:ext cx="164592" cy="164592"/>
+          <p:cNvPr id="7" name="Shape 5"/>
+          <p:cNvSpPr/>
+          <p:nvPr/>
+        </p:nvSpPr>
+        <p:spPr>
+          <a:xfrm>
+            <a:off x="822960" y="3570732"/>
+            <a:ext cx="3449117" cy="82296"/>
+          </a:xfrm>
+          <a:prstGeom prst="roundRect">
+            <a:avLst>
+              <a:gd name="adj" fmla="val 50000"/>
+            </a:avLst>
+          </a:prstGeom>
+          <a:solidFill>
+            <a:srgbClr val="0F6E56"/>
+          </a:solidFill>
+          <a:ln/>
+        </p:spPr>
+      </p:sp>
+      <p:sp>
+        <p:nvSpPr>
+          <p:cNvPr id="8" name="Shape 6"/>
+          <p:cNvSpPr/>
+          <p:nvPr/>
+        </p:nvSpPr>
+        <p:spPr>
+          <a:xfrm>
+            <a:off x="4217213" y="3570732"/>
+            <a:ext cx="1964131" cy="82296"/>
+          </a:xfrm>
+          <a:prstGeom prst="roundRect">
+            <a:avLst>
+              <a:gd name="adj" fmla="val 50000"/>
+            </a:avLst>
+          </a:prstGeom>
+          <a:solidFill>
+            <a:srgbClr val="1F8A5E"/>
+          </a:solidFill>
+          <a:ln/>
+        </p:spPr>
+      </p:sp>
+      <p:sp>
+        <p:nvSpPr>
+          <p:cNvPr id="9" name="Shape 7"/>
+          <p:cNvSpPr/>
+          <p:nvPr/>
+        </p:nvSpPr>
+        <p:spPr>
+          <a:xfrm>
+            <a:off x="6126480" y="3570732"/>
+            <a:ext cx="2176272" cy="82296"/>
+          </a:xfrm>
+          <a:prstGeom prst="roundRect">
+            <a:avLst>
+              <a:gd name="adj" fmla="val 50000"/>
+            </a:avLst>
+          </a:prstGeom>
+          <a:solidFill>
+            <a:srgbClr val="FF7600"/>
+          </a:solidFill>
+          <a:ln/>
+        </p:spPr>
+      </p:sp>
+      <p:sp>
+        <p:nvSpPr>
+          <p:cNvPr id="10" name="Shape 8"/>
+          <p:cNvSpPr/>
+          <p:nvPr/>
+        </p:nvSpPr>
+        <p:spPr>
+          <a:xfrm>
+            <a:off x="8247888" y="3570732"/>
+            <a:ext cx="1964131" cy="82296"/>
+          </a:xfrm>
+          <a:prstGeom prst="roundRect">
+            <a:avLst>
+              <a:gd name="adj" fmla="val 50000"/>
+            </a:avLst>
+          </a:prstGeom>
+          <a:solidFill>
+            <a:srgbClr val="FD400C"/>
+          </a:solidFill>
+          <a:ln/>
+        </p:spPr>
+      </p:sp>
+      <p:sp>
+        <p:nvSpPr>
+          <p:cNvPr id="11" name="Shape 9"/>
+          <p:cNvSpPr/>
+          <p:nvPr/>
+        </p:nvSpPr>
+        <p:spPr>
+          <a:xfrm>
+            <a:off x="10157155" y="3570732"/>
+            <a:ext cx="1327709" cy="82296"/>
+          </a:xfrm>
+          <a:prstGeom prst="roundRect">
+            <a:avLst>
+              <a:gd name="adj" fmla="val 50000"/>
+            </a:avLst>
+          </a:prstGeom>
+          <a:solidFill>
+            <a:srgbClr val="C73A20"/>
+          </a:solidFill>
+          <a:ln/>
+        </p:spPr>
+      </p:sp>
+      <p:sp>
+        <p:nvSpPr>
+          <p:cNvPr id="12" name="Shape 10"/>
+          <p:cNvSpPr/>
+          <p:nvPr/>
+        </p:nvSpPr>
+        <p:spPr>
+          <a:xfrm rot="5400000">
+            <a:off x="11411712" y="3456432"/>
+            <a:ext cx="310896" cy="310896"/>
+          </a:xfrm>
+          <a:prstGeom prst="triangle">
+            <a:avLst/>
+          </a:prstGeom>
+          <a:solidFill>
+            <a:srgbClr val="C73A20"/>
+          </a:solidFill>
+          <a:ln/>
+        </p:spPr>
+      </p:sp>
+      <p:sp>
+        <p:nvSpPr>
+          <p:cNvPr id="13" name="Shape 11"/>
+          <p:cNvSpPr/>
+          <p:nvPr/>
+        </p:nvSpPr>
+        <p:spPr>
+          <a:xfrm>
+            <a:off x="1380744" y="3063240"/>
+            <a:ext cx="1097280" cy="1097280"/>
           </a:xfrm>
           <a:prstGeom prst="ellipse">
             <a:avLst/>
           </a:prstGeom>
           <a:solidFill>
-            <a:srgbClr val="0F6E56"/>
-          </a:solidFill>
-          <a:ln/>
-        </p:spPr>
-      </p:sp>
-      <p:sp>
-        <p:nvSpPr>
-          <p:cNvPr id="5" name="Shape 3"/>
-          <p:cNvSpPr/>
-          <p:nvPr/>
-        </p:nvSpPr>
-        <p:spPr>
-          <a:xfrm>
-            <a:off x="1216152" y="2395728"/>
-            <a:ext cx="0" cy="283464"/>
-          </a:xfrm>
-          <a:prstGeom prst="line">
-            <a:avLst/>
-          </a:prstGeom>
-          <a:noFill/>
-          <a:ln w="19050">
+            <a:srgbClr val="0F6E56">
+              <a:alpha val="16000"/>
+            </a:srgbClr>
+          </a:solidFill>
+          <a:ln/>
+        </p:spPr>
+      </p:sp>
+      <p:sp>
+        <p:nvSpPr>
+          <p:cNvPr id="14" name="Shape 12"/>
+          <p:cNvSpPr/>
+          <p:nvPr/>
+        </p:nvSpPr>
+        <p:spPr>
+          <a:xfrm>
+            <a:off x="1444752" y="3127248"/>
+            <a:ext cx="969264" cy="969264"/>
+          </a:xfrm>
+          <a:prstGeom prst="ellipse">
+            <a:avLst/>
+          </a:prstGeom>
+          <a:solidFill>
+            <a:srgbClr val="FFFFFF"/>
+          </a:solidFill>
+          <a:ln w="50800">
             <a:solidFill>
               <a:srgbClr val="0F6E56"/>
-            </a:solidFill>
-            <a:prstDash val="dash"/>
-          </a:ln>
-        </p:spPr>
-      </p:sp>
-      <p:sp>
-        <p:nvSpPr>
-          <p:cNvPr id="6" name="Shape 4"/>
-          <p:cNvSpPr/>
-          <p:nvPr/>
-        </p:nvSpPr>
-        <p:spPr>
-          <a:xfrm>
-            <a:off x="566928" y="1170432"/>
-            <a:ext cx="1298448" cy="1225296"/>
-          </a:xfrm>
-          <a:prstGeom prst="roundRect">
-            <a:avLst>
-              <a:gd name="adj" fmla="val 6716"/>
-            </a:avLst>
-          </a:prstGeom>
-          <a:solidFill>
-            <a:srgbClr val="FFFFFF"/>
-          </a:solidFill>
-          <a:ln w="12700">
-            <a:solidFill>
-              <a:srgbClr val="EFE3D7"/>
             </a:solidFill>
             <a:prstDash val="solid"/>
           </a:ln>
           <a:effectLst>
-            <a:outerShdw sx="100000" sy="100000" kx="0" ky="0" algn="bl" rotWithShape="0" blurRad="76200" dist="25400" dir="5400000">
-              <a:srgbClr val="D9C8B4">
-                <a:alpha val="35000"/>
+            <a:outerShdw sx="100000" sy="100000" kx="0" ky="0" algn="bl" rotWithShape="0" blurRad="114300" dist="38100" dir="5400000">
+              <a:srgbClr val="241D1A">
+                <a:alpha val="30000"/>
               </a:srgbClr>
             </a:outerShdw>
           </a:effectLst>
@@ -1027,7 +1219,7 @@
       </p:sp>
       <p:pic>
         <p:nvPicPr>
-          <p:cNvPr id="7" name="Image 0" descr="preencoded.png">    </p:cNvPr>
+          <p:cNvPr id="15" name="Image 0" descr="preencoded.png">    </p:cNvPr>
           <p:cNvPicPr>
             <a:picLocks noChangeAspect="1"/>
           </p:cNvPicPr>
@@ -1041,8 +1233,8 @@
         </p:blipFill>
         <p:spPr>
           <a:xfrm>
-            <a:off x="978408" y="896112"/>
-            <a:ext cx="475488" cy="475488"/>
+            <a:off x="1600200" y="3282696"/>
+            <a:ext cx="658368" cy="658368"/>
           </a:xfrm>
           <a:prstGeom prst="rect">
             <a:avLst/>
@@ -1051,36 +1243,39 @@
       </p:pic>
       <p:sp>
         <p:nvSpPr>
-          <p:cNvPr id="8" name="Shape 5"/>
-          <p:cNvSpPr/>
-          <p:nvPr/>
-        </p:nvSpPr>
-        <p:spPr>
-          <a:xfrm>
-            <a:off x="694944" y="1389888"/>
-            <a:ext cx="1042416" cy="219456"/>
-          </a:xfrm>
-          <a:prstGeom prst="roundRect">
-            <a:avLst>
-              <a:gd name="adj" fmla="val 50000"/>
-            </a:avLst>
+          <p:cNvPr id="16" name="Shape 13"/>
+          <p:cNvSpPr/>
+          <p:nvPr/>
+        </p:nvSpPr>
+        <p:spPr>
+          <a:xfrm>
+            <a:off x="2148840" y="3090672"/>
+            <a:ext cx="310896" cy="310896"/>
+          </a:xfrm>
+          <a:prstGeom prst="ellipse">
+            <a:avLst/>
           </a:prstGeom>
           <a:solidFill>
             <a:srgbClr val="0F6E56"/>
           </a:solidFill>
-          <a:ln/>
-        </p:spPr>
-      </p:sp>
-      <p:sp>
-        <p:nvSpPr>
-          <p:cNvPr id="9" name="Text 6"/>
-          <p:cNvSpPr/>
-          <p:nvPr/>
-        </p:nvSpPr>
-        <p:spPr>
-          <a:xfrm>
-            <a:off x="694944" y="1389888"/>
-            <a:ext cx="1042416" cy="219456"/>
+          <a:ln w="25400">
+            <a:solidFill>
+              <a:srgbClr val="FFFFFF"/>
+            </a:solidFill>
+            <a:prstDash val="solid"/>
+          </a:ln>
+        </p:spPr>
+      </p:sp>
+      <p:sp>
+        <p:nvSpPr>
+          <p:cNvPr id="17" name="Text 14"/>
+          <p:cNvSpPr/>
+          <p:nvPr/>
+        </p:nvSpPr>
+        <p:spPr>
+          <a:xfrm>
+            <a:off x="2148840" y="3090672"/>
+            <a:ext cx="310896" cy="310896"/>
           </a:xfrm>
           <a:prstGeom prst="rect">
             <a:avLst/>
@@ -1096,117 +1291,36 @@
               <a:buNone/>
             </a:pPr>
             <a:r>
-              <a:rPr lang="en-US" sz="950" b="1" dirty="0">
+              <a:rPr lang="en-US" sz="1200" b="1" dirty="0">
                 <a:solidFill>
                   <a:srgbClr val="FFFFFF"/>
                 </a:solidFill>
-              </a:rPr>
-              <a:t>JUN 2026</a:t>
-            </a:r>
-            <a:endParaRPr lang="en-US" sz="950" dirty="0"/>
+                <a:latin typeface="Arial" pitchFamily="34" charset="0"/>
+                <a:ea typeface="Arial" pitchFamily="34" charset="-122"/>
+                <a:cs typeface="Arial" pitchFamily="34" charset="-120"/>
+              </a:rPr>
+              <a:t>1</a:t>
+            </a:r>
+            <a:endParaRPr lang="en-US" sz="1200" dirty="0"/>
           </a:p>
         </p:txBody>
       </p:sp>
       <p:sp>
         <p:nvSpPr>
-          <p:cNvPr id="10" name="Text 7"/>
-          <p:cNvSpPr/>
-          <p:nvPr/>
-        </p:nvSpPr>
-        <p:spPr>
-          <a:xfrm>
-            <a:off x="612648" y="1645920"/>
-            <a:ext cx="1207008" cy="731520"/>
-          </a:xfrm>
-          <a:prstGeom prst="rect">
+          <p:cNvPr id="18" name="Shape 15"/>
+          <p:cNvSpPr/>
+          <p:nvPr/>
+        </p:nvSpPr>
+        <p:spPr>
+          <a:xfrm>
+            <a:off x="1929384" y="2670048"/>
+            <a:ext cx="0" cy="457200"/>
+          </a:xfrm>
+          <a:prstGeom prst="line">
             <a:avLst/>
           </a:prstGeom>
           <a:noFill/>
-          <a:ln/>
-        </p:spPr>
-        <p:txBody>
-          <a:bodyPr wrap="square" lIns="0" tIns="0" rIns="0" bIns="0" rtlCol="0" anchor="t"/>
-          <a:lstStyle/>
-          <a:p>
-            <a:pPr algn="ctr" indent="0" marL="0">
-              <a:buNone/>
-            </a:pPr>
-            <a:r>
-              <a:rPr lang="en-US" sz="1050" b="1" dirty="0">
-                <a:solidFill>
-                  <a:srgbClr val="241D1A"/>
-                </a:solidFill>
-              </a:rPr>
-              <a:t>La idea y el equipo</a:t>
-            </a:r>
-            <a:endParaRPr lang="en-US" sz="1050" dirty="0"/>
-          </a:p>
-          <a:p>
-            <a:pPr algn="ctr" indent="0" marL="0">
-              <a:buNone/>
-            </a:pPr>
-            <a:r>
-              <a:rPr lang="en-US" sz="800" i="1" dirty="0">
-                <a:solidFill>
-                  <a:srgbClr val="8A7F78"/>
-                </a:solidFill>
-              </a:rPr>
-              <a:t>Idea &amp; founding team</a:t>
-            </a:r>
-            <a:endParaRPr lang="en-US" sz="1050" dirty="0"/>
-          </a:p>
-          <a:p>
-            <a:pPr algn="ctr" indent="0" marL="0">
-              <a:buNone/>
-            </a:pPr>
-            <a:r>
-              <a:rPr lang="en-US" sz="750" dirty="0">
-                <a:solidFill>
-                  <a:srgbClr val="6E655D"/>
-                </a:solidFill>
-              </a:rPr>
-              <a:t>4 founders · ciencia del ciclo · stack lean</a:t>
-            </a:r>
-            <a:endParaRPr lang="en-US" sz="1050" dirty="0"/>
-          </a:p>
-        </p:txBody>
-      </p:sp>
-      <p:sp>
-        <p:nvSpPr>
-          <p:cNvPr id="11" name="Shape 8"/>
-          <p:cNvSpPr/>
-          <p:nvPr/>
-        </p:nvSpPr>
-        <p:spPr>
-          <a:xfrm>
-            <a:off x="2514600" y="2679192"/>
-            <a:ext cx="164592" cy="164592"/>
-          </a:xfrm>
-          <a:prstGeom prst="ellipse">
-            <a:avLst/>
-          </a:prstGeom>
-          <a:solidFill>
-            <a:srgbClr val="0F6E56"/>
-          </a:solidFill>
-          <a:ln/>
-        </p:spPr>
-      </p:sp>
-      <p:sp>
-        <p:nvSpPr>
-          <p:cNvPr id="12" name="Shape 9"/>
-          <p:cNvSpPr/>
-          <p:nvPr/>
-        </p:nvSpPr>
-        <p:spPr>
-          <a:xfrm>
-            <a:off x="2596896" y="2843784"/>
-            <a:ext cx="0" cy="283464"/>
-          </a:xfrm>
-          <a:prstGeom prst="line">
-            <a:avLst/>
-          </a:prstGeom>
-          <a:noFill/>
-          <a:ln w="19050">
+          <a:ln w="25400">
             <a:solidFill>
               <a:srgbClr val="0F6E56"/>
             </a:solidFill>
@@ -1216,33 +1330,194 @@
       </p:sp>
       <p:sp>
         <p:nvSpPr>
-          <p:cNvPr id="13" name="Shape 10"/>
-          <p:cNvSpPr/>
-          <p:nvPr/>
-        </p:nvSpPr>
-        <p:spPr>
-          <a:xfrm>
-            <a:off x="1947672" y="3017520"/>
-            <a:ext cx="1298448" cy="1225296"/>
+          <p:cNvPr id="19" name="Shape 16"/>
+          <p:cNvSpPr/>
+          <p:nvPr/>
+        </p:nvSpPr>
+        <p:spPr>
+          <a:xfrm>
+            <a:off x="1271016" y="2340864"/>
+            <a:ext cx="1316736" cy="292608"/>
           </a:xfrm>
           <a:prstGeom prst="roundRect">
             <a:avLst>
-              <a:gd name="adj" fmla="val 6716"/>
+              <a:gd name="adj" fmla="val 15625"/>
             </a:avLst>
           </a:prstGeom>
           <a:solidFill>
+            <a:srgbClr val="0F6E56"/>
+          </a:solidFill>
+          <a:ln/>
+          <a:effectLst>
+            <a:outerShdw sx="100000" sy="100000" kx="0" ky="0" algn="bl" rotWithShape="0" blurRad="50800" dist="25400" dir="5400000">
+              <a:srgbClr val="241D1A">
+                <a:alpha val="25000"/>
+              </a:srgbClr>
+            </a:outerShdw>
+          </a:effectLst>
+        </p:spPr>
+      </p:sp>
+      <p:sp>
+        <p:nvSpPr>
+          <p:cNvPr id="20" name="Text 17"/>
+          <p:cNvSpPr/>
+          <p:nvPr/>
+        </p:nvSpPr>
+        <p:spPr>
+          <a:xfrm>
+            <a:off x="1271016" y="2340864"/>
+            <a:ext cx="1316736" cy="292608"/>
+          </a:xfrm>
+          <a:prstGeom prst="rect">
+            <a:avLst/>
+          </a:prstGeom>
+          <a:noFill/>
+          <a:ln/>
+        </p:spPr>
+        <p:txBody>
+          <a:bodyPr wrap="square" lIns="0" tIns="0" rIns="0" bIns="0" rtlCol="0" anchor="ctr"/>
+          <a:lstStyle/>
+          <a:p>
+            <a:pPr algn="ctr" indent="0" marL="0">
+              <a:buNone/>
+            </a:pPr>
+            <a:r>
+              <a:rPr lang="en-US" sz="1150" b="1" spc="100" kern="0" dirty="0">
+                <a:solidFill>
+                  <a:srgbClr val="FFFFFF"/>
+                </a:solidFill>
+                <a:latin typeface="Arial" pitchFamily="34" charset="0"/>
+                <a:ea typeface="Arial" pitchFamily="34" charset="-122"/>
+                <a:cs typeface="Arial" pitchFamily="34" charset="-120"/>
+              </a:rPr>
+              <a:t>JUN 2026</a:t>
+            </a:r>
+            <a:endParaRPr lang="en-US" sz="1150" dirty="0"/>
+          </a:p>
+        </p:txBody>
+      </p:sp>
+      <p:sp>
+        <p:nvSpPr>
+          <p:cNvPr id="21" name="Text 18"/>
+          <p:cNvSpPr/>
+          <p:nvPr/>
+        </p:nvSpPr>
+        <p:spPr>
+          <a:xfrm>
+            <a:off x="996696" y="1371600"/>
+            <a:ext cx="1865376" cy="914400"/>
+          </a:xfrm>
+          <a:prstGeom prst="rect">
+            <a:avLst/>
+          </a:prstGeom>
+          <a:noFill/>
+          <a:ln/>
+        </p:spPr>
+        <p:txBody>
+          <a:bodyPr wrap="square" lIns="0" tIns="0" rIns="0" bIns="0" rtlCol="0" anchor="b"/>
+          <a:lstStyle/>
+          <a:p>
+            <a:pPr algn="ctr" indent="0" marL="0">
+              <a:buNone/>
+            </a:pPr>
+            <a:r>
+              <a:rPr lang="en-US" sz="1300" b="1" dirty="0">
+                <a:solidFill>
+                  <a:srgbClr val="241D1A"/>
+                </a:solidFill>
+                <a:latin typeface="Arial" pitchFamily="34" charset="0"/>
+                <a:ea typeface="Arial" pitchFamily="34" charset="-122"/>
+                <a:cs typeface="Arial" pitchFamily="34" charset="-120"/>
+              </a:rPr>
+              <a:t>La idea y el equipo</a:t>
+            </a:r>
+            <a:endParaRPr lang="en-US" sz="1300" dirty="0"/>
+          </a:p>
+          <a:p>
+            <a:pPr algn="ctr" indent="0" marL="0">
+              <a:buNone/>
+            </a:pPr>
+            <a:r>
+              <a:rPr lang="en-US" sz="950" i="1" dirty="0">
+                <a:solidFill>
+                  <a:srgbClr val="8A7F78"/>
+                </a:solidFill>
+                <a:latin typeface="Arial" pitchFamily="34" charset="0"/>
+                <a:ea typeface="Arial" pitchFamily="34" charset="-122"/>
+                <a:cs typeface="Arial" pitchFamily="34" charset="-120"/>
+              </a:rPr>
+              <a:t>Idea &amp; founding team</a:t>
+            </a:r>
+            <a:endParaRPr lang="en-US" sz="1300" dirty="0"/>
+          </a:p>
+          <a:p>
+            <a:pPr algn="ctr" indent="0" marL="0">
+              <a:buNone/>
+            </a:pPr>
+            <a:r>
+              <a:rPr lang="en-US" sz="850" dirty="0">
+                <a:solidFill>
+                  <a:srgbClr val="6E655D"/>
+                </a:solidFill>
+                <a:latin typeface="Arial" pitchFamily="34" charset="0"/>
+                <a:ea typeface="Arial" pitchFamily="34" charset="-122"/>
+                <a:cs typeface="Arial" pitchFamily="34" charset="-120"/>
+              </a:rPr>
+              <a:t>4 founders · ciencia del ciclo · stack lean</a:t>
+            </a:r>
+            <a:endParaRPr lang="en-US" sz="1300" dirty="0"/>
+          </a:p>
+        </p:txBody>
+      </p:sp>
+      <p:sp>
+        <p:nvSpPr>
+          <p:cNvPr id="22" name="Shape 19"/>
+          <p:cNvSpPr/>
+          <p:nvPr/>
+        </p:nvSpPr>
+        <p:spPr>
+          <a:xfrm>
+            <a:off x="3163824" y="3063240"/>
+            <a:ext cx="1097280" cy="1097280"/>
+          </a:xfrm>
+          <a:prstGeom prst="ellipse">
+            <a:avLst/>
+          </a:prstGeom>
+          <a:solidFill>
+            <a:srgbClr val="1F8A5E">
+              <a:alpha val="16000"/>
+            </a:srgbClr>
+          </a:solidFill>
+          <a:ln/>
+        </p:spPr>
+      </p:sp>
+      <p:sp>
+        <p:nvSpPr>
+          <p:cNvPr id="23" name="Shape 20"/>
+          <p:cNvSpPr/>
+          <p:nvPr/>
+        </p:nvSpPr>
+        <p:spPr>
+          <a:xfrm>
+            <a:off x="3227832" y="3127248"/>
+            <a:ext cx="969264" cy="969264"/>
+          </a:xfrm>
+          <a:prstGeom prst="ellipse">
+            <a:avLst/>
+          </a:prstGeom>
+          <a:solidFill>
             <a:srgbClr val="FFFFFF"/>
           </a:solidFill>
-          <a:ln w="12700">
+          <a:ln w="50800">
             <a:solidFill>
-              <a:srgbClr val="EFE3D7"/>
+              <a:srgbClr val="1F8A5E"/>
             </a:solidFill>
             <a:prstDash val="solid"/>
           </a:ln>
           <a:effectLst>
-            <a:outerShdw sx="100000" sy="100000" kx="0" ky="0" algn="bl" rotWithShape="0" blurRad="76200" dist="25400" dir="5400000">
-              <a:srgbClr val="D9C8B4">
-                <a:alpha val="35000"/>
+            <a:outerShdw sx="100000" sy="100000" kx="0" ky="0" algn="bl" rotWithShape="0" blurRad="114300" dist="38100" dir="5400000">
+              <a:srgbClr val="241D1A">
+                <a:alpha val="30000"/>
               </a:srgbClr>
             </a:outerShdw>
           </a:effectLst>
@@ -1250,7 +1525,7 @@
       </p:sp>
       <p:pic>
         <p:nvPicPr>
-          <p:cNvPr id="14" name="Image 1" descr="preencoded.png">    </p:cNvPr>
+          <p:cNvPr id="24" name="Image 1" descr="preencoded.png">    </p:cNvPr>
           <p:cNvPicPr>
             <a:picLocks noChangeAspect="1"/>
           </p:cNvPicPr>
@@ -1264,8 +1539,8 @@
         </p:blipFill>
         <p:spPr>
           <a:xfrm>
-            <a:off x="2359152" y="2743200"/>
-            <a:ext cx="475488" cy="475488"/>
+            <a:off x="3383280" y="3282696"/>
+            <a:ext cx="658368" cy="658368"/>
           </a:xfrm>
           <a:prstGeom prst="rect">
             <a:avLst/>
@@ -1274,36 +1549,39 @@
       </p:pic>
       <p:sp>
         <p:nvSpPr>
-          <p:cNvPr id="15" name="Shape 11"/>
-          <p:cNvSpPr/>
-          <p:nvPr/>
-        </p:nvSpPr>
-        <p:spPr>
-          <a:xfrm>
-            <a:off x="2075688" y="3236976"/>
-            <a:ext cx="1042416" cy="219456"/>
-          </a:xfrm>
-          <a:prstGeom prst="roundRect">
-            <a:avLst>
-              <a:gd name="adj" fmla="val 50000"/>
-            </a:avLst>
-          </a:prstGeom>
-          <a:solidFill>
-            <a:srgbClr val="0F6E56"/>
-          </a:solidFill>
-          <a:ln/>
-        </p:spPr>
-      </p:sp>
-      <p:sp>
-        <p:nvSpPr>
-          <p:cNvPr id="16" name="Text 12"/>
-          <p:cNvSpPr/>
-          <p:nvPr/>
-        </p:nvSpPr>
-        <p:spPr>
-          <a:xfrm>
-            <a:off x="2075688" y="3236976"/>
-            <a:ext cx="1042416" cy="219456"/>
+          <p:cNvPr id="25" name="Shape 21"/>
+          <p:cNvSpPr/>
+          <p:nvPr/>
+        </p:nvSpPr>
+        <p:spPr>
+          <a:xfrm>
+            <a:off x="3931920" y="3090672"/>
+            <a:ext cx="310896" cy="310896"/>
+          </a:xfrm>
+          <a:prstGeom prst="ellipse">
+            <a:avLst/>
+          </a:prstGeom>
+          <a:solidFill>
+            <a:srgbClr val="1F8A5E"/>
+          </a:solidFill>
+          <a:ln w="25400">
+            <a:solidFill>
+              <a:srgbClr val="FFFFFF"/>
+            </a:solidFill>
+            <a:prstDash val="solid"/>
+          </a:ln>
+        </p:spPr>
+      </p:sp>
+      <p:sp>
+        <p:nvSpPr>
+          <p:cNvPr id="26" name="Text 22"/>
+          <p:cNvSpPr/>
+          <p:nvPr/>
+        </p:nvSpPr>
+        <p:spPr>
+          <a:xfrm>
+            <a:off x="3931920" y="3090672"/>
+            <a:ext cx="310896" cy="310896"/>
           </a:xfrm>
           <a:prstGeom prst="rect">
             <a:avLst/>
@@ -1319,27 +1597,121 @@
               <a:buNone/>
             </a:pPr>
             <a:r>
-              <a:rPr lang="en-US" sz="950" b="1" dirty="0">
+              <a:rPr lang="en-US" sz="1200" b="1" dirty="0">
                 <a:solidFill>
                   <a:srgbClr val="FFFFFF"/>
                 </a:solidFill>
+                <a:latin typeface="Arial" pitchFamily="34" charset="0"/>
+                <a:ea typeface="Arial" pitchFamily="34" charset="-122"/>
+                <a:cs typeface="Arial" pitchFamily="34" charset="-120"/>
+              </a:rPr>
+              <a:t>2</a:t>
+            </a:r>
+            <a:endParaRPr lang="en-US" sz="1200" dirty="0"/>
+          </a:p>
+        </p:txBody>
+      </p:sp>
+      <p:sp>
+        <p:nvSpPr>
+          <p:cNvPr id="27" name="Shape 23"/>
+          <p:cNvSpPr/>
+          <p:nvPr/>
+        </p:nvSpPr>
+        <p:spPr>
+          <a:xfrm>
+            <a:off x="3712464" y="4114800"/>
+            <a:ext cx="0" cy="457200"/>
+          </a:xfrm>
+          <a:prstGeom prst="line">
+            <a:avLst/>
+          </a:prstGeom>
+          <a:noFill/>
+          <a:ln w="25400">
+            <a:solidFill>
+              <a:srgbClr val="1F8A5E"/>
+            </a:solidFill>
+            <a:prstDash val="dash"/>
+          </a:ln>
+        </p:spPr>
+      </p:sp>
+      <p:sp>
+        <p:nvSpPr>
+          <p:cNvPr id="28" name="Shape 24"/>
+          <p:cNvSpPr/>
+          <p:nvPr/>
+        </p:nvSpPr>
+        <p:spPr>
+          <a:xfrm>
+            <a:off x="3054096" y="4315968"/>
+            <a:ext cx="1316736" cy="292608"/>
+          </a:xfrm>
+          <a:prstGeom prst="roundRect">
+            <a:avLst>
+              <a:gd name="adj" fmla="val 15625"/>
+            </a:avLst>
+          </a:prstGeom>
+          <a:solidFill>
+            <a:srgbClr val="1F8A5E"/>
+          </a:solidFill>
+          <a:ln/>
+          <a:effectLst>
+            <a:outerShdw sx="100000" sy="100000" kx="0" ky="0" algn="bl" rotWithShape="0" blurRad="50800" dist="25400" dir="5400000">
+              <a:srgbClr val="241D1A">
+                <a:alpha val="25000"/>
+              </a:srgbClr>
+            </a:outerShdw>
+          </a:effectLst>
+        </p:spPr>
+      </p:sp>
+      <p:sp>
+        <p:nvSpPr>
+          <p:cNvPr id="29" name="Text 25"/>
+          <p:cNvSpPr/>
+          <p:nvPr/>
+        </p:nvSpPr>
+        <p:spPr>
+          <a:xfrm>
+            <a:off x="3054096" y="4315968"/>
+            <a:ext cx="1316736" cy="292608"/>
+          </a:xfrm>
+          <a:prstGeom prst="rect">
+            <a:avLst/>
+          </a:prstGeom>
+          <a:noFill/>
+          <a:ln/>
+        </p:spPr>
+        <p:txBody>
+          <a:bodyPr wrap="square" lIns="0" tIns="0" rIns="0" bIns="0" rtlCol="0" anchor="ctr"/>
+          <a:lstStyle/>
+          <a:p>
+            <a:pPr algn="ctr" indent="0" marL="0">
+              <a:buNone/>
+            </a:pPr>
+            <a:r>
+              <a:rPr lang="en-US" sz="1150" b="1" spc="100" kern="0" dirty="0">
+                <a:solidFill>
+                  <a:srgbClr val="FFFFFF"/>
+                </a:solidFill>
+                <a:latin typeface="Arial" pitchFamily="34" charset="0"/>
+                <a:ea typeface="Arial" pitchFamily="34" charset="-122"/>
+                <a:cs typeface="Arial" pitchFamily="34" charset="-120"/>
               </a:rPr>
               <a:t>JUL 2026</a:t>
             </a:r>
-            <a:endParaRPr lang="en-US" sz="950" dirty="0"/>
+            <a:endParaRPr lang="en-US" sz="1150" dirty="0"/>
           </a:p>
         </p:txBody>
       </p:sp>
       <p:sp>
         <p:nvSpPr>
-          <p:cNvPr id="17" name="Text 13"/>
-          <p:cNvSpPr/>
-          <p:nvPr/>
-        </p:nvSpPr>
-        <p:spPr>
-          <a:xfrm>
-            <a:off x="1993392" y="3493008"/>
-            <a:ext cx="1207008" cy="731520"/>
+          <p:cNvPr id="30" name="Text 26"/>
+          <p:cNvSpPr/>
+          <p:nvPr/>
+        </p:nvSpPr>
+        <p:spPr>
+          <a:xfrm>
+            <a:off x="2779776" y="4681728"/>
+            <a:ext cx="1865376" cy="914400"/>
           </a:xfrm>
           <a:prstGeom prst="rect">
             <a:avLst/>
@@ -1355,117 +1727,103 @@
               <a:buNone/>
             </a:pPr>
             <a:r>
-              <a:rPr lang="en-US" sz="1050" b="1" dirty="0">
+              <a:rPr lang="en-US" sz="1300" b="1" dirty="0">
                 <a:solidFill>
                   <a:srgbClr val="241D1A"/>
                 </a:solidFill>
+                <a:latin typeface="Arial" pitchFamily="34" charset="0"/>
+                <a:ea typeface="Arial" pitchFamily="34" charset="-122"/>
+                <a:cs typeface="Arial" pitchFamily="34" charset="-120"/>
               </a:rPr>
               <a:t>Se construye el producto</a:t>
             </a:r>
-            <a:endParaRPr lang="en-US" sz="1050" dirty="0"/>
+            <a:endParaRPr lang="en-US" sz="1300" dirty="0"/>
           </a:p>
           <a:p>
             <a:pPr algn="ctr" indent="0" marL="0">
               <a:buNone/>
             </a:pPr>
             <a:r>
-              <a:rPr lang="en-US" sz="800" i="1" dirty="0">
+              <a:rPr lang="en-US" sz="950" i="1" dirty="0">
                 <a:solidFill>
                   <a:srgbClr val="8A7F78"/>
                 </a:solidFill>
+                <a:latin typeface="Arial" pitchFamily="34" charset="0"/>
+                <a:ea typeface="Arial" pitchFamily="34" charset="-122"/>
+                <a:cs typeface="Arial" pitchFamily="34" charset="-120"/>
               </a:rPr>
               <a:t>Building the product</a:t>
             </a:r>
-            <a:endParaRPr lang="en-US" sz="1050" dirty="0"/>
+            <a:endParaRPr lang="en-US" sz="1300" dirty="0"/>
           </a:p>
           <a:p>
             <a:pPr algn="ctr" indent="0" marL="0">
               <a:buNone/>
             </a:pPr>
             <a:r>
-              <a:rPr lang="en-US" sz="750" dirty="0">
+              <a:rPr lang="en-US" sz="850" dirty="0">
                 <a:solidFill>
                   <a:srgbClr val="6E655D"/>
                 </a:solidFill>
+                <a:latin typeface="Arial" pitchFamily="34" charset="0"/>
+                <a:ea typeface="Arial" pitchFamily="34" charset="-122"/>
+                <a:cs typeface="Arial" pitchFamily="34" charset="-120"/>
               </a:rPr>
               <a:t>App iOS/Android + PWA + web · 14 idiomas</a:t>
             </a:r>
-            <a:endParaRPr lang="en-US" sz="1050" dirty="0"/>
+            <a:endParaRPr lang="en-US" sz="1300" dirty="0"/>
           </a:p>
         </p:txBody>
       </p:sp>
       <p:sp>
         <p:nvSpPr>
-          <p:cNvPr id="18" name="Shape 14"/>
-          <p:cNvSpPr/>
-          <p:nvPr/>
-        </p:nvSpPr>
-        <p:spPr>
-          <a:xfrm>
-            <a:off x="3895344" y="2679192"/>
-            <a:ext cx="164592" cy="164592"/>
+          <p:cNvPr id="31" name="Shape 27"/>
+          <p:cNvSpPr/>
+          <p:nvPr/>
+        </p:nvSpPr>
+        <p:spPr>
+          <a:xfrm>
+            <a:off x="4946904" y="3063240"/>
+            <a:ext cx="1097280" cy="1097280"/>
           </a:xfrm>
           <a:prstGeom prst="ellipse">
             <a:avLst/>
           </a:prstGeom>
           <a:solidFill>
-            <a:srgbClr val="FF7600"/>
-          </a:solidFill>
-          <a:ln/>
-        </p:spPr>
-      </p:sp>
-      <p:sp>
-        <p:nvSpPr>
-          <p:cNvPr id="19" name="Shape 15"/>
-          <p:cNvSpPr/>
-          <p:nvPr/>
-        </p:nvSpPr>
-        <p:spPr>
-          <a:xfrm>
-            <a:off x="3977640" y="2395728"/>
-            <a:ext cx="0" cy="283464"/>
-          </a:xfrm>
-          <a:prstGeom prst="line">
-            <a:avLst/>
-          </a:prstGeom>
-          <a:noFill/>
-          <a:ln w="19050">
+            <a:srgbClr val="FF7600">
+              <a:alpha val="16000"/>
+            </a:srgbClr>
+          </a:solidFill>
+          <a:ln/>
+        </p:spPr>
+      </p:sp>
+      <p:sp>
+        <p:nvSpPr>
+          <p:cNvPr id="32" name="Shape 28"/>
+          <p:cNvSpPr/>
+          <p:nvPr/>
+        </p:nvSpPr>
+        <p:spPr>
+          <a:xfrm>
+            <a:off x="5010912" y="3127248"/>
+            <a:ext cx="969264" cy="969264"/>
+          </a:xfrm>
+          <a:prstGeom prst="ellipse">
+            <a:avLst/>
+          </a:prstGeom>
+          <a:solidFill>
+            <a:srgbClr val="FFFFFF"/>
+          </a:solidFill>
+          <a:ln w="50800">
             <a:solidFill>
               <a:srgbClr val="FF7600"/>
-            </a:solidFill>
-            <a:prstDash val="dash"/>
-          </a:ln>
-        </p:spPr>
-      </p:sp>
-      <p:sp>
-        <p:nvSpPr>
-          <p:cNvPr id="20" name="Shape 16"/>
-          <p:cNvSpPr/>
-          <p:nvPr/>
-        </p:nvSpPr>
-        <p:spPr>
-          <a:xfrm>
-            <a:off x="3328416" y="1170432"/>
-            <a:ext cx="1298448" cy="1225296"/>
-          </a:xfrm>
-          <a:prstGeom prst="roundRect">
-            <a:avLst>
-              <a:gd name="adj" fmla="val 6716"/>
-            </a:avLst>
-          </a:prstGeom>
-          <a:solidFill>
-            <a:srgbClr val="FFFFFF"/>
-          </a:solidFill>
-          <a:ln w="12700">
-            <a:solidFill>
-              <a:srgbClr val="EFE3D7"/>
             </a:solidFill>
             <a:prstDash val="solid"/>
           </a:ln>
           <a:effectLst>
-            <a:outerShdw sx="100000" sy="100000" kx="0" ky="0" algn="bl" rotWithShape="0" blurRad="76200" dist="25400" dir="5400000">
-              <a:srgbClr val="D9C8B4">
-                <a:alpha val="35000"/>
+            <a:outerShdw sx="100000" sy="100000" kx="0" ky="0" algn="bl" rotWithShape="0" blurRad="114300" dist="38100" dir="5400000">
+              <a:srgbClr val="241D1A">
+                <a:alpha val="30000"/>
               </a:srgbClr>
             </a:outerShdw>
           </a:effectLst>
@@ -1473,7 +1831,7 @@
       </p:sp>
       <p:pic>
         <p:nvPicPr>
-          <p:cNvPr id="21" name="Image 2" descr="preencoded.png">    </p:cNvPr>
+          <p:cNvPr id="33" name="Image 2" descr="preencoded.png">    </p:cNvPr>
           <p:cNvPicPr>
             <a:picLocks noChangeAspect="1"/>
           </p:cNvPicPr>
@@ -1487,8 +1845,8 @@
         </p:blipFill>
         <p:spPr>
           <a:xfrm>
-            <a:off x="3739896" y="896112"/>
-            <a:ext cx="475488" cy="475488"/>
+            <a:off x="5166360" y="3282696"/>
+            <a:ext cx="658368" cy="658368"/>
           </a:xfrm>
           <a:prstGeom prst="rect">
             <a:avLst/>
@@ -1497,36 +1855,39 @@
       </p:pic>
       <p:sp>
         <p:nvSpPr>
-          <p:cNvPr id="22" name="Shape 17"/>
-          <p:cNvSpPr/>
-          <p:nvPr/>
-        </p:nvSpPr>
-        <p:spPr>
-          <a:xfrm>
-            <a:off x="3456432" y="1389888"/>
-            <a:ext cx="1042416" cy="219456"/>
-          </a:xfrm>
-          <a:prstGeom prst="roundRect">
-            <a:avLst>
-              <a:gd name="adj" fmla="val 50000"/>
-            </a:avLst>
+          <p:cNvPr id="34" name="Shape 29"/>
+          <p:cNvSpPr/>
+          <p:nvPr/>
+        </p:nvSpPr>
+        <p:spPr>
+          <a:xfrm>
+            <a:off x="5715000" y="3090672"/>
+            <a:ext cx="310896" cy="310896"/>
+          </a:xfrm>
+          <a:prstGeom prst="ellipse">
+            <a:avLst/>
           </a:prstGeom>
           <a:solidFill>
             <a:srgbClr val="FF7600"/>
           </a:solidFill>
-          <a:ln/>
-        </p:spPr>
-      </p:sp>
-      <p:sp>
-        <p:nvSpPr>
-          <p:cNvPr id="23" name="Text 18"/>
-          <p:cNvSpPr/>
-          <p:nvPr/>
-        </p:nvSpPr>
-        <p:spPr>
-          <a:xfrm>
-            <a:off x="3456432" y="1389888"/>
-            <a:ext cx="1042416" cy="219456"/>
+          <a:ln w="25400">
+            <a:solidFill>
+              <a:srgbClr val="FFFFFF"/>
+            </a:solidFill>
+            <a:prstDash val="solid"/>
+          </a:ln>
+        </p:spPr>
+      </p:sp>
+      <p:sp>
+        <p:nvSpPr>
+          <p:cNvPr id="35" name="Text 30"/>
+          <p:cNvSpPr/>
+          <p:nvPr/>
+        </p:nvSpPr>
+        <p:spPr>
+          <a:xfrm>
+            <a:off x="5715000" y="3090672"/>
+            <a:ext cx="310896" cy="310896"/>
           </a:xfrm>
           <a:prstGeom prst="rect">
             <a:avLst/>
@@ -1542,117 +1903,36 @@
               <a:buNone/>
             </a:pPr>
             <a:r>
-              <a:rPr lang="en-US" sz="950" b="1" dirty="0">
+              <a:rPr lang="en-US" sz="1200" b="1" dirty="0">
                 <a:solidFill>
                   <a:srgbClr val="FFFFFF"/>
                 </a:solidFill>
-              </a:rPr>
-              <a:t>AGO 2026</a:t>
-            </a:r>
-            <a:endParaRPr lang="en-US" sz="950" dirty="0"/>
+                <a:latin typeface="Arial" pitchFamily="34" charset="0"/>
+                <a:ea typeface="Arial" pitchFamily="34" charset="-122"/>
+                <a:cs typeface="Arial" pitchFamily="34" charset="-120"/>
+              </a:rPr>
+              <a:t>3</a:t>
+            </a:r>
+            <a:endParaRPr lang="en-US" sz="1200" dirty="0"/>
           </a:p>
         </p:txBody>
       </p:sp>
       <p:sp>
         <p:nvSpPr>
-          <p:cNvPr id="24" name="Text 19"/>
-          <p:cNvSpPr/>
-          <p:nvPr/>
-        </p:nvSpPr>
-        <p:spPr>
-          <a:xfrm>
-            <a:off x="3374136" y="1645920"/>
-            <a:ext cx="1207008" cy="731520"/>
-          </a:xfrm>
-          <a:prstGeom prst="rect">
+          <p:cNvPr id="36" name="Shape 31"/>
+          <p:cNvSpPr/>
+          <p:nvPr/>
+        </p:nvSpPr>
+        <p:spPr>
+          <a:xfrm>
+            <a:off x="5495544" y="2670048"/>
+            <a:ext cx="0" cy="457200"/>
+          </a:xfrm>
+          <a:prstGeom prst="line">
             <a:avLst/>
           </a:prstGeom>
           <a:noFill/>
-          <a:ln/>
-        </p:spPr>
-        <p:txBody>
-          <a:bodyPr wrap="square" lIns="0" tIns="0" rIns="0" bIns="0" rtlCol="0" anchor="t"/>
-          <a:lstStyle/>
-          <a:p>
-            <a:pPr algn="ctr" indent="0" marL="0">
-              <a:buNone/>
-            </a:pPr>
-            <a:r>
-              <a:rPr lang="en-US" sz="1050" b="1" dirty="0">
-                <a:solidFill>
-                  <a:srgbClr val="241D1A"/>
-                </a:solidFill>
-              </a:rPr>
-              <a:t>Piloto real en 2 stores</a:t>
-            </a:r>
-            <a:endParaRPr lang="en-US" sz="1050" dirty="0"/>
-          </a:p>
-          <a:p>
-            <a:pPr algn="ctr" indent="0" marL="0">
-              <a:buNone/>
-            </a:pPr>
-            <a:r>
-              <a:rPr lang="en-US" sz="800" i="1" dirty="0">
-                <a:solidFill>
-                  <a:srgbClr val="8A7F78"/>
-                </a:solidFill>
-              </a:rPr>
-              <a:t>Live pilot on both stores</a:t>
-            </a:r>
-            <a:endParaRPr lang="en-US" sz="1050" dirty="0"/>
-          </a:p>
-          <a:p>
-            <a:pPr algn="ctr" indent="0" marL="0">
-              <a:buNone/>
-            </a:pPr>
-            <a:r>
-              <a:rPr lang="en-US" sz="750" dirty="0">
-                <a:solidFill>
-                  <a:srgbClr val="6E655D"/>
-                </a:solidFill>
-              </a:rPr>
-              <a:t>32 testers · consentimiento · v0.20</a:t>
-            </a:r>
-            <a:endParaRPr lang="en-US" sz="1050" dirty="0"/>
-          </a:p>
-        </p:txBody>
-      </p:sp>
-      <p:sp>
-        <p:nvSpPr>
-          <p:cNvPr id="25" name="Shape 20"/>
-          <p:cNvSpPr/>
-          <p:nvPr/>
-        </p:nvSpPr>
-        <p:spPr>
-          <a:xfrm>
-            <a:off x="5276088" y="2679192"/>
-            <a:ext cx="164592" cy="164592"/>
-          </a:xfrm>
-          <a:prstGeom prst="ellipse">
-            <a:avLst/>
-          </a:prstGeom>
-          <a:solidFill>
-            <a:srgbClr val="FF7600"/>
-          </a:solidFill>
-          <a:ln/>
-        </p:spPr>
-      </p:sp>
-      <p:sp>
-        <p:nvSpPr>
-          <p:cNvPr id="26" name="Shape 21"/>
-          <p:cNvSpPr/>
-          <p:nvPr/>
-        </p:nvSpPr>
-        <p:spPr>
-          <a:xfrm>
-            <a:off x="5358384" y="2843784"/>
-            <a:ext cx="0" cy="283464"/>
-          </a:xfrm>
-          <a:prstGeom prst="line">
-            <a:avLst/>
-          </a:prstGeom>
-          <a:noFill/>
-          <a:ln w="19050">
+          <a:ln w="25400">
             <a:solidFill>
               <a:srgbClr val="FF7600"/>
             </a:solidFill>
@@ -1662,33 +1942,194 @@
       </p:sp>
       <p:sp>
         <p:nvSpPr>
-          <p:cNvPr id="27" name="Shape 22"/>
-          <p:cNvSpPr/>
-          <p:nvPr/>
-        </p:nvSpPr>
-        <p:spPr>
-          <a:xfrm>
-            <a:off x="4709160" y="3017520"/>
-            <a:ext cx="1298448" cy="1225296"/>
+          <p:cNvPr id="37" name="Shape 32"/>
+          <p:cNvSpPr/>
+          <p:nvPr/>
+        </p:nvSpPr>
+        <p:spPr>
+          <a:xfrm>
+            <a:off x="4837176" y="2340864"/>
+            <a:ext cx="1316736" cy="292608"/>
           </a:xfrm>
           <a:prstGeom prst="roundRect">
             <a:avLst>
-              <a:gd name="adj" fmla="val 6716"/>
+              <a:gd name="adj" fmla="val 15625"/>
             </a:avLst>
           </a:prstGeom>
           <a:solidFill>
+            <a:srgbClr val="FF7600"/>
+          </a:solidFill>
+          <a:ln/>
+          <a:effectLst>
+            <a:outerShdw sx="100000" sy="100000" kx="0" ky="0" algn="bl" rotWithShape="0" blurRad="50800" dist="25400" dir="5400000">
+              <a:srgbClr val="241D1A">
+                <a:alpha val="25000"/>
+              </a:srgbClr>
+            </a:outerShdw>
+          </a:effectLst>
+        </p:spPr>
+      </p:sp>
+      <p:sp>
+        <p:nvSpPr>
+          <p:cNvPr id="38" name="Text 33"/>
+          <p:cNvSpPr/>
+          <p:nvPr/>
+        </p:nvSpPr>
+        <p:spPr>
+          <a:xfrm>
+            <a:off x="4837176" y="2340864"/>
+            <a:ext cx="1316736" cy="292608"/>
+          </a:xfrm>
+          <a:prstGeom prst="rect">
+            <a:avLst/>
+          </a:prstGeom>
+          <a:noFill/>
+          <a:ln/>
+        </p:spPr>
+        <p:txBody>
+          <a:bodyPr wrap="square" lIns="0" tIns="0" rIns="0" bIns="0" rtlCol="0" anchor="ctr"/>
+          <a:lstStyle/>
+          <a:p>
+            <a:pPr algn="ctr" indent="0" marL="0">
+              <a:buNone/>
+            </a:pPr>
+            <a:r>
+              <a:rPr lang="en-US" sz="1150" b="1" spc="100" kern="0" dirty="0">
+                <a:solidFill>
+                  <a:srgbClr val="FFFFFF"/>
+                </a:solidFill>
+                <a:latin typeface="Arial" pitchFamily="34" charset="0"/>
+                <a:ea typeface="Arial" pitchFamily="34" charset="-122"/>
+                <a:cs typeface="Arial" pitchFamily="34" charset="-120"/>
+              </a:rPr>
+              <a:t>AGO 2026</a:t>
+            </a:r>
+            <a:endParaRPr lang="en-US" sz="1150" dirty="0"/>
+          </a:p>
+        </p:txBody>
+      </p:sp>
+      <p:sp>
+        <p:nvSpPr>
+          <p:cNvPr id="39" name="Text 34"/>
+          <p:cNvSpPr/>
+          <p:nvPr/>
+        </p:nvSpPr>
+        <p:spPr>
+          <a:xfrm>
+            <a:off x="4562856" y="1371600"/>
+            <a:ext cx="1865376" cy="914400"/>
+          </a:xfrm>
+          <a:prstGeom prst="rect">
+            <a:avLst/>
+          </a:prstGeom>
+          <a:noFill/>
+          <a:ln/>
+        </p:spPr>
+        <p:txBody>
+          <a:bodyPr wrap="square" lIns="0" tIns="0" rIns="0" bIns="0" rtlCol="0" anchor="b"/>
+          <a:lstStyle/>
+          <a:p>
+            <a:pPr algn="ctr" indent="0" marL="0">
+              <a:buNone/>
+            </a:pPr>
+            <a:r>
+              <a:rPr lang="en-US" sz="1300" b="1" dirty="0">
+                <a:solidFill>
+                  <a:srgbClr val="241D1A"/>
+                </a:solidFill>
+                <a:latin typeface="Arial" pitchFamily="34" charset="0"/>
+                <a:ea typeface="Arial" pitchFamily="34" charset="-122"/>
+                <a:cs typeface="Arial" pitchFamily="34" charset="-120"/>
+              </a:rPr>
+              <a:t>Piloto real en 2 stores</a:t>
+            </a:r>
+            <a:endParaRPr lang="en-US" sz="1300" dirty="0"/>
+          </a:p>
+          <a:p>
+            <a:pPr algn="ctr" indent="0" marL="0">
+              <a:buNone/>
+            </a:pPr>
+            <a:r>
+              <a:rPr lang="en-US" sz="950" i="1" dirty="0">
+                <a:solidFill>
+                  <a:srgbClr val="8A7F78"/>
+                </a:solidFill>
+                <a:latin typeface="Arial" pitchFamily="34" charset="0"/>
+                <a:ea typeface="Arial" pitchFamily="34" charset="-122"/>
+                <a:cs typeface="Arial" pitchFamily="34" charset="-120"/>
+              </a:rPr>
+              <a:t>Live pilot on both stores</a:t>
+            </a:r>
+            <a:endParaRPr lang="en-US" sz="1300" dirty="0"/>
+          </a:p>
+          <a:p>
+            <a:pPr algn="ctr" indent="0" marL="0">
+              <a:buNone/>
+            </a:pPr>
+            <a:r>
+              <a:rPr lang="en-US" sz="850" dirty="0">
+                <a:solidFill>
+                  <a:srgbClr val="6E655D"/>
+                </a:solidFill>
+                <a:latin typeface="Arial" pitchFamily="34" charset="0"/>
+                <a:ea typeface="Arial" pitchFamily="34" charset="-122"/>
+                <a:cs typeface="Arial" pitchFamily="34" charset="-120"/>
+              </a:rPr>
+              <a:t>32 testers · consentimiento auditable · v0.20</a:t>
+            </a:r>
+            <a:endParaRPr lang="en-US" sz="1300" dirty="0"/>
+          </a:p>
+        </p:txBody>
+      </p:sp>
+      <p:sp>
+        <p:nvSpPr>
+          <p:cNvPr id="40" name="Shape 35"/>
+          <p:cNvSpPr/>
+          <p:nvPr/>
+        </p:nvSpPr>
+        <p:spPr>
+          <a:xfrm>
+            <a:off x="6729984" y="3063240"/>
+            <a:ext cx="1097280" cy="1097280"/>
+          </a:xfrm>
+          <a:prstGeom prst="ellipse">
+            <a:avLst/>
+          </a:prstGeom>
+          <a:solidFill>
+            <a:srgbClr val="F59E0B">
+              <a:alpha val="16000"/>
+            </a:srgbClr>
+          </a:solidFill>
+          <a:ln/>
+        </p:spPr>
+      </p:sp>
+      <p:sp>
+        <p:nvSpPr>
+          <p:cNvPr id="41" name="Shape 36"/>
+          <p:cNvSpPr/>
+          <p:nvPr/>
+        </p:nvSpPr>
+        <p:spPr>
+          <a:xfrm>
+            <a:off x="6793992" y="3127248"/>
+            <a:ext cx="969264" cy="969264"/>
+          </a:xfrm>
+          <a:prstGeom prst="ellipse">
+            <a:avLst/>
+          </a:prstGeom>
+          <a:solidFill>
             <a:srgbClr val="FFFFFF"/>
           </a:solidFill>
-          <a:ln w="12700">
+          <a:ln w="50800">
             <a:solidFill>
-              <a:srgbClr val="EFE3D7"/>
+              <a:srgbClr val="F59E0B"/>
             </a:solidFill>
             <a:prstDash val="solid"/>
           </a:ln>
           <a:effectLst>
-            <a:outerShdw sx="100000" sy="100000" kx="0" ky="0" algn="bl" rotWithShape="0" blurRad="76200" dist="25400" dir="5400000">
-              <a:srgbClr val="D9C8B4">
-                <a:alpha val="35000"/>
+            <a:outerShdw sx="100000" sy="100000" kx="0" ky="0" algn="bl" rotWithShape="0" blurRad="114300" dist="38100" dir="5400000">
+              <a:srgbClr val="241D1A">
+                <a:alpha val="30000"/>
               </a:srgbClr>
             </a:outerShdw>
           </a:effectLst>
@@ -1696,7 +2137,7 @@
       </p:sp>
       <p:pic>
         <p:nvPicPr>
-          <p:cNvPr id="28" name="Image 3" descr="preencoded.png">    </p:cNvPr>
+          <p:cNvPr id="42" name="Image 3" descr="preencoded.png">    </p:cNvPr>
           <p:cNvPicPr>
             <a:picLocks noChangeAspect="1"/>
           </p:cNvPicPr>
@@ -1710,8 +2151,8 @@
         </p:blipFill>
         <p:spPr>
           <a:xfrm>
-            <a:off x="5120640" y="2743200"/>
-            <a:ext cx="475488" cy="475488"/>
+            <a:off x="6949440" y="3282696"/>
+            <a:ext cx="658368" cy="658368"/>
           </a:xfrm>
           <a:prstGeom prst="rect">
             <a:avLst/>
@@ -1720,36 +2161,39 @@
       </p:pic>
       <p:sp>
         <p:nvSpPr>
-          <p:cNvPr id="29" name="Shape 23"/>
-          <p:cNvSpPr/>
-          <p:nvPr/>
-        </p:nvSpPr>
-        <p:spPr>
-          <a:xfrm>
-            <a:off x="4837176" y="3236976"/>
-            <a:ext cx="1042416" cy="219456"/>
-          </a:xfrm>
-          <a:prstGeom prst="roundRect">
-            <a:avLst>
-              <a:gd name="adj" fmla="val 50000"/>
-            </a:avLst>
-          </a:prstGeom>
-          <a:solidFill>
-            <a:srgbClr val="FF7600"/>
-          </a:solidFill>
-          <a:ln/>
-        </p:spPr>
-      </p:sp>
-      <p:sp>
-        <p:nvSpPr>
-          <p:cNvPr id="30" name="Text 24"/>
-          <p:cNvSpPr/>
-          <p:nvPr/>
-        </p:nvSpPr>
-        <p:spPr>
-          <a:xfrm>
-            <a:off x="4837176" y="3236976"/>
-            <a:ext cx="1042416" cy="219456"/>
+          <p:cNvPr id="43" name="Shape 37"/>
+          <p:cNvSpPr/>
+          <p:nvPr/>
+        </p:nvSpPr>
+        <p:spPr>
+          <a:xfrm>
+            <a:off x="7498080" y="3090672"/>
+            <a:ext cx="310896" cy="310896"/>
+          </a:xfrm>
+          <a:prstGeom prst="ellipse">
+            <a:avLst/>
+          </a:prstGeom>
+          <a:solidFill>
+            <a:srgbClr val="F59E0B"/>
+          </a:solidFill>
+          <a:ln w="25400">
+            <a:solidFill>
+              <a:srgbClr val="FFFFFF"/>
+            </a:solidFill>
+            <a:prstDash val="solid"/>
+          </a:ln>
+        </p:spPr>
+      </p:sp>
+      <p:sp>
+        <p:nvSpPr>
+          <p:cNvPr id="44" name="Text 38"/>
+          <p:cNvSpPr/>
+          <p:nvPr/>
+        </p:nvSpPr>
+        <p:spPr>
+          <a:xfrm>
+            <a:off x="7498080" y="3090672"/>
+            <a:ext cx="310896" cy="310896"/>
           </a:xfrm>
           <a:prstGeom prst="rect">
             <a:avLst/>
@@ -1765,27 +2209,121 @@
               <a:buNone/>
             </a:pPr>
             <a:r>
-              <a:rPr lang="en-US" sz="950" b="1" dirty="0">
+              <a:rPr lang="en-US" sz="1200" b="1" dirty="0">
                 <a:solidFill>
                   <a:srgbClr val="FFFFFF"/>
                 </a:solidFill>
+                <a:latin typeface="Arial" pitchFamily="34" charset="0"/>
+                <a:ea typeface="Arial" pitchFamily="34" charset="-122"/>
+                <a:cs typeface="Arial" pitchFamily="34" charset="-120"/>
+              </a:rPr>
+              <a:t>4</a:t>
+            </a:r>
+            <a:endParaRPr lang="en-US" sz="1200" dirty="0"/>
+          </a:p>
+        </p:txBody>
+      </p:sp>
+      <p:sp>
+        <p:nvSpPr>
+          <p:cNvPr id="45" name="Shape 39"/>
+          <p:cNvSpPr/>
+          <p:nvPr/>
+        </p:nvSpPr>
+        <p:spPr>
+          <a:xfrm>
+            <a:off x="7278624" y="4114800"/>
+            <a:ext cx="0" cy="457200"/>
+          </a:xfrm>
+          <a:prstGeom prst="line">
+            <a:avLst/>
+          </a:prstGeom>
+          <a:noFill/>
+          <a:ln w="25400">
+            <a:solidFill>
+              <a:srgbClr val="F59E0B"/>
+            </a:solidFill>
+            <a:prstDash val="dash"/>
+          </a:ln>
+        </p:spPr>
+      </p:sp>
+      <p:sp>
+        <p:nvSpPr>
+          <p:cNvPr id="46" name="Shape 40"/>
+          <p:cNvSpPr/>
+          <p:nvPr/>
+        </p:nvSpPr>
+        <p:spPr>
+          <a:xfrm>
+            <a:off x="6620256" y="4315968"/>
+            <a:ext cx="1316736" cy="292608"/>
+          </a:xfrm>
+          <a:prstGeom prst="roundRect">
+            <a:avLst>
+              <a:gd name="adj" fmla="val 15625"/>
+            </a:avLst>
+          </a:prstGeom>
+          <a:solidFill>
+            <a:srgbClr val="F59E0B"/>
+          </a:solidFill>
+          <a:ln/>
+          <a:effectLst>
+            <a:outerShdw sx="100000" sy="100000" kx="0" ky="0" algn="bl" rotWithShape="0" blurRad="50800" dist="25400" dir="5400000">
+              <a:srgbClr val="241D1A">
+                <a:alpha val="25000"/>
+              </a:srgbClr>
+            </a:outerShdw>
+          </a:effectLst>
+        </p:spPr>
+      </p:sp>
+      <p:sp>
+        <p:nvSpPr>
+          <p:cNvPr id="47" name="Text 41"/>
+          <p:cNvSpPr/>
+          <p:nvPr/>
+        </p:nvSpPr>
+        <p:spPr>
+          <a:xfrm>
+            <a:off x="6620256" y="4315968"/>
+            <a:ext cx="1316736" cy="292608"/>
+          </a:xfrm>
+          <a:prstGeom prst="rect">
+            <a:avLst/>
+          </a:prstGeom>
+          <a:noFill/>
+          <a:ln/>
+        </p:spPr>
+        <p:txBody>
+          <a:bodyPr wrap="square" lIns="0" tIns="0" rIns="0" bIns="0" rtlCol="0" anchor="ctr"/>
+          <a:lstStyle/>
+          <a:p>
+            <a:pPr algn="ctr" indent="0" marL="0">
+              <a:buNone/>
+            </a:pPr>
+            <a:r>
+              <a:rPr lang="en-US" sz="1150" b="1" spc="100" kern="0" dirty="0">
+                <a:solidFill>
+                  <a:srgbClr val="FFFFFF"/>
+                </a:solidFill>
+                <a:latin typeface="Arial" pitchFamily="34" charset="0"/>
+                <a:ea typeface="Arial" pitchFamily="34" charset="-122"/>
+                <a:cs typeface="Arial" pitchFamily="34" charset="-120"/>
               </a:rPr>
               <a:t>SEP 2026</a:t>
             </a:r>
-            <a:endParaRPr lang="en-US" sz="950" dirty="0"/>
+            <a:endParaRPr lang="en-US" sz="1150" dirty="0"/>
           </a:p>
         </p:txBody>
       </p:sp>
       <p:sp>
         <p:nvSpPr>
-          <p:cNvPr id="31" name="Text 25"/>
-          <p:cNvSpPr/>
-          <p:nvPr/>
-        </p:nvSpPr>
-        <p:spPr>
-          <a:xfrm>
-            <a:off x="4754880" y="3493008"/>
-            <a:ext cx="1207008" cy="731520"/>
+          <p:cNvPr id="48" name="Text 42"/>
+          <p:cNvSpPr/>
+          <p:nvPr/>
+        </p:nvSpPr>
+        <p:spPr>
+          <a:xfrm>
+            <a:off x="6345936" y="4681728"/>
+            <a:ext cx="1865376" cy="914400"/>
           </a:xfrm>
           <a:prstGeom prst="rect">
             <a:avLst/>
@@ -1801,117 +2339,103 @@
               <a:buNone/>
             </a:pPr>
             <a:r>
-              <a:rPr lang="en-US" sz="1050" b="1" dirty="0">
+              <a:rPr lang="en-US" sz="1300" b="1" dirty="0">
                 <a:solidFill>
                   <a:srgbClr val="241D1A"/>
                 </a:solidFill>
+                <a:latin typeface="Arial" pitchFamily="34" charset="0"/>
+                <a:ea typeface="Arial" pitchFamily="34" charset="-122"/>
+                <a:cs typeface="Arial" pitchFamily="34" charset="-120"/>
               </a:rPr>
               <a:t>Piloto ampliado + pagos</a:t>
             </a:r>
-            <a:endParaRPr lang="en-US" sz="1050" dirty="0"/>
+            <a:endParaRPr lang="en-US" sz="1300" dirty="0"/>
           </a:p>
           <a:p>
             <a:pPr algn="ctr" indent="0" marL="0">
               <a:buNone/>
             </a:pPr>
             <a:r>
-              <a:rPr lang="en-US" sz="800" i="1" dirty="0">
+              <a:rPr lang="en-US" sz="950" i="1" dirty="0">
                 <a:solidFill>
                   <a:srgbClr val="8A7F78"/>
                 </a:solidFill>
+                <a:latin typeface="Arial" pitchFamily="34" charset="0"/>
+                <a:ea typeface="Arial" pitchFamily="34" charset="-122"/>
+                <a:cs typeface="Arial" pitchFamily="34" charset="-120"/>
               </a:rPr>
               <a:t>Expanded pilot + payments</a:t>
             </a:r>
-            <a:endParaRPr lang="en-US" sz="1050" dirty="0"/>
+            <a:endParaRPr lang="en-US" sz="1300" dirty="0"/>
           </a:p>
           <a:p>
             <a:pPr algn="ctr" indent="0" marL="0">
               <a:buNone/>
             </a:pPr>
             <a:r>
-              <a:rPr lang="en-US" sz="750" dirty="0">
+              <a:rPr lang="en-US" sz="850" dirty="0">
                 <a:solidFill>
                   <a:srgbClr val="6E655D"/>
                 </a:solidFill>
-              </a:rPr>
-              <a:t>Fase 1 y 2 · legal · fichas stores</a:t>
-            </a:r>
-            <a:endParaRPr lang="en-US" sz="1050" dirty="0"/>
+                <a:latin typeface="Arial" pitchFamily="34" charset="0"/>
+                <a:ea typeface="Arial" pitchFamily="34" charset="-122"/>
+                <a:cs typeface="Arial" pitchFamily="34" charset="-120"/>
+              </a:rPr>
+              <a:t>Fases 1-2 · legal publicado · fichas stores</a:t>
+            </a:r>
+            <a:endParaRPr lang="en-US" sz="1300" dirty="0"/>
           </a:p>
         </p:txBody>
       </p:sp>
       <p:sp>
         <p:nvSpPr>
-          <p:cNvPr id="32" name="Shape 26"/>
-          <p:cNvSpPr/>
-          <p:nvPr/>
-        </p:nvSpPr>
-        <p:spPr>
-          <a:xfrm>
-            <a:off x="6656832" y="2679192"/>
-            <a:ext cx="164592" cy="164592"/>
+          <p:cNvPr id="49" name="Shape 43"/>
+          <p:cNvSpPr/>
+          <p:nvPr/>
+        </p:nvSpPr>
+        <p:spPr>
+          <a:xfrm>
+            <a:off x="8513064" y="3063240"/>
+            <a:ext cx="1097280" cy="1097280"/>
           </a:xfrm>
           <a:prstGeom prst="ellipse">
             <a:avLst/>
           </a:prstGeom>
           <a:solidFill>
-            <a:srgbClr val="FD400C"/>
-          </a:solidFill>
-          <a:ln/>
-        </p:spPr>
-      </p:sp>
-      <p:sp>
-        <p:nvSpPr>
-          <p:cNvPr id="33" name="Shape 27"/>
-          <p:cNvSpPr/>
-          <p:nvPr/>
-        </p:nvSpPr>
-        <p:spPr>
-          <a:xfrm>
-            <a:off x="6739128" y="2395728"/>
-            <a:ext cx="0" cy="283464"/>
-          </a:xfrm>
-          <a:prstGeom prst="line">
-            <a:avLst/>
-          </a:prstGeom>
-          <a:noFill/>
-          <a:ln w="19050">
+            <a:srgbClr val="FD400C">
+              <a:alpha val="16000"/>
+            </a:srgbClr>
+          </a:solidFill>
+          <a:ln/>
+        </p:spPr>
+      </p:sp>
+      <p:sp>
+        <p:nvSpPr>
+          <p:cNvPr id="50" name="Shape 44"/>
+          <p:cNvSpPr/>
+          <p:nvPr/>
+        </p:nvSpPr>
+        <p:spPr>
+          <a:xfrm>
+            <a:off x="8577072" y="3127248"/>
+            <a:ext cx="969264" cy="969264"/>
+          </a:xfrm>
+          <a:prstGeom prst="ellipse">
+            <a:avLst/>
+          </a:prstGeom>
+          <a:solidFill>
+            <a:srgbClr val="FFFFFF"/>
+          </a:solidFill>
+          <a:ln w="50800">
             <a:solidFill>
               <a:srgbClr val="FD400C"/>
-            </a:solidFill>
-            <a:prstDash val="dash"/>
-          </a:ln>
-        </p:spPr>
-      </p:sp>
-      <p:sp>
-        <p:nvSpPr>
-          <p:cNvPr id="34" name="Shape 28"/>
-          <p:cNvSpPr/>
-          <p:nvPr/>
-        </p:nvSpPr>
-        <p:spPr>
-          <a:xfrm>
-            <a:off x="6089904" y="1170432"/>
-            <a:ext cx="1298448" cy="1225296"/>
-          </a:xfrm>
-          <a:prstGeom prst="roundRect">
-            <a:avLst>
-              <a:gd name="adj" fmla="val 6716"/>
-            </a:avLst>
-          </a:prstGeom>
-          <a:solidFill>
-            <a:srgbClr val="FFFFFF"/>
-          </a:solidFill>
-          <a:ln w="12700">
-            <a:solidFill>
-              <a:srgbClr val="EFE3D7"/>
             </a:solidFill>
             <a:prstDash val="solid"/>
           </a:ln>
           <a:effectLst>
-            <a:outerShdw sx="100000" sy="100000" kx="0" ky="0" algn="bl" rotWithShape="0" blurRad="76200" dist="25400" dir="5400000">
-              <a:srgbClr val="D9C8B4">
-                <a:alpha val="35000"/>
+            <a:outerShdw sx="100000" sy="100000" kx="0" ky="0" algn="bl" rotWithShape="0" blurRad="114300" dist="38100" dir="5400000">
+              <a:srgbClr val="241D1A">
+                <a:alpha val="30000"/>
               </a:srgbClr>
             </a:outerShdw>
           </a:effectLst>
@@ -1919,7 +2443,7 @@
       </p:sp>
       <p:pic>
         <p:nvPicPr>
-          <p:cNvPr id="35" name="Image 4" descr="preencoded.png">    </p:cNvPr>
+          <p:cNvPr id="51" name="Image 4" descr="preencoded.png">    </p:cNvPr>
           <p:cNvPicPr>
             <a:picLocks noChangeAspect="1"/>
           </p:cNvPicPr>
@@ -1933,8 +2457,8 @@
         </p:blipFill>
         <p:spPr>
           <a:xfrm>
-            <a:off x="6501384" y="896112"/>
-            <a:ext cx="475488" cy="475488"/>
+            <a:off x="8732520" y="3282696"/>
+            <a:ext cx="658368" cy="658368"/>
           </a:xfrm>
           <a:prstGeom prst="rect">
             <a:avLst/>
@@ -1943,36 +2467,39 @@
       </p:pic>
       <p:sp>
         <p:nvSpPr>
-          <p:cNvPr id="36" name="Shape 29"/>
-          <p:cNvSpPr/>
-          <p:nvPr/>
-        </p:nvSpPr>
-        <p:spPr>
-          <a:xfrm>
-            <a:off x="6217920" y="1389888"/>
-            <a:ext cx="1042416" cy="219456"/>
-          </a:xfrm>
-          <a:prstGeom prst="roundRect">
-            <a:avLst>
-              <a:gd name="adj" fmla="val 50000"/>
-            </a:avLst>
+          <p:cNvPr id="52" name="Shape 45"/>
+          <p:cNvSpPr/>
+          <p:nvPr/>
+        </p:nvSpPr>
+        <p:spPr>
+          <a:xfrm>
+            <a:off x="9281160" y="3090672"/>
+            <a:ext cx="310896" cy="310896"/>
+          </a:xfrm>
+          <a:prstGeom prst="ellipse">
+            <a:avLst/>
           </a:prstGeom>
           <a:solidFill>
             <a:srgbClr val="FD400C"/>
           </a:solidFill>
-          <a:ln/>
-        </p:spPr>
-      </p:sp>
-      <p:sp>
-        <p:nvSpPr>
-          <p:cNvPr id="37" name="Text 30"/>
-          <p:cNvSpPr/>
-          <p:nvPr/>
-        </p:nvSpPr>
-        <p:spPr>
-          <a:xfrm>
-            <a:off x="6217920" y="1389888"/>
-            <a:ext cx="1042416" cy="219456"/>
+          <a:ln w="25400">
+            <a:solidFill>
+              <a:srgbClr val="FFFFFF"/>
+            </a:solidFill>
+            <a:prstDash val="solid"/>
+          </a:ln>
+        </p:spPr>
+      </p:sp>
+      <p:sp>
+        <p:nvSpPr>
+          <p:cNvPr id="53" name="Text 46"/>
+          <p:cNvSpPr/>
+          <p:nvPr/>
+        </p:nvSpPr>
+        <p:spPr>
+          <a:xfrm>
+            <a:off x="9281160" y="3090672"/>
+            <a:ext cx="310896" cy="310896"/>
           </a:xfrm>
           <a:prstGeom prst="rect">
             <a:avLst/>
@@ -1988,119 +2515,38 @@
               <a:buNone/>
             </a:pPr>
             <a:r>
-              <a:rPr lang="en-US" sz="950" b="1" dirty="0">
+              <a:rPr lang="en-US" sz="1200" b="1" dirty="0">
                 <a:solidFill>
                   <a:srgbClr val="FFFFFF"/>
                 </a:solidFill>
-              </a:rPr>
-              <a:t>8 OCT 2026</a:t>
-            </a:r>
-            <a:endParaRPr lang="en-US" sz="950" dirty="0"/>
+                <a:latin typeface="Arial" pitchFamily="34" charset="0"/>
+                <a:ea typeface="Arial" pitchFamily="34" charset="-122"/>
+                <a:cs typeface="Arial" pitchFamily="34" charset="-120"/>
+              </a:rPr>
+              <a:t>5</a:t>
+            </a:r>
+            <a:endParaRPr lang="en-US" sz="1200" dirty="0"/>
           </a:p>
         </p:txBody>
       </p:sp>
       <p:sp>
         <p:nvSpPr>
-          <p:cNvPr id="38" name="Text 31"/>
-          <p:cNvSpPr/>
-          <p:nvPr/>
-        </p:nvSpPr>
-        <p:spPr>
-          <a:xfrm>
-            <a:off x="6135624" y="1645920"/>
-            <a:ext cx="1207008" cy="731520"/>
-          </a:xfrm>
-          <a:prstGeom prst="rect">
+          <p:cNvPr id="54" name="Shape 47"/>
+          <p:cNvSpPr/>
+          <p:nvPr/>
+        </p:nvSpPr>
+        <p:spPr>
+          <a:xfrm>
+            <a:off x="9061704" y="2670048"/>
+            <a:ext cx="0" cy="457200"/>
+          </a:xfrm>
+          <a:prstGeom prst="line">
             <a:avLst/>
           </a:prstGeom>
           <a:noFill/>
-          <a:ln/>
-        </p:spPr>
-        <p:txBody>
-          <a:bodyPr wrap="square" lIns="0" tIns="0" rIns="0" bIns="0" rtlCol="0" anchor="t"/>
-          <a:lstStyle/>
-          <a:p>
-            <a:pPr algn="ctr" indent="0" marL="0">
-              <a:buNone/>
-            </a:pPr>
-            <a:r>
-              <a:rPr lang="en-US" sz="1050" b="1" dirty="0">
-                <a:solidFill>
-                  <a:srgbClr val="241D1A"/>
-                </a:solidFill>
-              </a:rPr>
-              <a:t>Lanzamiento comercial</a:t>
-            </a:r>
-            <a:endParaRPr lang="en-US" sz="1050" dirty="0"/>
-          </a:p>
-          <a:p>
-            <a:pPr algn="ctr" indent="0" marL="0">
-              <a:buNone/>
-            </a:pPr>
-            <a:r>
-              <a:rPr lang="en-US" sz="800" i="1" dirty="0">
-                <a:solidFill>
-                  <a:srgbClr val="8A7F78"/>
-                </a:solidFill>
-              </a:rPr>
-              <a:t>Commercial launch</a:t>
-            </a:r>
-            <a:endParaRPr lang="en-US" sz="1050" dirty="0"/>
-          </a:p>
-          <a:p>
-            <a:pPr algn="ctr" indent="0" marL="0">
-              <a:buNone/>
-            </a:pPr>
-            <a:r>
-              <a:rPr lang="en-US" sz="750" dirty="0">
-                <a:solidFill>
-                  <a:srgbClr val="6E655D"/>
-                </a:solidFill>
-              </a:rPr>
-              <a:t>Producción en App Store y Google Play</a:t>
-            </a:r>
-            <a:endParaRPr lang="en-US" sz="1050" dirty="0"/>
-          </a:p>
-        </p:txBody>
-      </p:sp>
-      <p:sp>
-        <p:nvSpPr>
-          <p:cNvPr id="39" name="Shape 32"/>
-          <p:cNvSpPr/>
-          <p:nvPr/>
-        </p:nvSpPr>
-        <p:spPr>
-          <a:xfrm>
-            <a:off x="8037576" y="2679192"/>
-            <a:ext cx="164592" cy="164592"/>
-          </a:xfrm>
-          <a:prstGeom prst="ellipse">
-            <a:avLst/>
-          </a:prstGeom>
-          <a:solidFill>
-            <a:srgbClr val="C73A20"/>
-          </a:solidFill>
-          <a:ln/>
-        </p:spPr>
-      </p:sp>
-      <p:sp>
-        <p:nvSpPr>
-          <p:cNvPr id="40" name="Shape 33"/>
-          <p:cNvSpPr/>
-          <p:nvPr/>
-        </p:nvSpPr>
-        <p:spPr>
-          <a:xfrm>
-            <a:off x="8119872" y="2843784"/>
-            <a:ext cx="0" cy="283464"/>
-          </a:xfrm>
-          <a:prstGeom prst="line">
-            <a:avLst/>
-          </a:prstGeom>
-          <a:noFill/>
-          <a:ln w="19050">
+          <a:ln w="25400">
             <a:solidFill>
-              <a:srgbClr val="C73A20"/>
+              <a:srgbClr val="FD400C"/>
             </a:solidFill>
             <a:prstDash val="dash"/>
           </a:ln>
@@ -2108,33 +2554,194 @@
       </p:sp>
       <p:sp>
         <p:nvSpPr>
-          <p:cNvPr id="41" name="Shape 34"/>
-          <p:cNvSpPr/>
-          <p:nvPr/>
-        </p:nvSpPr>
-        <p:spPr>
-          <a:xfrm>
-            <a:off x="7470648" y="3017520"/>
-            <a:ext cx="1298448" cy="1225296"/>
+          <p:cNvPr id="55" name="Shape 48"/>
+          <p:cNvSpPr/>
+          <p:nvPr/>
+        </p:nvSpPr>
+        <p:spPr>
+          <a:xfrm>
+            <a:off x="8403336" y="2340864"/>
+            <a:ext cx="1316736" cy="292608"/>
           </a:xfrm>
           <a:prstGeom prst="roundRect">
             <a:avLst>
-              <a:gd name="adj" fmla="val 6716"/>
+              <a:gd name="adj" fmla="val 15625"/>
             </a:avLst>
           </a:prstGeom>
           <a:solidFill>
+            <a:srgbClr val="FD400C"/>
+          </a:solidFill>
+          <a:ln/>
+          <a:effectLst>
+            <a:outerShdw sx="100000" sy="100000" kx="0" ky="0" algn="bl" rotWithShape="0" blurRad="50800" dist="25400" dir="5400000">
+              <a:srgbClr val="241D1A">
+                <a:alpha val="25000"/>
+              </a:srgbClr>
+            </a:outerShdw>
+          </a:effectLst>
+        </p:spPr>
+      </p:sp>
+      <p:sp>
+        <p:nvSpPr>
+          <p:cNvPr id="56" name="Text 49"/>
+          <p:cNvSpPr/>
+          <p:nvPr/>
+        </p:nvSpPr>
+        <p:spPr>
+          <a:xfrm>
+            <a:off x="8403336" y="2340864"/>
+            <a:ext cx="1316736" cy="292608"/>
+          </a:xfrm>
+          <a:prstGeom prst="rect">
+            <a:avLst/>
+          </a:prstGeom>
+          <a:noFill/>
+          <a:ln/>
+        </p:spPr>
+        <p:txBody>
+          <a:bodyPr wrap="square" lIns="0" tIns="0" rIns="0" bIns="0" rtlCol="0" anchor="ctr"/>
+          <a:lstStyle/>
+          <a:p>
+            <a:pPr algn="ctr" indent="0" marL="0">
+              <a:buNone/>
+            </a:pPr>
+            <a:r>
+              <a:rPr lang="en-US" sz="1150" b="1" spc="100" kern="0" dirty="0">
+                <a:solidFill>
+                  <a:srgbClr val="FFFFFF"/>
+                </a:solidFill>
+                <a:latin typeface="Arial" pitchFamily="34" charset="0"/>
+                <a:ea typeface="Arial" pitchFamily="34" charset="-122"/>
+                <a:cs typeface="Arial" pitchFamily="34" charset="-120"/>
+              </a:rPr>
+              <a:t>8 OCT 2026</a:t>
+            </a:r>
+            <a:endParaRPr lang="en-US" sz="1150" dirty="0"/>
+          </a:p>
+        </p:txBody>
+      </p:sp>
+      <p:sp>
+        <p:nvSpPr>
+          <p:cNvPr id="57" name="Text 50"/>
+          <p:cNvSpPr/>
+          <p:nvPr/>
+        </p:nvSpPr>
+        <p:spPr>
+          <a:xfrm>
+            <a:off x="8129016" y="1371600"/>
+            <a:ext cx="1865376" cy="914400"/>
+          </a:xfrm>
+          <a:prstGeom prst="rect">
+            <a:avLst/>
+          </a:prstGeom>
+          <a:noFill/>
+          <a:ln/>
+        </p:spPr>
+        <p:txBody>
+          <a:bodyPr wrap="square" lIns="0" tIns="0" rIns="0" bIns="0" rtlCol="0" anchor="b"/>
+          <a:lstStyle/>
+          <a:p>
+            <a:pPr algn="ctr" indent="0" marL="0">
+              <a:buNone/>
+            </a:pPr>
+            <a:r>
+              <a:rPr lang="en-US" sz="1300" b="1" dirty="0">
+                <a:solidFill>
+                  <a:srgbClr val="241D1A"/>
+                </a:solidFill>
+                <a:latin typeface="Arial" pitchFamily="34" charset="0"/>
+                <a:ea typeface="Arial" pitchFamily="34" charset="-122"/>
+                <a:cs typeface="Arial" pitchFamily="34" charset="-120"/>
+              </a:rPr>
+              <a:t>Lanzamiento comercial</a:t>
+            </a:r>
+            <a:endParaRPr lang="en-US" sz="1300" dirty="0"/>
+          </a:p>
+          <a:p>
+            <a:pPr algn="ctr" indent="0" marL="0">
+              <a:buNone/>
+            </a:pPr>
+            <a:r>
+              <a:rPr lang="en-US" sz="950" i="1" dirty="0">
+                <a:solidFill>
+                  <a:srgbClr val="8A7F78"/>
+                </a:solidFill>
+                <a:latin typeface="Arial" pitchFamily="34" charset="0"/>
+                <a:ea typeface="Arial" pitchFamily="34" charset="-122"/>
+                <a:cs typeface="Arial" pitchFamily="34" charset="-120"/>
+              </a:rPr>
+              <a:t>Commercial launch</a:t>
+            </a:r>
+            <a:endParaRPr lang="en-US" sz="1300" dirty="0"/>
+          </a:p>
+          <a:p>
+            <a:pPr algn="ctr" indent="0" marL="0">
+              <a:buNone/>
+            </a:pPr>
+            <a:r>
+              <a:rPr lang="en-US" sz="850" dirty="0">
+                <a:solidFill>
+                  <a:srgbClr val="6E655D"/>
+                </a:solidFill>
+                <a:latin typeface="Arial" pitchFamily="34" charset="0"/>
+                <a:ea typeface="Arial" pitchFamily="34" charset="-122"/>
+                <a:cs typeface="Arial" pitchFamily="34" charset="-120"/>
+              </a:rPr>
+              <a:t>App Store + Google Play · con pagos</a:t>
+            </a:r>
+            <a:endParaRPr lang="en-US" sz="1300" dirty="0"/>
+          </a:p>
+        </p:txBody>
+      </p:sp>
+      <p:sp>
+        <p:nvSpPr>
+          <p:cNvPr id="58" name="Shape 51"/>
+          <p:cNvSpPr/>
+          <p:nvPr/>
+        </p:nvSpPr>
+        <p:spPr>
+          <a:xfrm>
+            <a:off x="10296144" y="3063240"/>
+            <a:ext cx="1097280" cy="1097280"/>
+          </a:xfrm>
+          <a:prstGeom prst="ellipse">
+            <a:avLst/>
+          </a:prstGeom>
+          <a:solidFill>
+            <a:srgbClr val="C73A20">
+              <a:alpha val="16000"/>
+            </a:srgbClr>
+          </a:solidFill>
+          <a:ln/>
+        </p:spPr>
+      </p:sp>
+      <p:sp>
+        <p:nvSpPr>
+          <p:cNvPr id="59" name="Shape 52"/>
+          <p:cNvSpPr/>
+          <p:nvPr/>
+        </p:nvSpPr>
+        <p:spPr>
+          <a:xfrm>
+            <a:off x="10360152" y="3127248"/>
+            <a:ext cx="969264" cy="969264"/>
+          </a:xfrm>
+          <a:prstGeom prst="ellipse">
+            <a:avLst/>
+          </a:prstGeom>
+          <a:solidFill>
             <a:srgbClr val="FFFFFF"/>
           </a:solidFill>
-          <a:ln w="12700">
+          <a:ln w="50800">
             <a:solidFill>
-              <a:srgbClr val="EFE3D7"/>
+              <a:srgbClr val="C73A20"/>
             </a:solidFill>
             <a:prstDash val="solid"/>
           </a:ln>
           <a:effectLst>
-            <a:outerShdw sx="100000" sy="100000" kx="0" ky="0" algn="bl" rotWithShape="0" blurRad="76200" dist="25400" dir="5400000">
-              <a:srgbClr val="D9C8B4">
-                <a:alpha val="35000"/>
+            <a:outerShdw sx="100000" sy="100000" kx="0" ky="0" algn="bl" rotWithShape="0" blurRad="114300" dist="38100" dir="5400000">
+              <a:srgbClr val="241D1A">
+                <a:alpha val="30000"/>
               </a:srgbClr>
             </a:outerShdw>
           </a:effectLst>
@@ -2142,7 +2749,7 @@
       </p:sp>
       <p:pic>
         <p:nvPicPr>
-          <p:cNvPr id="42" name="Image 5" descr="preencoded.png">    </p:cNvPr>
+          <p:cNvPr id="60" name="Image 5" descr="preencoded.png">    </p:cNvPr>
           <p:cNvPicPr>
             <a:picLocks noChangeAspect="1"/>
           </p:cNvPicPr>
@@ -2156,8 +2763,8 @@
         </p:blipFill>
         <p:spPr>
           <a:xfrm>
-            <a:off x="7882128" y="2743200"/>
-            <a:ext cx="475488" cy="475488"/>
+            <a:off x="10515600" y="3282696"/>
+            <a:ext cx="658368" cy="658368"/>
           </a:xfrm>
           <a:prstGeom prst="rect">
             <a:avLst/>
@@ -2166,14 +2773,242 @@
       </p:pic>
       <p:sp>
         <p:nvSpPr>
-          <p:cNvPr id="43" name="Shape 35"/>
-          <p:cNvSpPr/>
-          <p:nvPr/>
-        </p:nvSpPr>
-        <p:spPr>
-          <a:xfrm>
-            <a:off x="7598664" y="3236976"/>
-            <a:ext cx="1042416" cy="219456"/>
+          <p:cNvPr id="61" name="Shape 53"/>
+          <p:cNvSpPr/>
+          <p:nvPr/>
+        </p:nvSpPr>
+        <p:spPr>
+          <a:xfrm>
+            <a:off x="11064240" y="3090672"/>
+            <a:ext cx="310896" cy="310896"/>
+          </a:xfrm>
+          <a:prstGeom prst="ellipse">
+            <a:avLst/>
+          </a:prstGeom>
+          <a:solidFill>
+            <a:srgbClr val="C73A20"/>
+          </a:solidFill>
+          <a:ln w="25400">
+            <a:solidFill>
+              <a:srgbClr val="FFFFFF"/>
+            </a:solidFill>
+            <a:prstDash val="solid"/>
+          </a:ln>
+        </p:spPr>
+      </p:sp>
+      <p:sp>
+        <p:nvSpPr>
+          <p:cNvPr id="62" name="Text 54"/>
+          <p:cNvSpPr/>
+          <p:nvPr/>
+        </p:nvSpPr>
+        <p:spPr>
+          <a:xfrm>
+            <a:off x="11064240" y="3090672"/>
+            <a:ext cx="310896" cy="310896"/>
+          </a:xfrm>
+          <a:prstGeom prst="rect">
+            <a:avLst/>
+          </a:prstGeom>
+          <a:noFill/>
+          <a:ln/>
+        </p:spPr>
+        <p:txBody>
+          <a:bodyPr wrap="square" lIns="0" tIns="0" rIns="0" bIns="0" rtlCol="0" anchor="ctr"/>
+          <a:lstStyle/>
+          <a:p>
+            <a:pPr algn="ctr" indent="0" marL="0">
+              <a:buNone/>
+            </a:pPr>
+            <a:r>
+              <a:rPr lang="en-US" sz="1200" b="1" dirty="0">
+                <a:solidFill>
+                  <a:srgbClr val="FFFFFF"/>
+                </a:solidFill>
+                <a:latin typeface="Arial" pitchFamily="34" charset="0"/>
+                <a:ea typeface="Arial" pitchFamily="34" charset="-122"/>
+                <a:cs typeface="Arial" pitchFamily="34" charset="-120"/>
+              </a:rPr>
+              <a:t>6</a:t>
+            </a:r>
+            <a:endParaRPr lang="en-US" sz="1200" dirty="0"/>
+          </a:p>
+        </p:txBody>
+      </p:sp>
+      <p:sp>
+        <p:nvSpPr>
+          <p:cNvPr id="63" name="Shape 55"/>
+          <p:cNvSpPr/>
+          <p:nvPr/>
+        </p:nvSpPr>
+        <p:spPr>
+          <a:xfrm>
+            <a:off x="10844784" y="4114800"/>
+            <a:ext cx="0" cy="457200"/>
+          </a:xfrm>
+          <a:prstGeom prst="line">
+            <a:avLst/>
+          </a:prstGeom>
+          <a:noFill/>
+          <a:ln w="25400">
+            <a:solidFill>
+              <a:srgbClr val="C73A20"/>
+            </a:solidFill>
+            <a:prstDash val="dash"/>
+          </a:ln>
+        </p:spPr>
+      </p:sp>
+      <p:sp>
+        <p:nvSpPr>
+          <p:cNvPr id="64" name="Shape 56"/>
+          <p:cNvSpPr/>
+          <p:nvPr/>
+        </p:nvSpPr>
+        <p:spPr>
+          <a:xfrm>
+            <a:off x="10186416" y="4315968"/>
+            <a:ext cx="1316736" cy="292608"/>
+          </a:xfrm>
+          <a:prstGeom prst="roundRect">
+            <a:avLst>
+              <a:gd name="adj" fmla="val 15625"/>
+            </a:avLst>
+          </a:prstGeom>
+          <a:solidFill>
+            <a:srgbClr val="C73A20"/>
+          </a:solidFill>
+          <a:ln/>
+          <a:effectLst>
+            <a:outerShdw sx="100000" sy="100000" kx="0" ky="0" algn="bl" rotWithShape="0" blurRad="50800" dist="25400" dir="5400000">
+              <a:srgbClr val="241D1A">
+                <a:alpha val="25000"/>
+              </a:srgbClr>
+            </a:outerShdw>
+          </a:effectLst>
+        </p:spPr>
+      </p:sp>
+      <p:sp>
+        <p:nvSpPr>
+          <p:cNvPr id="65" name="Text 57"/>
+          <p:cNvSpPr/>
+          <p:nvPr/>
+        </p:nvSpPr>
+        <p:spPr>
+          <a:xfrm>
+            <a:off x="10186416" y="4315968"/>
+            <a:ext cx="1316736" cy="292608"/>
+          </a:xfrm>
+          <a:prstGeom prst="rect">
+            <a:avLst/>
+          </a:prstGeom>
+          <a:noFill/>
+          <a:ln/>
+        </p:spPr>
+        <p:txBody>
+          <a:bodyPr wrap="square" lIns="0" tIns="0" rIns="0" bIns="0" rtlCol="0" anchor="ctr"/>
+          <a:lstStyle/>
+          <a:p>
+            <a:pPr algn="ctr" indent="0" marL="0">
+              <a:buNone/>
+            </a:pPr>
+            <a:r>
+              <a:rPr lang="en-US" sz="1150" b="1" spc="100" kern="0" dirty="0">
+                <a:solidFill>
+                  <a:srgbClr val="FFFFFF"/>
+                </a:solidFill>
+                <a:latin typeface="Arial" pitchFamily="34" charset="0"/>
+                <a:ea typeface="Arial" pitchFamily="34" charset="-122"/>
+                <a:cs typeface="Arial" pitchFamily="34" charset="-120"/>
+              </a:rPr>
+              <a:t>AÑO 1</a:t>
+            </a:r>
+            <a:endParaRPr lang="en-US" sz="1150" dirty="0"/>
+          </a:p>
+        </p:txBody>
+      </p:sp>
+      <p:sp>
+        <p:nvSpPr>
+          <p:cNvPr id="66" name="Text 58"/>
+          <p:cNvSpPr/>
+          <p:nvPr/>
+        </p:nvSpPr>
+        <p:spPr>
+          <a:xfrm>
+            <a:off x="9912096" y="4681728"/>
+            <a:ext cx="1865376" cy="914400"/>
+          </a:xfrm>
+          <a:prstGeom prst="rect">
+            <a:avLst/>
+          </a:prstGeom>
+          <a:noFill/>
+          <a:ln/>
+        </p:spPr>
+        <p:txBody>
+          <a:bodyPr wrap="square" lIns="0" tIns="0" rIns="0" bIns="0" rtlCol="0" anchor="t"/>
+          <a:lstStyle/>
+          <a:p>
+            <a:pPr algn="ctr" indent="0" marL="0">
+              <a:buNone/>
+            </a:pPr>
+            <a:r>
+              <a:rPr lang="en-US" sz="1300" b="1" dirty="0">
+                <a:solidFill>
+                  <a:srgbClr val="241D1A"/>
+                </a:solidFill>
+                <a:latin typeface="Arial" pitchFamily="34" charset="0"/>
+                <a:ea typeface="Arial" pitchFamily="34" charset="-122"/>
+                <a:cs typeface="Arial" pitchFamily="34" charset="-120"/>
+              </a:rPr>
+              <a:t>A dónde vamos</a:t>
+            </a:r>
+            <a:endParaRPr lang="en-US" sz="1300" dirty="0"/>
+          </a:p>
+          <a:p>
+            <a:pPr algn="ctr" indent="0" marL="0">
+              <a:buNone/>
+            </a:pPr>
+            <a:r>
+              <a:rPr lang="en-US" sz="950" i="1" dirty="0">
+                <a:solidFill>
+                  <a:srgbClr val="8A7F78"/>
+                </a:solidFill>
+                <a:latin typeface="Arial" pitchFamily="34" charset="0"/>
+                <a:ea typeface="Arial" pitchFamily="34" charset="-122"/>
+                <a:cs typeface="Arial" pitchFamily="34" charset="-120"/>
+              </a:rPr>
+              <a:t>Where we are going</a:t>
+            </a:r>
+            <a:endParaRPr lang="en-US" sz="1300" dirty="0"/>
+          </a:p>
+          <a:p>
+            <a:pPr algn="ctr" indent="0" marL="0">
+              <a:buNone/>
+            </a:pPr>
+            <a:r>
+              <a:rPr lang="en-US" sz="850" dirty="0">
+                <a:solidFill>
+                  <a:srgbClr val="6E655D"/>
+                </a:solidFill>
+                <a:latin typeface="Arial" pitchFamily="34" charset="0"/>
+                <a:ea typeface="Arial" pitchFamily="34" charset="-122"/>
+                <a:cs typeface="Arial" pitchFamily="34" charset="-120"/>
+              </a:rPr>
+              <a:t>2.634 suscripciones · €74.772 · escalar EU</a:t>
+            </a:r>
+            <a:endParaRPr lang="en-US" sz="1300" dirty="0"/>
+          </a:p>
+        </p:txBody>
+      </p:sp>
+      <p:sp>
+        <p:nvSpPr>
+          <p:cNvPr id="67" name="Shape 59"/>
+          <p:cNvSpPr/>
+          <p:nvPr/>
+        </p:nvSpPr>
+        <p:spPr>
+          <a:xfrm>
+            <a:off x="5504688" y="3739896"/>
+            <a:ext cx="1463040" cy="274320"/>
           </a:xfrm>
           <a:prstGeom prst="roundRect">
             <a:avLst>
@@ -2181,21 +3016,48 @@
             </a:avLst>
           </a:prstGeom>
           <a:solidFill>
-            <a:srgbClr val="C73A20"/>
-          </a:solidFill>
-          <a:ln/>
-        </p:spPr>
-      </p:sp>
-      <p:sp>
-        <p:nvSpPr>
-          <p:cNvPr id="44" name="Text 36"/>
-          <p:cNvSpPr/>
-          <p:nvPr/>
-        </p:nvSpPr>
-        <p:spPr>
-          <a:xfrm>
-            <a:off x="7598664" y="3236976"/>
-            <a:ext cx="1042416" cy="219456"/>
+            <a:srgbClr val="241D1A"/>
+          </a:solidFill>
+          <a:ln/>
+          <a:effectLst>
+            <a:outerShdw sx="100000" sy="100000" kx="0" ky="0" algn="bl" rotWithShape="0" blurRad="63500" dist="25400" dir="5400000">
+              <a:srgbClr val="241D1A">
+                <a:alpha val="35000"/>
+              </a:srgbClr>
+            </a:outerShdw>
+          </a:effectLst>
+        </p:spPr>
+      </p:sp>
+      <p:sp>
+        <p:nvSpPr>
+          <p:cNvPr id="68" name="Shape 60"/>
+          <p:cNvSpPr/>
+          <p:nvPr/>
+        </p:nvSpPr>
+        <p:spPr>
+          <a:xfrm>
+            <a:off x="6153912" y="3593592"/>
+            <a:ext cx="164592" cy="128016"/>
+          </a:xfrm>
+          <a:prstGeom prst="triangle">
+            <a:avLst/>
+          </a:prstGeom>
+          <a:solidFill>
+            <a:srgbClr val="241D1A"/>
+          </a:solidFill>
+          <a:ln/>
+        </p:spPr>
+      </p:sp>
+      <p:sp>
+        <p:nvSpPr>
+          <p:cNvPr id="69" name="Text 61"/>
+          <p:cNvSpPr/>
+          <p:nvPr/>
+        </p:nvSpPr>
+        <p:spPr>
+          <a:xfrm>
+            <a:off x="5504688" y="3739896"/>
+            <a:ext cx="1463040" cy="274320"/>
           </a:xfrm>
           <a:prstGeom prst="rect">
             <a:avLst/>
@@ -2211,91 +3073,57 @@
               <a:buNone/>
             </a:pPr>
             <a:r>
-              <a:rPr lang="en-US" sz="950" b="1" dirty="0">
+              <a:rPr lang="en-US" sz="720" b="1" spc="50" kern="0" dirty="0">
                 <a:solidFill>
                   <a:srgbClr val="FFFFFF"/>
                 </a:solidFill>
-              </a:rPr>
-              <a:t>AÑO 1</a:t>
-            </a:r>
-            <a:endParaRPr lang="en-US" sz="950" dirty="0"/>
+                <a:latin typeface="Arial" pitchFamily="34" charset="0"/>
+                <a:ea typeface="Arial" pitchFamily="34" charset="-122"/>
+                <a:cs typeface="Arial" pitchFamily="34" charset="-120"/>
+              </a:rPr>
+              <a:t>ESTAMOS AQUÍ · WE ARE HERE</a:t>
+            </a:r>
+            <a:endParaRPr lang="en-US" sz="720" dirty="0"/>
           </a:p>
         </p:txBody>
       </p:sp>
       <p:sp>
         <p:nvSpPr>
-          <p:cNvPr id="45" name="Text 37"/>
-          <p:cNvSpPr/>
-          <p:nvPr/>
-        </p:nvSpPr>
-        <p:spPr>
-          <a:xfrm>
-            <a:off x="7516368" y="3493008"/>
-            <a:ext cx="1207008" cy="731520"/>
-          </a:xfrm>
-          <a:prstGeom prst="rect">
-            <a:avLst/>
-          </a:prstGeom>
-          <a:noFill/>
-          <a:ln/>
-        </p:spPr>
-        <p:txBody>
-          <a:bodyPr wrap="square" lIns="0" tIns="0" rIns="0" bIns="0" rtlCol="0" anchor="t"/>
-          <a:lstStyle/>
-          <a:p>
-            <a:pPr algn="ctr" indent="0" marL="0">
-              <a:buNone/>
-            </a:pPr>
-            <a:r>
-              <a:rPr lang="en-US" sz="1050" b="1" dirty="0">
-                <a:solidFill>
-                  <a:srgbClr val="241D1A"/>
-                </a:solidFill>
-              </a:rPr>
-              <a:t>A dónde vamos</a:t>
-            </a:r>
-            <a:endParaRPr lang="en-US" sz="1050" dirty="0"/>
-          </a:p>
-          <a:p>
-            <a:pPr algn="ctr" indent="0" marL="0">
-              <a:buNone/>
-            </a:pPr>
-            <a:r>
-              <a:rPr lang="en-US" sz="800" i="1" dirty="0">
-                <a:solidFill>
-                  <a:srgbClr val="8A7F78"/>
-                </a:solidFill>
-              </a:rPr>
-              <a:t>Where we are going</a:t>
-            </a:r>
-            <a:endParaRPr lang="en-US" sz="1050" dirty="0"/>
-          </a:p>
-          <a:p>
-            <a:pPr algn="ctr" indent="0" marL="0">
-              <a:buNone/>
-            </a:pPr>
-            <a:r>
-              <a:rPr lang="en-US" sz="750" dirty="0">
-                <a:solidFill>
-                  <a:srgbClr val="6E655D"/>
-                </a:solidFill>
-              </a:rPr>
-              <a:t>2.634 suscripciones · €74.772 · escalar EU</a:t>
-            </a:r>
-            <a:endParaRPr lang="en-US" sz="1050" dirty="0"/>
-          </a:p>
-        </p:txBody>
-      </p:sp>
-      <p:sp>
-        <p:nvSpPr>
-          <p:cNvPr id="46" name="Text 38"/>
-          <p:cNvSpPr/>
-          <p:nvPr/>
-        </p:nvSpPr>
-        <p:spPr>
-          <a:xfrm>
-            <a:off x="457200" y="4773168"/>
-            <a:ext cx="8229600" cy="274320"/>
+          <p:cNvPr id="70" name="Shape 62"/>
+          <p:cNvSpPr/>
+          <p:nvPr/>
+        </p:nvSpPr>
+        <p:spPr>
+          <a:xfrm>
+            <a:off x="928116" y="6053328"/>
+            <a:ext cx="2377440" cy="566928"/>
+          </a:xfrm>
+          <a:prstGeom prst="roundRect">
+            <a:avLst>
+              <a:gd name="adj" fmla="val 16129"/>
+            </a:avLst>
+          </a:prstGeom>
+          <a:solidFill>
+            <a:srgbClr val="FFF6F2"/>
+          </a:solidFill>
+          <a:ln w="12700">
+            <a:solidFill>
+              <a:srgbClr val="F3C8B8"/>
+            </a:solidFill>
+            <a:prstDash val="solid"/>
+          </a:ln>
+        </p:spPr>
+      </p:sp>
+      <p:sp>
+        <p:nvSpPr>
+          <p:cNvPr id="71" name="Text 63"/>
+          <p:cNvSpPr/>
+          <p:nvPr/>
+        </p:nvSpPr>
+        <p:spPr>
+          <a:xfrm>
+            <a:off x="1037844" y="6053328"/>
+            <a:ext cx="2157984" cy="566928"/>
           </a:xfrm>
           <a:prstGeom prst="rect">
             <a:avLst/>
@@ -2307,18 +3135,314 @@
           <a:bodyPr wrap="square" lIns="0" tIns="0" rIns="0" bIns="0" rtlCol="0" anchor="ctr"/>
           <a:lstStyle/>
           <a:p>
+            <a:pPr indent="0" marL="0">
+              <a:buNone/>
+            </a:pPr>
+            <a:r>
+              <a:rPr lang="en-US" sz="1700" b="1" dirty="0">
+                <a:solidFill>
+                  <a:srgbClr val="FD400C"/>
+                </a:solidFill>
+                <a:latin typeface="Arial" pitchFamily="34" charset="0"/>
+                <a:ea typeface="Arial" pitchFamily="34" charset="-122"/>
+                <a:cs typeface="Arial" pitchFamily="34" charset="-120"/>
+              </a:rPr>
+              <a:t>32  </a:t>
+            </a:r>
+            <a:pPr indent="0" marL="0">
+              <a:buNone/>
+            </a:pPr>
+            <a:r>
+              <a:rPr lang="en-US" sz="950" dirty="0">
+                <a:solidFill>
+                  <a:srgbClr val="6E655D"/>
+                </a:solidFill>
+                <a:latin typeface="Arial" pitchFamily="34" charset="0"/>
+                <a:ea typeface="Arial" pitchFamily="34" charset="-122"/>
+                <a:cs typeface="Arial" pitchFamily="34" charset="-120"/>
+              </a:rPr>
+              <a:t>testers en piloto · pilot testers</a:t>
+            </a:r>
+            <a:endParaRPr lang="en-US" sz="1700" dirty="0"/>
+          </a:p>
+        </p:txBody>
+      </p:sp>
+      <p:sp>
+        <p:nvSpPr>
+          <p:cNvPr id="72" name="Shape 64"/>
+          <p:cNvSpPr/>
+          <p:nvPr/>
+        </p:nvSpPr>
+        <p:spPr>
+          <a:xfrm>
+            <a:off x="3579876" y="6053328"/>
+            <a:ext cx="2377440" cy="566928"/>
+          </a:xfrm>
+          <a:prstGeom prst="roundRect">
+            <a:avLst>
+              <a:gd name="adj" fmla="val 16129"/>
+            </a:avLst>
+          </a:prstGeom>
+          <a:solidFill>
+            <a:srgbClr val="FFF6F2"/>
+          </a:solidFill>
+          <a:ln w="12700">
+            <a:solidFill>
+              <a:srgbClr val="F3C8B8"/>
+            </a:solidFill>
+            <a:prstDash val="solid"/>
+          </a:ln>
+        </p:spPr>
+      </p:sp>
+      <p:sp>
+        <p:nvSpPr>
+          <p:cNvPr id="73" name="Text 65"/>
+          <p:cNvSpPr/>
+          <p:nvPr/>
+        </p:nvSpPr>
+        <p:spPr>
+          <a:xfrm>
+            <a:off x="3689604" y="6053328"/>
+            <a:ext cx="2157984" cy="566928"/>
+          </a:xfrm>
+          <a:prstGeom prst="rect">
+            <a:avLst/>
+          </a:prstGeom>
+          <a:noFill/>
+          <a:ln/>
+        </p:spPr>
+        <p:txBody>
+          <a:bodyPr wrap="square" lIns="0" tIns="0" rIns="0" bIns="0" rtlCol="0" anchor="ctr"/>
+          <a:lstStyle/>
+          <a:p>
+            <a:pPr indent="0" marL="0">
+              <a:buNone/>
+            </a:pPr>
+            <a:r>
+              <a:rPr lang="en-US" sz="1700" b="1" dirty="0">
+                <a:solidFill>
+                  <a:srgbClr val="FD400C"/>
+                </a:solidFill>
+                <a:latin typeface="Arial" pitchFamily="34" charset="0"/>
+                <a:ea typeface="Arial" pitchFamily="34" charset="-122"/>
+                <a:cs typeface="Arial" pitchFamily="34" charset="-120"/>
+              </a:rPr>
+              <a:t>2  </a:t>
+            </a:r>
+            <a:pPr indent="0" marL="0">
+              <a:buNone/>
+            </a:pPr>
+            <a:r>
+              <a:rPr lang="en-US" sz="950" dirty="0">
+                <a:solidFill>
+                  <a:srgbClr val="6E655D"/>
+                </a:solidFill>
+                <a:latin typeface="Arial" pitchFamily="34" charset="0"/>
+                <a:ea typeface="Arial" pitchFamily="34" charset="-122"/>
+                <a:cs typeface="Arial" pitchFamily="34" charset="-120"/>
+              </a:rPr>
+              <a:t>stores · iOS + Android</a:t>
+            </a:r>
+            <a:endParaRPr lang="en-US" sz="1700" dirty="0"/>
+          </a:p>
+        </p:txBody>
+      </p:sp>
+      <p:sp>
+        <p:nvSpPr>
+          <p:cNvPr id="74" name="Shape 66"/>
+          <p:cNvSpPr/>
+          <p:nvPr/>
+        </p:nvSpPr>
+        <p:spPr>
+          <a:xfrm>
+            <a:off x="6231636" y="6053328"/>
+            <a:ext cx="2377440" cy="566928"/>
+          </a:xfrm>
+          <a:prstGeom prst="roundRect">
+            <a:avLst>
+              <a:gd name="adj" fmla="val 16129"/>
+            </a:avLst>
+          </a:prstGeom>
+          <a:solidFill>
+            <a:srgbClr val="FFF6F2"/>
+          </a:solidFill>
+          <a:ln w="12700">
+            <a:solidFill>
+              <a:srgbClr val="F3C8B8"/>
+            </a:solidFill>
+            <a:prstDash val="solid"/>
+          </a:ln>
+        </p:spPr>
+      </p:sp>
+      <p:sp>
+        <p:nvSpPr>
+          <p:cNvPr id="75" name="Text 67"/>
+          <p:cNvSpPr/>
+          <p:nvPr/>
+        </p:nvSpPr>
+        <p:spPr>
+          <a:xfrm>
+            <a:off x="6341364" y="6053328"/>
+            <a:ext cx="2157984" cy="566928"/>
+          </a:xfrm>
+          <a:prstGeom prst="rect">
+            <a:avLst/>
+          </a:prstGeom>
+          <a:noFill/>
+          <a:ln/>
+        </p:spPr>
+        <p:txBody>
+          <a:bodyPr wrap="square" lIns="0" tIns="0" rIns="0" bIns="0" rtlCol="0" anchor="ctr"/>
+          <a:lstStyle/>
+          <a:p>
+            <a:pPr indent="0" marL="0">
+              <a:buNone/>
+            </a:pPr>
+            <a:r>
+              <a:rPr lang="en-US" sz="1700" b="1" dirty="0">
+                <a:solidFill>
+                  <a:srgbClr val="FD400C"/>
+                </a:solidFill>
+                <a:latin typeface="Arial" pitchFamily="34" charset="0"/>
+                <a:ea typeface="Arial" pitchFamily="34" charset="-122"/>
+                <a:cs typeface="Arial" pitchFamily="34" charset="-120"/>
+              </a:rPr>
+              <a:t>14  </a:t>
+            </a:r>
+            <a:pPr indent="0" marL="0">
+              <a:buNone/>
+            </a:pPr>
+            <a:r>
+              <a:rPr lang="en-US" sz="950" dirty="0">
+                <a:solidFill>
+                  <a:srgbClr val="6E655D"/>
+                </a:solidFill>
+                <a:latin typeface="Arial" pitchFamily="34" charset="0"/>
+                <a:ea typeface="Arial" pitchFamily="34" charset="-122"/>
+                <a:cs typeface="Arial" pitchFamily="34" charset="-120"/>
+              </a:rPr>
+              <a:t>idiomas · languages</a:t>
+            </a:r>
+            <a:endParaRPr lang="en-US" sz="1700" dirty="0"/>
+          </a:p>
+        </p:txBody>
+      </p:sp>
+      <p:sp>
+        <p:nvSpPr>
+          <p:cNvPr id="76" name="Shape 68"/>
+          <p:cNvSpPr/>
+          <p:nvPr/>
+        </p:nvSpPr>
+        <p:spPr>
+          <a:xfrm>
+            <a:off x="8883396" y="6053328"/>
+            <a:ext cx="2377440" cy="566928"/>
+          </a:xfrm>
+          <a:prstGeom prst="roundRect">
+            <a:avLst>
+              <a:gd name="adj" fmla="val 16129"/>
+            </a:avLst>
+          </a:prstGeom>
+          <a:solidFill>
+            <a:srgbClr val="FFF6F2"/>
+          </a:solidFill>
+          <a:ln w="12700">
+            <a:solidFill>
+              <a:srgbClr val="F3C8B8"/>
+            </a:solidFill>
+            <a:prstDash val="solid"/>
+          </a:ln>
+        </p:spPr>
+      </p:sp>
+      <p:sp>
+        <p:nvSpPr>
+          <p:cNvPr id="77" name="Text 69"/>
+          <p:cNvSpPr/>
+          <p:nvPr/>
+        </p:nvSpPr>
+        <p:spPr>
+          <a:xfrm>
+            <a:off x="8993124" y="6053328"/>
+            <a:ext cx="2157984" cy="566928"/>
+          </a:xfrm>
+          <a:prstGeom prst="rect">
+            <a:avLst/>
+          </a:prstGeom>
+          <a:noFill/>
+          <a:ln/>
+        </p:spPr>
+        <p:txBody>
+          <a:bodyPr wrap="square" lIns="0" tIns="0" rIns="0" bIns="0" rtlCol="0" anchor="ctr"/>
+          <a:lstStyle/>
+          <a:p>
+            <a:pPr indent="0" marL="0">
+              <a:buNone/>
+            </a:pPr>
+            <a:r>
+              <a:rPr lang="en-US" sz="1700" b="1" dirty="0">
+                <a:solidFill>
+                  <a:srgbClr val="FD400C"/>
+                </a:solidFill>
+                <a:latin typeface="Arial" pitchFamily="34" charset="0"/>
+                <a:ea typeface="Arial" pitchFamily="34" charset="-122"/>
+                <a:cs typeface="Arial" pitchFamily="34" charset="-120"/>
+              </a:rPr>
+              <a:t>€74.772  </a:t>
+            </a:r>
+            <a:pPr indent="0" marL="0">
+              <a:buNone/>
+            </a:pPr>
+            <a:r>
+              <a:rPr lang="en-US" sz="950" dirty="0">
+                <a:solidFill>
+                  <a:srgbClr val="6E655D"/>
+                </a:solidFill>
+                <a:latin typeface="Arial" pitchFamily="34" charset="0"/>
+                <a:ea typeface="Arial" pitchFamily="34" charset="-122"/>
+                <a:cs typeface="Arial" pitchFamily="34" charset="-120"/>
+              </a:rPr>
+              <a:t>ingresos año 1 · year-1 revenue</a:t>
+            </a:r>
+            <a:endParaRPr lang="en-US" sz="1700" dirty="0"/>
+          </a:p>
+        </p:txBody>
+      </p:sp>
+      <p:sp>
+        <p:nvSpPr>
+          <p:cNvPr id="78" name="Text 70"/>
+          <p:cNvSpPr/>
+          <p:nvPr/>
+        </p:nvSpPr>
+        <p:spPr>
+          <a:xfrm>
+            <a:off x="685800" y="6638544"/>
+            <a:ext cx="10789920" cy="219456"/>
+          </a:xfrm>
+          <a:prstGeom prst="rect">
+            <a:avLst/>
+          </a:prstGeom>
+          <a:noFill/>
+          <a:ln/>
+        </p:spPr>
+        <p:txBody>
+          <a:bodyPr wrap="square" lIns="0" tIns="0" rIns="0" bIns="0" rtlCol="0" anchor="ctr"/>
+          <a:lstStyle/>
+          <a:p>
             <a:pPr algn="ctr" indent="0" marL="0">
               <a:buNone/>
             </a:pPr>
             <a:r>
-              <a:rPr lang="en-US" sz="850" dirty="0">
-                <a:solidFill>
-                  <a:srgbClr val="8A7F78"/>
-                </a:solidFill>
-              </a:rPr>
-              <a:t>Piloto interno en curso — la app no está en producción · Internal pilot under way — not in production yet          nutrisynccollective.com</a:t>
-            </a:r>
-            <a:endParaRPr lang="en-US" sz="850" dirty="0"/>
+              <a:rPr lang="en-US" sz="800" dirty="0">
+                <a:solidFill>
+                  <a:srgbClr val="B8AAA0"/>
+                </a:solidFill>
+                <a:latin typeface="Arial" pitchFamily="34" charset="0"/>
+                <a:ea typeface="Arial" pitchFamily="34" charset="-122"/>
+                <a:cs typeface="Arial" pitchFamily="34" charset="-120"/>
+              </a:rPr>
+              <a:t>Piloto interno en curso — no en producción · internal pilot, not in production yet          nutrisynccollective.com</a:t>
+            </a:r>
+            <a:endParaRPr lang="en-US" sz="800" dirty="0"/>
           </a:p>
         </p:txBody>
       </p:sp>

--- a/publish/hub/docs/NutriSync-Historia-Storyline-2026-08.pptx
+++ b/publish/hub/docs/NutriSync-Historia-Storyline-2026-08.pptx
@@ -6,9 +6,10 @@
   </p:sldMasterIdLst>
   <p:sldIdLst>
     <p:sldId id="256" r:id="rId2"/>
+    <p:sldId id="257" r:id="rId3"/>
   </p:sldIdLst>
   <p:notesMasterIdLst>
-    <p:notesMasterId r:id="rId3"/>
+    <p:notesMasterId r:id="rId4"/>
   </p:notesMasterIdLst>
   <p:sldSz cx="12192000" cy="6858000"/>
   <p:notesSz cx="6858000" cy="12192000"/>
@@ -544,6 +545,94 @@
 </p:notes>
 </file>
 
+<file path=ppt/notesSlides/notesSlide2.xml><?xml version="1.0" encoding="utf-8"?>
+<p:notes xmlns:a="http://schemas.openxmlformats.org/drawingml/2006/main" xmlns:r="http://schemas.openxmlformats.org/officeDocument/2006/relationships" xmlns:p="http://schemas.openxmlformats.org/presentationml/2006/main">
+  <p:cSld>
+    <p:spTree>
+      <p:nvGrpSpPr>
+        <p:cNvPr id="1" name=""/>
+        <p:cNvGrpSpPr/>
+        <p:nvPr/>
+      </p:nvGrpSpPr>
+      <p:grpSpPr>
+        <a:xfrm>
+          <a:off x="0" y="0"/>
+          <a:ext cx="0" cy="0"/>
+          <a:chOff x="0" y="0"/>
+          <a:chExt cx="0" cy="0"/>
+        </a:xfrm>
+      </p:grpSpPr>
+      <p:sp>
+        <p:nvSpPr>
+          <p:cNvPr id="2" name="Slide Image Placeholder 1"/>
+          <p:cNvSpPr>
+            <a:spLocks noGrp="1" noRot="1" noChangeAspect="1"/>
+          </p:cNvSpPr>
+          <p:nvPr>
+            <p:ph type="sldImg"/>
+          </p:nvPr>
+        </p:nvSpPr>
+        <p:spPr/>
+      </p:sp>
+      <p:sp>
+        <p:nvSpPr>
+          <p:cNvPr id="3" name="Notes Placeholder 2"/>
+          <p:cNvSpPr>
+            <a:spLocks noGrp="1"/>
+          </p:cNvSpPr>
+          <p:nvPr>
+            <p:ph type="body" idx="1"/>
+          </p:nvPr>
+        </p:nvSpPr>
+        <p:spPr/>
+        <p:txBody>
+          <a:bodyPr/>
+          <a:lstStyle/>
+          <a:p>
+            <a:r>
+              <a:rPr lang="en-US" dirty="0"/>
+              <a:t/>
+            </a:r>
+            <a:endParaRPr lang="en-US" dirty="0"/>
+          </a:p>
+        </p:txBody>
+      </p:sp>
+      <p:sp>
+        <p:nvSpPr>
+          <p:cNvPr id="4" name="Slide Number Placeholder 3"/>
+          <p:cNvSpPr>
+            <a:spLocks noGrp="1"/>
+          </p:cNvSpPr>
+          <p:nvPr>
+            <p:ph type="sldNum" sz="quarter" idx="10"/>
+          </p:nvPr>
+        </p:nvSpPr>
+        <p:spPr/>
+        <p:txBody>
+          <a:bodyPr/>
+          <a:lstStyle/>
+          <a:p>
+            <a:fld id="{F7021451-1387-4CA6-816F-3879F97B5CBC}" type="slidenum">
+              <a:rPr lang="en-US"/>
+              <a:t>2</a:t>
+            </a:fld>
+            <a:endParaRPr lang="en-US"/>
+          </a:p>
+        </p:txBody>
+      </p:sp>
+    </p:spTree>
+    <p:extLst>
+      <p:ext uri="{BB962C8B-B14F-4D97-AF65-F5344CB8AC3E}">
+        <p14:creationId xmlns:p14="http://schemas.microsoft.com/office/powerpoint/2010/main" val="1024086991"/>
+      </p:ext>
+    </p:extLst>
+  </p:cSld>
+  <p:clrMapOvr>
+    <a:masterClrMapping/>
+  </p:clrMapOvr>
+</p:notes>
+</file>
+
 <file path=ppt/slideLayouts/slideLayout1.xml><?xml version="1.0" encoding="utf-8"?>
 <p:sldLayout xmlns:a="http://schemas.openxmlformats.org/drawingml/2006/main" xmlns:r="http://schemas.openxmlformats.org/officeDocument/2006/relationships" xmlns:p="http://schemas.openxmlformats.org/presentationml/2006/main" preserve="1">
   <p:cSld name="DEFAULT">
@@ -905,15 +994,15 @@
         </p:nvSpPr>
         <p:spPr>
           <a:xfrm>
-            <a:off x="9509760" y="4206240"/>
-            <a:ext cx="4389120" cy="4389120"/>
+            <a:off x="9692640" y="3840480"/>
+            <a:ext cx="4206240" cy="4206240"/>
           </a:xfrm>
           <a:prstGeom prst="ellipse">
             <a:avLst/>
           </a:prstGeom>
           <a:solidFill>
             <a:srgbClr val="FD400C">
-              <a:alpha val="7000"/>
+              <a:alpha val="6000"/>
             </a:srgbClr>
           </a:solidFill>
           <a:ln/>
@@ -949,8 +1038,8 @@
         </p:nvSpPr>
         <p:spPr>
           <a:xfrm>
-            <a:off x="685800" y="274320"/>
-            <a:ext cx="10789920" cy="685800"/>
+            <a:off x="685800" y="219456"/>
+            <a:ext cx="10789920" cy="621792"/>
           </a:xfrm>
           <a:prstGeom prst="rect">
             <a:avLst/>
@@ -966,7 +1055,7 @@
               <a:buNone/>
             </a:pPr>
             <a:r>
-              <a:rPr lang="en-US" sz="4000" b="1" dirty="0">
+              <a:rPr lang="en-US" sz="3700" b="1" dirty="0">
                 <a:solidFill>
                   <a:srgbClr val="FD400C"/>
                 </a:solidFill>
@@ -980,7 +1069,7 @@
               <a:buNone/>
             </a:pPr>
             <a:r>
-              <a:rPr lang="en-US" sz="4000" b="1" dirty="0">
+              <a:rPr lang="en-US" sz="3700" b="1" dirty="0">
                 <a:solidFill>
                   <a:srgbClr val="241D1A"/>
                 </a:solidFill>
@@ -990,7 +1079,7 @@
               </a:rPr>
               <a:t>  —  de la idea al mercado</a:t>
             </a:r>
-            <a:endParaRPr lang="en-US" sz="4000" dirty="0"/>
+            <a:endParaRPr lang="en-US" sz="3700" dirty="0"/>
           </a:p>
         </p:txBody>
       </p:sp>
@@ -1002,8 +1091,8 @@
         </p:nvSpPr>
         <p:spPr>
           <a:xfrm>
-            <a:off x="713232" y="932688"/>
-            <a:ext cx="10789920" cy="310896"/>
+            <a:off x="713232" y="822960"/>
+            <a:ext cx="10789920" cy="274320"/>
           </a:xfrm>
           <a:prstGeom prst="rect">
             <a:avLst/>
@@ -1019,7 +1108,7 @@
               <a:buNone/>
             </a:pPr>
             <a:r>
-              <a:rPr lang="en-US" sz="1400" i="1" dirty="0">
+              <a:rPr lang="en-US" sz="1300" i="1" dirty="0">
                 <a:solidFill>
                   <a:srgbClr val="8A7F78"/>
                 </a:solidFill>
@@ -1027,9 +1116,9 @@
                 <a:ea typeface="Arial" pitchFamily="34" charset="-122"/>
                 <a:cs typeface="Arial" pitchFamily="34" charset="-120"/>
               </a:rPr>
-              <a:t>from idea to market  ·  junio 2026 → 8 de octubre de 2026  ·  ciencia del ciclo, hecha producto</a:t>
-            </a:r>
-            <a:endParaRPr lang="en-US" sz="1400" dirty="0"/>
+              <a:t>junio 2026 → 8 de octubre de 2026  ·  ciencia del ciclo, hecha producto</a:t>
+            </a:r>
+            <a:endParaRPr lang="en-US" sz="1300" dirty="0"/>
           </a:p>
         </p:txBody>
       </p:sp>
@@ -1041,7 +1130,7 @@
         </p:nvSpPr>
         <p:spPr>
           <a:xfrm>
-            <a:off x="822960" y="3570732"/>
+            <a:off x="822960" y="3323844"/>
             <a:ext cx="3449117" cy="82296"/>
           </a:xfrm>
           <a:prstGeom prst="roundRect">
@@ -1063,7 +1152,7 @@
         </p:nvSpPr>
         <p:spPr>
           <a:xfrm>
-            <a:off x="4217213" y="3570732"/>
+            <a:off x="4217213" y="3323844"/>
             <a:ext cx="1964131" cy="82296"/>
           </a:xfrm>
           <a:prstGeom prst="roundRect">
@@ -1085,7 +1174,7 @@
         </p:nvSpPr>
         <p:spPr>
           <a:xfrm>
-            <a:off x="6126480" y="3570732"/>
+            <a:off x="6126480" y="3323844"/>
             <a:ext cx="2176272" cy="82296"/>
           </a:xfrm>
           <a:prstGeom prst="roundRect">
@@ -1107,7 +1196,7 @@
         </p:nvSpPr>
         <p:spPr>
           <a:xfrm>
-            <a:off x="8247888" y="3570732"/>
+            <a:off x="8247888" y="3323844"/>
             <a:ext cx="1964131" cy="82296"/>
           </a:xfrm>
           <a:prstGeom prst="roundRect">
@@ -1129,7 +1218,7 @@
         </p:nvSpPr>
         <p:spPr>
           <a:xfrm>
-            <a:off x="10157155" y="3570732"/>
+            <a:off x="10157155" y="3323844"/>
             <a:ext cx="1327709" cy="82296"/>
           </a:xfrm>
           <a:prstGeom prst="roundRect">
@@ -1151,7 +1240,7 @@
         </p:nvSpPr>
         <p:spPr>
           <a:xfrm rot="5400000">
-            <a:off x="11411712" y="3456432"/>
+            <a:off x="11411712" y="3209544"/>
             <a:ext cx="310896" cy="310896"/>
           </a:xfrm>
           <a:prstGeom prst="triangle">
@@ -1171,7 +1260,7 @@
         </p:nvSpPr>
         <p:spPr>
           <a:xfrm>
-            <a:off x="1380744" y="3063240"/>
+            <a:off x="1380744" y="2816352"/>
             <a:ext cx="1097280" cy="1097280"/>
           </a:xfrm>
           <a:prstGeom prst="ellipse">
@@ -1193,7 +1282,7 @@
         </p:nvSpPr>
         <p:spPr>
           <a:xfrm>
-            <a:off x="1444752" y="3127248"/>
+            <a:off x="1444752" y="2880360"/>
             <a:ext cx="969264" cy="969264"/>
           </a:xfrm>
           <a:prstGeom prst="ellipse">
@@ -1233,8 +1322,8 @@
         </p:blipFill>
         <p:spPr>
           <a:xfrm>
-            <a:off x="1600200" y="3282696"/>
-            <a:ext cx="658368" cy="658368"/>
+            <a:off x="1591056" y="3026664"/>
+            <a:ext cx="676656" cy="676656"/>
           </a:xfrm>
           <a:prstGeom prst="rect">
             <a:avLst/>
@@ -1249,7 +1338,7 @@
         </p:nvSpPr>
         <p:spPr>
           <a:xfrm>
-            <a:off x="2148840" y="3090672"/>
+            <a:off x="2148840" y="2843784"/>
             <a:ext cx="310896" cy="310896"/>
           </a:xfrm>
           <a:prstGeom prst="ellipse">
@@ -1274,7 +1363,7 @@
         </p:nvSpPr>
         <p:spPr>
           <a:xfrm>
-            <a:off x="2148840" y="3090672"/>
+            <a:off x="2148840" y="2843784"/>
             <a:ext cx="310896" cy="310896"/>
           </a:xfrm>
           <a:prstGeom prst="rect">
@@ -1313,8 +1402,8 @@
         </p:nvSpPr>
         <p:spPr>
           <a:xfrm>
-            <a:off x="1929384" y="2670048"/>
-            <a:ext cx="0" cy="457200"/>
+            <a:off x="1929384" y="2450592"/>
+            <a:ext cx="0" cy="429768"/>
           </a:xfrm>
           <a:prstGeom prst="line">
             <a:avLst/>
@@ -1336,12 +1425,12 @@
         </p:nvSpPr>
         <p:spPr>
           <a:xfrm>
-            <a:off x="1271016" y="2340864"/>
-            <a:ext cx="1316736" cy="292608"/>
+            <a:off x="1271016" y="2139696"/>
+            <a:ext cx="1316736" cy="274320"/>
           </a:xfrm>
           <a:prstGeom prst="roundRect">
             <a:avLst>
-              <a:gd name="adj" fmla="val 15625"/>
+              <a:gd name="adj" fmla="val 16667"/>
             </a:avLst>
           </a:prstGeom>
           <a:solidFill>
@@ -1365,8 +1454,8 @@
         </p:nvSpPr>
         <p:spPr>
           <a:xfrm>
-            <a:off x="1271016" y="2340864"/>
-            <a:ext cx="1316736" cy="292608"/>
+            <a:off x="1271016" y="2139696"/>
+            <a:ext cx="1316736" cy="274320"/>
           </a:xfrm>
           <a:prstGeom prst="rect">
             <a:avLst/>
@@ -1382,7 +1471,7 @@
               <a:buNone/>
             </a:pPr>
             <a:r>
-              <a:rPr lang="en-US" sz="1150" b="1" spc="100" kern="0" dirty="0">
+              <a:rPr lang="en-US" sz="1100" b="1" spc="100" kern="0" dirty="0">
                 <a:solidFill>
                   <a:srgbClr val="FFFFFF"/>
                 </a:solidFill>
@@ -1392,7 +1481,7 @@
               </a:rPr>
               <a:t>JUN 2026</a:t>
             </a:r>
-            <a:endParaRPr lang="en-US" sz="1150" dirty="0"/>
+            <a:endParaRPr lang="en-US" sz="1100" dirty="0"/>
           </a:p>
         </p:txBody>
       </p:sp>
@@ -1404,8 +1493,8 @@
         </p:nvSpPr>
         <p:spPr>
           <a:xfrm>
-            <a:off x="996696" y="1371600"/>
-            <a:ext cx="1865376" cy="914400"/>
+            <a:off x="996696" y="1188720"/>
+            <a:ext cx="1865376" cy="877824"/>
           </a:xfrm>
           <a:prstGeom prst="rect">
             <a:avLst/>
@@ -1438,35 +1527,18 @@
               <a:buNone/>
             </a:pPr>
             <a:r>
-              <a:rPr lang="en-US" sz="950" i="1" dirty="0">
-                <a:solidFill>
-                  <a:srgbClr val="8A7F78"/>
-                </a:solidFill>
-                <a:latin typeface="Arial" pitchFamily="34" charset="0"/>
-                <a:ea typeface="Arial" pitchFamily="34" charset="-122"/>
-                <a:cs typeface="Arial" pitchFamily="34" charset="-120"/>
-              </a:rPr>
-              <a:t>Idea &amp; founding team</a:t>
+              <a:rPr lang="en-US" sz="900" dirty="0">
+                <a:solidFill>
+                  <a:srgbClr val="6E655D"/>
+                </a:solidFill>
+                <a:latin typeface="Arial" pitchFamily="34" charset="0"/>
+                <a:ea typeface="Arial" pitchFamily="34" charset="-122"/>
+                <a:cs typeface="Arial" pitchFamily="34" charset="-120"/>
+              </a:rPr>
+              <a:t>4 founders · ciencia del ciclo · stack lean</a:t>
             </a:r>
             <a:endParaRPr lang="en-US" sz="1300" dirty="0"/>
           </a:p>
-          <a:p>
-            <a:pPr algn="ctr" indent="0" marL="0">
-              <a:buNone/>
-            </a:pPr>
-            <a:r>
-              <a:rPr lang="en-US" sz="850" dirty="0">
-                <a:solidFill>
-                  <a:srgbClr val="6E655D"/>
-                </a:solidFill>
-                <a:latin typeface="Arial" pitchFamily="34" charset="0"/>
-                <a:ea typeface="Arial" pitchFamily="34" charset="-122"/>
-                <a:cs typeface="Arial" pitchFamily="34" charset="-120"/>
-              </a:rPr>
-              <a:t>4 founders · ciencia del ciclo · stack lean</a:t>
-            </a:r>
-            <a:endParaRPr lang="en-US" sz="1300" dirty="0"/>
-          </a:p>
         </p:txBody>
       </p:sp>
       <p:sp>
@@ -1477,7 +1549,7 @@
         </p:nvSpPr>
         <p:spPr>
           <a:xfrm>
-            <a:off x="3163824" y="3063240"/>
+            <a:off x="3163824" y="2816352"/>
             <a:ext cx="1097280" cy="1097280"/>
           </a:xfrm>
           <a:prstGeom prst="ellipse">
@@ -1499,7 +1571,7 @@
         </p:nvSpPr>
         <p:spPr>
           <a:xfrm>
-            <a:off x="3227832" y="3127248"/>
+            <a:off x="3227832" y="2880360"/>
             <a:ext cx="969264" cy="969264"/>
           </a:xfrm>
           <a:prstGeom prst="ellipse">
@@ -1539,8 +1611,8 @@
         </p:blipFill>
         <p:spPr>
           <a:xfrm>
-            <a:off x="3383280" y="3282696"/>
-            <a:ext cx="658368" cy="658368"/>
+            <a:off x="3374136" y="3026664"/>
+            <a:ext cx="676656" cy="676656"/>
           </a:xfrm>
           <a:prstGeom prst="rect">
             <a:avLst/>
@@ -1555,7 +1627,7 @@
         </p:nvSpPr>
         <p:spPr>
           <a:xfrm>
-            <a:off x="3931920" y="3090672"/>
+            <a:off x="3931920" y="2843784"/>
             <a:ext cx="310896" cy="310896"/>
           </a:xfrm>
           <a:prstGeom prst="ellipse">
@@ -1580,7 +1652,7 @@
         </p:nvSpPr>
         <p:spPr>
           <a:xfrm>
-            <a:off x="3931920" y="3090672"/>
+            <a:off x="3931920" y="2843784"/>
             <a:ext cx="310896" cy="310896"/>
           </a:xfrm>
           <a:prstGeom prst="rect">
@@ -1619,8 +1691,8 @@
         </p:nvSpPr>
         <p:spPr>
           <a:xfrm>
-            <a:off x="3712464" y="4114800"/>
-            <a:ext cx="0" cy="457200"/>
+            <a:off x="3712464" y="3867912"/>
+            <a:ext cx="0" cy="429768"/>
           </a:xfrm>
           <a:prstGeom prst="line">
             <a:avLst/>
@@ -1642,12 +1714,12 @@
         </p:nvSpPr>
         <p:spPr>
           <a:xfrm>
-            <a:off x="3054096" y="4315968"/>
-            <a:ext cx="1316736" cy="292608"/>
+            <a:off x="3054096" y="4059936"/>
+            <a:ext cx="1316736" cy="274320"/>
           </a:xfrm>
           <a:prstGeom prst="roundRect">
             <a:avLst>
-              <a:gd name="adj" fmla="val 15625"/>
+              <a:gd name="adj" fmla="val 16667"/>
             </a:avLst>
           </a:prstGeom>
           <a:solidFill>
@@ -1671,8 +1743,8 @@
         </p:nvSpPr>
         <p:spPr>
           <a:xfrm>
-            <a:off x="3054096" y="4315968"/>
-            <a:ext cx="1316736" cy="292608"/>
+            <a:off x="3054096" y="4059936"/>
+            <a:ext cx="1316736" cy="274320"/>
           </a:xfrm>
           <a:prstGeom prst="rect">
             <a:avLst/>
@@ -1688,7 +1760,7 @@
               <a:buNone/>
             </a:pPr>
             <a:r>
-              <a:rPr lang="en-US" sz="1150" b="1" spc="100" kern="0" dirty="0">
+              <a:rPr lang="en-US" sz="1100" b="1" spc="100" kern="0" dirty="0">
                 <a:solidFill>
                   <a:srgbClr val="FFFFFF"/>
                 </a:solidFill>
@@ -1698,7 +1770,7 @@
               </a:rPr>
               <a:t>JUL 2026</a:t>
             </a:r>
-            <a:endParaRPr lang="en-US" sz="1150" dirty="0"/>
+            <a:endParaRPr lang="en-US" sz="1100" dirty="0"/>
           </a:p>
         </p:txBody>
       </p:sp>
@@ -1710,8 +1782,8 @@
         </p:nvSpPr>
         <p:spPr>
           <a:xfrm>
-            <a:off x="2779776" y="4681728"/>
-            <a:ext cx="1865376" cy="914400"/>
+            <a:off x="2779776" y="4407408"/>
+            <a:ext cx="1865376" cy="877824"/>
           </a:xfrm>
           <a:prstGeom prst="rect">
             <a:avLst/>
@@ -1744,35 +1816,18 @@
               <a:buNone/>
             </a:pPr>
             <a:r>
-              <a:rPr lang="en-US" sz="950" i="1" dirty="0">
-                <a:solidFill>
-                  <a:srgbClr val="8A7F78"/>
-                </a:solidFill>
-                <a:latin typeface="Arial" pitchFamily="34" charset="0"/>
-                <a:ea typeface="Arial" pitchFamily="34" charset="-122"/>
-                <a:cs typeface="Arial" pitchFamily="34" charset="-120"/>
-              </a:rPr>
-              <a:t>Building the product</a:t>
+              <a:rPr lang="en-US" sz="900" dirty="0">
+                <a:solidFill>
+                  <a:srgbClr val="6E655D"/>
+                </a:solidFill>
+                <a:latin typeface="Arial" pitchFamily="34" charset="0"/>
+                <a:ea typeface="Arial" pitchFamily="34" charset="-122"/>
+                <a:cs typeface="Arial" pitchFamily="34" charset="-120"/>
+              </a:rPr>
+              <a:t>App iOS/Android + PWA + web · 14 idiomas</a:t>
             </a:r>
             <a:endParaRPr lang="en-US" sz="1300" dirty="0"/>
           </a:p>
-          <a:p>
-            <a:pPr algn="ctr" indent="0" marL="0">
-              <a:buNone/>
-            </a:pPr>
-            <a:r>
-              <a:rPr lang="en-US" sz="850" dirty="0">
-                <a:solidFill>
-                  <a:srgbClr val="6E655D"/>
-                </a:solidFill>
-                <a:latin typeface="Arial" pitchFamily="34" charset="0"/>
-                <a:ea typeface="Arial" pitchFamily="34" charset="-122"/>
-                <a:cs typeface="Arial" pitchFamily="34" charset="-120"/>
-              </a:rPr>
-              <a:t>App iOS/Android + PWA + web · 14 idiomas</a:t>
-            </a:r>
-            <a:endParaRPr lang="en-US" sz="1300" dirty="0"/>
-          </a:p>
         </p:txBody>
       </p:sp>
       <p:sp>
@@ -1783,7 +1838,7 @@
         </p:nvSpPr>
         <p:spPr>
           <a:xfrm>
-            <a:off x="4946904" y="3063240"/>
+            <a:off x="4946904" y="2816352"/>
             <a:ext cx="1097280" cy="1097280"/>
           </a:xfrm>
           <a:prstGeom prst="ellipse">
@@ -1805,7 +1860,7 @@
         </p:nvSpPr>
         <p:spPr>
           <a:xfrm>
-            <a:off x="5010912" y="3127248"/>
+            <a:off x="5010912" y="2880360"/>
             <a:ext cx="969264" cy="969264"/>
           </a:xfrm>
           <a:prstGeom prst="ellipse">
@@ -1845,8 +1900,8 @@
         </p:blipFill>
         <p:spPr>
           <a:xfrm>
-            <a:off x="5166360" y="3282696"/>
-            <a:ext cx="658368" cy="658368"/>
+            <a:off x="5157216" y="3026664"/>
+            <a:ext cx="676656" cy="676656"/>
           </a:xfrm>
           <a:prstGeom prst="rect">
             <a:avLst/>
@@ -1861,7 +1916,7 @@
         </p:nvSpPr>
         <p:spPr>
           <a:xfrm>
-            <a:off x="5715000" y="3090672"/>
+            <a:off x="5715000" y="2843784"/>
             <a:ext cx="310896" cy="310896"/>
           </a:xfrm>
           <a:prstGeom prst="ellipse">
@@ -1886,7 +1941,7 @@
         </p:nvSpPr>
         <p:spPr>
           <a:xfrm>
-            <a:off x="5715000" y="3090672"/>
+            <a:off x="5715000" y="2843784"/>
             <a:ext cx="310896" cy="310896"/>
           </a:xfrm>
           <a:prstGeom prst="rect">
@@ -1925,8 +1980,8 @@
         </p:nvSpPr>
         <p:spPr>
           <a:xfrm>
-            <a:off x="5495544" y="2670048"/>
-            <a:ext cx="0" cy="457200"/>
+            <a:off x="5495544" y="2450592"/>
+            <a:ext cx="0" cy="429768"/>
           </a:xfrm>
           <a:prstGeom prst="line">
             <a:avLst/>
@@ -1948,12 +2003,12 @@
         </p:nvSpPr>
         <p:spPr>
           <a:xfrm>
-            <a:off x="4837176" y="2340864"/>
-            <a:ext cx="1316736" cy="292608"/>
+            <a:off x="4837176" y="2139696"/>
+            <a:ext cx="1316736" cy="274320"/>
           </a:xfrm>
           <a:prstGeom prst="roundRect">
             <a:avLst>
-              <a:gd name="adj" fmla="val 15625"/>
+              <a:gd name="adj" fmla="val 16667"/>
             </a:avLst>
           </a:prstGeom>
           <a:solidFill>
@@ -1977,8 +2032,8 @@
         </p:nvSpPr>
         <p:spPr>
           <a:xfrm>
-            <a:off x="4837176" y="2340864"/>
-            <a:ext cx="1316736" cy="292608"/>
+            <a:off x="4837176" y="2139696"/>
+            <a:ext cx="1316736" cy="274320"/>
           </a:xfrm>
           <a:prstGeom prst="rect">
             <a:avLst/>
@@ -1994,7 +2049,7 @@
               <a:buNone/>
             </a:pPr>
             <a:r>
-              <a:rPr lang="en-US" sz="1150" b="1" spc="100" kern="0" dirty="0">
+              <a:rPr lang="en-US" sz="1100" b="1" spc="100" kern="0" dirty="0">
                 <a:solidFill>
                   <a:srgbClr val="FFFFFF"/>
                 </a:solidFill>
@@ -2004,7 +2059,7 @@
               </a:rPr>
               <a:t>AGO 2026</a:t>
             </a:r>
-            <a:endParaRPr lang="en-US" sz="1150" dirty="0"/>
+            <a:endParaRPr lang="en-US" sz="1100" dirty="0"/>
           </a:p>
         </p:txBody>
       </p:sp>
@@ -2016,8 +2071,8 @@
         </p:nvSpPr>
         <p:spPr>
           <a:xfrm>
-            <a:off x="4562856" y="1371600"/>
-            <a:ext cx="1865376" cy="914400"/>
+            <a:off x="4562856" y="1188720"/>
+            <a:ext cx="1865376" cy="877824"/>
           </a:xfrm>
           <a:prstGeom prst="rect">
             <a:avLst/>
@@ -2050,35 +2105,18 @@
               <a:buNone/>
             </a:pPr>
             <a:r>
-              <a:rPr lang="en-US" sz="950" i="1" dirty="0">
-                <a:solidFill>
-                  <a:srgbClr val="8A7F78"/>
-                </a:solidFill>
-                <a:latin typeface="Arial" pitchFamily="34" charset="0"/>
-                <a:ea typeface="Arial" pitchFamily="34" charset="-122"/>
-                <a:cs typeface="Arial" pitchFamily="34" charset="-120"/>
-              </a:rPr>
-              <a:t>Live pilot on both stores</a:t>
+              <a:rPr lang="en-US" sz="900" dirty="0">
+                <a:solidFill>
+                  <a:srgbClr val="6E655D"/>
+                </a:solidFill>
+                <a:latin typeface="Arial" pitchFamily="34" charset="0"/>
+                <a:ea typeface="Arial" pitchFamily="34" charset="-122"/>
+                <a:cs typeface="Arial" pitchFamily="34" charset="-120"/>
+              </a:rPr>
+              <a:t>32 testers · consentimiento auditable · v0.20</a:t>
             </a:r>
             <a:endParaRPr lang="en-US" sz="1300" dirty="0"/>
           </a:p>
-          <a:p>
-            <a:pPr algn="ctr" indent="0" marL="0">
-              <a:buNone/>
-            </a:pPr>
-            <a:r>
-              <a:rPr lang="en-US" sz="850" dirty="0">
-                <a:solidFill>
-                  <a:srgbClr val="6E655D"/>
-                </a:solidFill>
-                <a:latin typeface="Arial" pitchFamily="34" charset="0"/>
-                <a:ea typeface="Arial" pitchFamily="34" charset="-122"/>
-                <a:cs typeface="Arial" pitchFamily="34" charset="-120"/>
-              </a:rPr>
-              <a:t>32 testers · consentimiento auditable · v0.20</a:t>
-            </a:r>
-            <a:endParaRPr lang="en-US" sz="1300" dirty="0"/>
-          </a:p>
         </p:txBody>
       </p:sp>
       <p:sp>
@@ -2089,7 +2127,7 @@
         </p:nvSpPr>
         <p:spPr>
           <a:xfrm>
-            <a:off x="6729984" y="3063240"/>
+            <a:off x="6729984" y="2816352"/>
             <a:ext cx="1097280" cy="1097280"/>
           </a:xfrm>
           <a:prstGeom prst="ellipse">
@@ -2111,7 +2149,7 @@
         </p:nvSpPr>
         <p:spPr>
           <a:xfrm>
-            <a:off x="6793992" y="3127248"/>
+            <a:off x="6793992" y="2880360"/>
             <a:ext cx="969264" cy="969264"/>
           </a:xfrm>
           <a:prstGeom prst="ellipse">
@@ -2151,8 +2189,8 @@
         </p:blipFill>
         <p:spPr>
           <a:xfrm>
-            <a:off x="6949440" y="3282696"/>
-            <a:ext cx="658368" cy="658368"/>
+            <a:off x="6940296" y="3026664"/>
+            <a:ext cx="676656" cy="676656"/>
           </a:xfrm>
           <a:prstGeom prst="rect">
             <a:avLst/>
@@ -2167,7 +2205,7 @@
         </p:nvSpPr>
         <p:spPr>
           <a:xfrm>
-            <a:off x="7498080" y="3090672"/>
+            <a:off x="7498080" y="2843784"/>
             <a:ext cx="310896" cy="310896"/>
           </a:xfrm>
           <a:prstGeom prst="ellipse">
@@ -2192,7 +2230,7 @@
         </p:nvSpPr>
         <p:spPr>
           <a:xfrm>
-            <a:off x="7498080" y="3090672"/>
+            <a:off x="7498080" y="2843784"/>
             <a:ext cx="310896" cy="310896"/>
           </a:xfrm>
           <a:prstGeom prst="rect">
@@ -2231,8 +2269,8 @@
         </p:nvSpPr>
         <p:spPr>
           <a:xfrm>
-            <a:off x="7278624" y="4114800"/>
-            <a:ext cx="0" cy="457200"/>
+            <a:off x="7278624" y="3867912"/>
+            <a:ext cx="0" cy="429768"/>
           </a:xfrm>
           <a:prstGeom prst="line">
             <a:avLst/>
@@ -2254,12 +2292,12 @@
         </p:nvSpPr>
         <p:spPr>
           <a:xfrm>
-            <a:off x="6620256" y="4315968"/>
-            <a:ext cx="1316736" cy="292608"/>
+            <a:off x="6620256" y="4059936"/>
+            <a:ext cx="1316736" cy="274320"/>
           </a:xfrm>
           <a:prstGeom prst="roundRect">
             <a:avLst>
-              <a:gd name="adj" fmla="val 15625"/>
+              <a:gd name="adj" fmla="val 16667"/>
             </a:avLst>
           </a:prstGeom>
           <a:solidFill>
@@ -2283,8 +2321,8 @@
         </p:nvSpPr>
         <p:spPr>
           <a:xfrm>
-            <a:off x="6620256" y="4315968"/>
-            <a:ext cx="1316736" cy="292608"/>
+            <a:off x="6620256" y="4059936"/>
+            <a:ext cx="1316736" cy="274320"/>
           </a:xfrm>
           <a:prstGeom prst="rect">
             <a:avLst/>
@@ -2300,7 +2338,7 @@
               <a:buNone/>
             </a:pPr>
             <a:r>
-              <a:rPr lang="en-US" sz="1150" b="1" spc="100" kern="0" dirty="0">
+              <a:rPr lang="en-US" sz="1100" b="1" spc="100" kern="0" dirty="0">
                 <a:solidFill>
                   <a:srgbClr val="FFFFFF"/>
                 </a:solidFill>
@@ -2310,7 +2348,7 @@
               </a:rPr>
               <a:t>SEP 2026</a:t>
             </a:r>
-            <a:endParaRPr lang="en-US" sz="1150" dirty="0"/>
+            <a:endParaRPr lang="en-US" sz="1100" dirty="0"/>
           </a:p>
         </p:txBody>
       </p:sp>
@@ -2322,8 +2360,8 @@
         </p:nvSpPr>
         <p:spPr>
           <a:xfrm>
-            <a:off x="6345936" y="4681728"/>
-            <a:ext cx="1865376" cy="914400"/>
+            <a:off x="6345936" y="4407408"/>
+            <a:ext cx="1865376" cy="877824"/>
           </a:xfrm>
           <a:prstGeom prst="rect">
             <a:avLst/>
@@ -2356,35 +2394,18 @@
               <a:buNone/>
             </a:pPr>
             <a:r>
-              <a:rPr lang="en-US" sz="950" i="1" dirty="0">
-                <a:solidFill>
-                  <a:srgbClr val="8A7F78"/>
-                </a:solidFill>
-                <a:latin typeface="Arial" pitchFamily="34" charset="0"/>
-                <a:ea typeface="Arial" pitchFamily="34" charset="-122"/>
-                <a:cs typeface="Arial" pitchFamily="34" charset="-120"/>
-              </a:rPr>
-              <a:t>Expanded pilot + payments</a:t>
+              <a:rPr lang="en-US" sz="900" dirty="0">
+                <a:solidFill>
+                  <a:srgbClr val="6E655D"/>
+                </a:solidFill>
+                <a:latin typeface="Arial" pitchFamily="34" charset="0"/>
+                <a:ea typeface="Arial" pitchFamily="34" charset="-122"/>
+                <a:cs typeface="Arial" pitchFamily="34" charset="-120"/>
+              </a:rPr>
+              <a:t>Fases 1-2 · legal publicado · fichas stores</a:t>
             </a:r>
             <a:endParaRPr lang="en-US" sz="1300" dirty="0"/>
           </a:p>
-          <a:p>
-            <a:pPr algn="ctr" indent="0" marL="0">
-              <a:buNone/>
-            </a:pPr>
-            <a:r>
-              <a:rPr lang="en-US" sz="850" dirty="0">
-                <a:solidFill>
-                  <a:srgbClr val="6E655D"/>
-                </a:solidFill>
-                <a:latin typeface="Arial" pitchFamily="34" charset="0"/>
-                <a:ea typeface="Arial" pitchFamily="34" charset="-122"/>
-                <a:cs typeface="Arial" pitchFamily="34" charset="-120"/>
-              </a:rPr>
-              <a:t>Fases 1-2 · legal publicado · fichas stores</a:t>
-            </a:r>
-            <a:endParaRPr lang="en-US" sz="1300" dirty="0"/>
-          </a:p>
         </p:txBody>
       </p:sp>
       <p:sp>
@@ -2395,7 +2416,7 @@
         </p:nvSpPr>
         <p:spPr>
           <a:xfrm>
-            <a:off x="8513064" y="3063240"/>
+            <a:off x="8513064" y="2816352"/>
             <a:ext cx="1097280" cy="1097280"/>
           </a:xfrm>
           <a:prstGeom prst="ellipse">
@@ -2417,7 +2438,7 @@
         </p:nvSpPr>
         <p:spPr>
           <a:xfrm>
-            <a:off x="8577072" y="3127248"/>
+            <a:off x="8577072" y="2880360"/>
             <a:ext cx="969264" cy="969264"/>
           </a:xfrm>
           <a:prstGeom prst="ellipse">
@@ -2457,8 +2478,8 @@
         </p:blipFill>
         <p:spPr>
           <a:xfrm>
-            <a:off x="8732520" y="3282696"/>
-            <a:ext cx="658368" cy="658368"/>
+            <a:off x="8723376" y="3026664"/>
+            <a:ext cx="676656" cy="676656"/>
           </a:xfrm>
           <a:prstGeom prst="rect">
             <a:avLst/>
@@ -2473,7 +2494,7 @@
         </p:nvSpPr>
         <p:spPr>
           <a:xfrm>
-            <a:off x="9281160" y="3090672"/>
+            <a:off x="9281160" y="2843784"/>
             <a:ext cx="310896" cy="310896"/>
           </a:xfrm>
           <a:prstGeom prst="ellipse">
@@ -2498,7 +2519,7 @@
         </p:nvSpPr>
         <p:spPr>
           <a:xfrm>
-            <a:off x="9281160" y="3090672"/>
+            <a:off x="9281160" y="2843784"/>
             <a:ext cx="310896" cy="310896"/>
           </a:xfrm>
           <a:prstGeom prst="rect">
@@ -2537,8 +2558,8 @@
         </p:nvSpPr>
         <p:spPr>
           <a:xfrm>
-            <a:off x="9061704" y="2670048"/>
-            <a:ext cx="0" cy="457200"/>
+            <a:off x="9061704" y="2450592"/>
+            <a:ext cx="0" cy="429768"/>
           </a:xfrm>
           <a:prstGeom prst="line">
             <a:avLst/>
@@ -2560,12 +2581,12 @@
         </p:nvSpPr>
         <p:spPr>
           <a:xfrm>
-            <a:off x="8403336" y="2340864"/>
-            <a:ext cx="1316736" cy="292608"/>
+            <a:off x="8403336" y="2139696"/>
+            <a:ext cx="1316736" cy="274320"/>
           </a:xfrm>
           <a:prstGeom prst="roundRect">
             <a:avLst>
-              <a:gd name="adj" fmla="val 15625"/>
+              <a:gd name="adj" fmla="val 16667"/>
             </a:avLst>
           </a:prstGeom>
           <a:solidFill>
@@ -2589,8 +2610,8 @@
         </p:nvSpPr>
         <p:spPr>
           <a:xfrm>
-            <a:off x="8403336" y="2340864"/>
-            <a:ext cx="1316736" cy="292608"/>
+            <a:off x="8403336" y="2139696"/>
+            <a:ext cx="1316736" cy="274320"/>
           </a:xfrm>
           <a:prstGeom prst="rect">
             <a:avLst/>
@@ -2606,7 +2627,7 @@
               <a:buNone/>
             </a:pPr>
             <a:r>
-              <a:rPr lang="en-US" sz="1150" b="1" spc="100" kern="0" dirty="0">
+              <a:rPr lang="en-US" sz="1100" b="1" spc="100" kern="0" dirty="0">
                 <a:solidFill>
                   <a:srgbClr val="FFFFFF"/>
                 </a:solidFill>
@@ -2616,7 +2637,7 @@
               </a:rPr>
               <a:t>8 OCT 2026</a:t>
             </a:r>
-            <a:endParaRPr lang="en-US" sz="1150" dirty="0"/>
+            <a:endParaRPr lang="en-US" sz="1100" dirty="0"/>
           </a:p>
         </p:txBody>
       </p:sp>
@@ -2628,8 +2649,8 @@
         </p:nvSpPr>
         <p:spPr>
           <a:xfrm>
-            <a:off x="8129016" y="1371600"/>
-            <a:ext cx="1865376" cy="914400"/>
+            <a:off x="8129016" y="1188720"/>
+            <a:ext cx="1865376" cy="877824"/>
           </a:xfrm>
           <a:prstGeom prst="rect">
             <a:avLst/>
@@ -2662,35 +2683,18 @@
               <a:buNone/>
             </a:pPr>
             <a:r>
-              <a:rPr lang="en-US" sz="950" i="1" dirty="0">
-                <a:solidFill>
-                  <a:srgbClr val="8A7F78"/>
-                </a:solidFill>
-                <a:latin typeface="Arial" pitchFamily="34" charset="0"/>
-                <a:ea typeface="Arial" pitchFamily="34" charset="-122"/>
-                <a:cs typeface="Arial" pitchFamily="34" charset="-120"/>
-              </a:rPr>
-              <a:t>Commercial launch</a:t>
+              <a:rPr lang="en-US" sz="900" dirty="0">
+                <a:solidFill>
+                  <a:srgbClr val="6E655D"/>
+                </a:solidFill>
+                <a:latin typeface="Arial" pitchFamily="34" charset="0"/>
+                <a:ea typeface="Arial" pitchFamily="34" charset="-122"/>
+                <a:cs typeface="Arial" pitchFamily="34" charset="-120"/>
+              </a:rPr>
+              <a:t>App Store + Google Play · con pagos</a:t>
             </a:r>
             <a:endParaRPr lang="en-US" sz="1300" dirty="0"/>
           </a:p>
-          <a:p>
-            <a:pPr algn="ctr" indent="0" marL="0">
-              <a:buNone/>
-            </a:pPr>
-            <a:r>
-              <a:rPr lang="en-US" sz="850" dirty="0">
-                <a:solidFill>
-                  <a:srgbClr val="6E655D"/>
-                </a:solidFill>
-                <a:latin typeface="Arial" pitchFamily="34" charset="0"/>
-                <a:ea typeface="Arial" pitchFamily="34" charset="-122"/>
-                <a:cs typeface="Arial" pitchFamily="34" charset="-120"/>
-              </a:rPr>
-              <a:t>App Store + Google Play · con pagos</a:t>
-            </a:r>
-            <a:endParaRPr lang="en-US" sz="1300" dirty="0"/>
-          </a:p>
         </p:txBody>
       </p:sp>
       <p:sp>
@@ -2701,7 +2705,7 @@
         </p:nvSpPr>
         <p:spPr>
           <a:xfrm>
-            <a:off x="10296144" y="3063240"/>
+            <a:off x="10296144" y="2816352"/>
             <a:ext cx="1097280" cy="1097280"/>
           </a:xfrm>
           <a:prstGeom prst="ellipse">
@@ -2723,7 +2727,7 @@
         </p:nvSpPr>
         <p:spPr>
           <a:xfrm>
-            <a:off x="10360152" y="3127248"/>
+            <a:off x="10360152" y="2880360"/>
             <a:ext cx="969264" cy="969264"/>
           </a:xfrm>
           <a:prstGeom prst="ellipse">
@@ -2763,8 +2767,8 @@
         </p:blipFill>
         <p:spPr>
           <a:xfrm>
-            <a:off x="10515600" y="3282696"/>
-            <a:ext cx="658368" cy="658368"/>
+            <a:off x="10506456" y="3026664"/>
+            <a:ext cx="676656" cy="676656"/>
           </a:xfrm>
           <a:prstGeom prst="rect">
             <a:avLst/>
@@ -2779,7 +2783,7 @@
         </p:nvSpPr>
         <p:spPr>
           <a:xfrm>
-            <a:off x="11064240" y="3090672"/>
+            <a:off x="11064240" y="2843784"/>
             <a:ext cx="310896" cy="310896"/>
           </a:xfrm>
           <a:prstGeom prst="ellipse">
@@ -2804,7 +2808,7 @@
         </p:nvSpPr>
         <p:spPr>
           <a:xfrm>
-            <a:off x="11064240" y="3090672"/>
+            <a:off x="11064240" y="2843784"/>
             <a:ext cx="310896" cy="310896"/>
           </a:xfrm>
           <a:prstGeom prst="rect">
@@ -2843,8 +2847,8 @@
         </p:nvSpPr>
         <p:spPr>
           <a:xfrm>
-            <a:off x="10844784" y="4114800"/>
-            <a:ext cx="0" cy="457200"/>
+            <a:off x="10844784" y="3867912"/>
+            <a:ext cx="0" cy="429768"/>
           </a:xfrm>
           <a:prstGeom prst="line">
             <a:avLst/>
@@ -2866,12 +2870,12 @@
         </p:nvSpPr>
         <p:spPr>
           <a:xfrm>
-            <a:off x="10186416" y="4315968"/>
-            <a:ext cx="1316736" cy="292608"/>
+            <a:off x="10186416" y="4059936"/>
+            <a:ext cx="1316736" cy="274320"/>
           </a:xfrm>
           <a:prstGeom prst="roundRect">
             <a:avLst>
-              <a:gd name="adj" fmla="val 15625"/>
+              <a:gd name="adj" fmla="val 16667"/>
             </a:avLst>
           </a:prstGeom>
           <a:solidFill>
@@ -2895,8 +2899,8 @@
         </p:nvSpPr>
         <p:spPr>
           <a:xfrm>
-            <a:off x="10186416" y="4315968"/>
-            <a:ext cx="1316736" cy="292608"/>
+            <a:off x="10186416" y="4059936"/>
+            <a:ext cx="1316736" cy="274320"/>
           </a:xfrm>
           <a:prstGeom prst="rect">
             <a:avLst/>
@@ -2912,7 +2916,7 @@
               <a:buNone/>
             </a:pPr>
             <a:r>
-              <a:rPr lang="en-US" sz="1150" b="1" spc="100" kern="0" dirty="0">
+              <a:rPr lang="en-US" sz="1100" b="1" spc="100" kern="0" dirty="0">
                 <a:solidFill>
                   <a:srgbClr val="FFFFFF"/>
                 </a:solidFill>
@@ -2922,7 +2926,7 @@
               </a:rPr>
               <a:t>AÑO 1</a:t>
             </a:r>
-            <a:endParaRPr lang="en-US" sz="1150" dirty="0"/>
+            <a:endParaRPr lang="en-US" sz="1100" dirty="0"/>
           </a:p>
         </p:txBody>
       </p:sp>
@@ -2934,8 +2938,8 @@
         </p:nvSpPr>
         <p:spPr>
           <a:xfrm>
-            <a:off x="9912096" y="4681728"/>
-            <a:ext cx="1865376" cy="914400"/>
+            <a:off x="9912096" y="4407408"/>
+            <a:ext cx="1865376" cy="877824"/>
           </a:xfrm>
           <a:prstGeom prst="rect">
             <a:avLst/>
@@ -2968,35 +2972,18 @@
               <a:buNone/>
             </a:pPr>
             <a:r>
-              <a:rPr lang="en-US" sz="950" i="1" dirty="0">
-                <a:solidFill>
-                  <a:srgbClr val="8A7F78"/>
-                </a:solidFill>
-                <a:latin typeface="Arial" pitchFamily="34" charset="0"/>
-                <a:ea typeface="Arial" pitchFamily="34" charset="-122"/>
-                <a:cs typeface="Arial" pitchFamily="34" charset="-120"/>
-              </a:rPr>
-              <a:t>Where we are going</a:t>
+              <a:rPr lang="en-US" sz="900" dirty="0">
+                <a:solidFill>
+                  <a:srgbClr val="6E655D"/>
+                </a:solidFill>
+                <a:latin typeface="Arial" pitchFamily="34" charset="0"/>
+                <a:ea typeface="Arial" pitchFamily="34" charset="-122"/>
+                <a:cs typeface="Arial" pitchFamily="34" charset="-120"/>
+              </a:rPr>
+              <a:t>2.634 suscripciones · €74.772 · escalar EU</a:t>
             </a:r>
             <a:endParaRPr lang="en-US" sz="1300" dirty="0"/>
           </a:p>
-          <a:p>
-            <a:pPr algn="ctr" indent="0" marL="0">
-              <a:buNone/>
-            </a:pPr>
-            <a:r>
-              <a:rPr lang="en-US" sz="850" dirty="0">
-                <a:solidFill>
-                  <a:srgbClr val="6E655D"/>
-                </a:solidFill>
-                <a:latin typeface="Arial" pitchFamily="34" charset="0"/>
-                <a:ea typeface="Arial" pitchFamily="34" charset="-122"/>
-                <a:cs typeface="Arial" pitchFamily="34" charset="-120"/>
-              </a:rPr>
-              <a:t>2.634 suscripciones · €74.772 · escalar EU</a:t>
-            </a:r>
-            <a:endParaRPr lang="en-US" sz="1300" dirty="0"/>
-          </a:p>
         </p:txBody>
       </p:sp>
       <p:sp>
@@ -3007,8 +2994,8 @@
         </p:nvSpPr>
         <p:spPr>
           <a:xfrm>
-            <a:off x="5504688" y="3739896"/>
-            <a:ext cx="1463040" cy="274320"/>
+            <a:off x="5504688" y="3483864"/>
+            <a:ext cx="1463040" cy="256032"/>
           </a:xfrm>
           <a:prstGeom prst="roundRect">
             <a:avLst>
@@ -3036,8 +3023,8 @@
         </p:nvSpPr>
         <p:spPr>
           <a:xfrm>
-            <a:off x="6153912" y="3593592"/>
-            <a:ext cx="164592" cy="128016"/>
+            <a:off x="6153912" y="3346704"/>
+            <a:ext cx="164592" cy="118872"/>
           </a:xfrm>
           <a:prstGeom prst="triangle">
             <a:avLst/>
@@ -3056,8 +3043,8 @@
         </p:nvSpPr>
         <p:spPr>
           <a:xfrm>
-            <a:off x="5504688" y="3739896"/>
-            <a:ext cx="1463040" cy="274320"/>
+            <a:off x="5504688" y="3483864"/>
+            <a:ext cx="1463040" cy="256032"/>
           </a:xfrm>
           <a:prstGeom prst="rect">
             <a:avLst/>
@@ -3073,7 +3060,7 @@
               <a:buNone/>
             </a:pPr>
             <a:r>
-              <a:rPr lang="en-US" sz="720" b="1" spc="50" kern="0" dirty="0">
+              <a:rPr lang="en-US" sz="700" b="1" spc="50" kern="0" dirty="0">
                 <a:solidFill>
                   <a:srgbClr val="FFFFFF"/>
                 </a:solidFill>
@@ -3081,9 +3068,9 @@
                 <a:ea typeface="Arial" pitchFamily="34" charset="-122"/>
                 <a:cs typeface="Arial" pitchFamily="34" charset="-120"/>
               </a:rPr>
-              <a:t>ESTAMOS AQUÍ · WE ARE HERE</a:t>
-            </a:r>
-            <a:endParaRPr lang="en-US" sz="720" dirty="0"/>
+              <a:t>ESTAMOS AQUÍ · AGO 2026</a:t>
+            </a:r>
+            <a:endParaRPr lang="en-US" sz="700" dirty="0"/>
           </a:p>
         </p:txBody>
       </p:sp>
@@ -3095,12 +3082,12 @@
         </p:nvSpPr>
         <p:spPr>
           <a:xfrm>
-            <a:off x="928116" y="6053328"/>
-            <a:ext cx="2377440" cy="566928"/>
+            <a:off x="278892" y="5413248"/>
+            <a:ext cx="1847088" cy="493776"/>
           </a:xfrm>
           <a:prstGeom prst="roundRect">
             <a:avLst>
-              <a:gd name="adj" fmla="val 16129"/>
+              <a:gd name="adj" fmla="val 16667"/>
             </a:avLst>
           </a:prstGeom>
           <a:solidFill>
@@ -3122,8 +3109,8 @@
         </p:nvSpPr>
         <p:spPr>
           <a:xfrm>
-            <a:off x="1037844" y="6053328"/>
-            <a:ext cx="2157984" cy="566928"/>
+            <a:off x="361188" y="5413248"/>
+            <a:ext cx="1682496" cy="493776"/>
           </a:xfrm>
           <a:prstGeom prst="rect">
             <a:avLst/>
@@ -3139,21 +3126,24 @@
               <a:buNone/>
             </a:pPr>
             <a:r>
-              <a:rPr lang="en-US" sz="1700" b="1" dirty="0">
-                <a:solidFill>
-                  <a:srgbClr val="FD400C"/>
-                </a:solidFill>
-                <a:latin typeface="Arial" pitchFamily="34" charset="0"/>
-                <a:ea typeface="Arial" pitchFamily="34" charset="-122"/>
-                <a:cs typeface="Arial" pitchFamily="34" charset="-120"/>
-              </a:rPr>
-              <a:t>32  </a:t>
-            </a:r>
+              <a:rPr lang="en-US" sz="900" b="1" dirty="0">
+                <a:solidFill>
+                  <a:srgbClr val="241D1A"/>
+                </a:solidFill>
+                <a:latin typeface="Arial" pitchFamily="34" charset="0"/>
+                <a:ea typeface="Arial" pitchFamily="34" charset="-122"/>
+                <a:cs typeface="Arial" pitchFamily="34" charset="-120"/>
+              </a:rPr>
+              <a:t>🍎 App Store</a:t>
+            </a:r>
+            <a:endParaRPr lang="en-US" sz="900" dirty="0"/>
+          </a:p>
+          <a:p>
             <a:pPr indent="0" marL="0">
               <a:buNone/>
             </a:pPr>
             <a:r>
-              <a:rPr lang="en-US" sz="950" dirty="0">
+              <a:rPr lang="en-US" sz="750" dirty="0">
                 <a:solidFill>
                   <a:srgbClr val="6E655D"/>
                 </a:solidFill>
@@ -3161,9 +3151,9 @@
                 <a:ea typeface="Arial" pitchFamily="34" charset="-122"/>
                 <a:cs typeface="Arial" pitchFamily="34" charset="-120"/>
               </a:rPr>
-              <a:t>testers en piloto · pilot testers</a:t>
-            </a:r>
-            <a:endParaRPr lang="en-US" sz="1700" dirty="0"/>
+              <a:t>piloto · público 8-oct</a:t>
+            </a:r>
+            <a:endParaRPr lang="en-US" sz="900" dirty="0"/>
           </a:p>
         </p:txBody>
       </p:sp>
@@ -3175,12 +3165,12 @@
         </p:nvSpPr>
         <p:spPr>
           <a:xfrm>
-            <a:off x="3579876" y="6053328"/>
-            <a:ext cx="2377440" cy="566928"/>
+            <a:off x="2235708" y="5413248"/>
+            <a:ext cx="1847088" cy="493776"/>
           </a:xfrm>
           <a:prstGeom prst="roundRect">
             <a:avLst>
-              <a:gd name="adj" fmla="val 16129"/>
+              <a:gd name="adj" fmla="val 16667"/>
             </a:avLst>
           </a:prstGeom>
           <a:solidFill>
@@ -3202,8 +3192,8 @@
         </p:nvSpPr>
         <p:spPr>
           <a:xfrm>
-            <a:off x="3689604" y="6053328"/>
-            <a:ext cx="2157984" cy="566928"/>
+            <a:off x="2318004" y="5413248"/>
+            <a:ext cx="1682496" cy="493776"/>
           </a:xfrm>
           <a:prstGeom prst="rect">
             <a:avLst/>
@@ -3219,21 +3209,24 @@
               <a:buNone/>
             </a:pPr>
             <a:r>
-              <a:rPr lang="en-US" sz="1700" b="1" dirty="0">
-                <a:solidFill>
-                  <a:srgbClr val="FD400C"/>
-                </a:solidFill>
-                <a:latin typeface="Arial" pitchFamily="34" charset="0"/>
-                <a:ea typeface="Arial" pitchFamily="34" charset="-122"/>
-                <a:cs typeface="Arial" pitchFamily="34" charset="-120"/>
-              </a:rPr>
-              <a:t>2  </a:t>
-            </a:r>
+              <a:rPr lang="en-US" sz="900" b="1" dirty="0">
+                <a:solidFill>
+                  <a:srgbClr val="241D1A"/>
+                </a:solidFill>
+                <a:latin typeface="Arial" pitchFamily="34" charset="0"/>
+                <a:ea typeface="Arial" pitchFamily="34" charset="-122"/>
+                <a:cs typeface="Arial" pitchFamily="34" charset="-120"/>
+              </a:rPr>
+              <a:t>🤖 Google Play</a:t>
+            </a:r>
+            <a:endParaRPr lang="en-US" sz="900" dirty="0"/>
+          </a:p>
+          <a:p>
             <a:pPr indent="0" marL="0">
               <a:buNone/>
             </a:pPr>
             <a:r>
-              <a:rPr lang="en-US" sz="950" dirty="0">
+              <a:rPr lang="en-US" sz="750" dirty="0">
                 <a:solidFill>
                   <a:srgbClr val="6E655D"/>
                 </a:solidFill>
@@ -3241,9 +3234,9 @@
                 <a:ea typeface="Arial" pitchFamily="34" charset="-122"/>
                 <a:cs typeface="Arial" pitchFamily="34" charset="-120"/>
               </a:rPr>
-              <a:t>stores · iOS + Android</a:t>
-            </a:r>
-            <a:endParaRPr lang="en-US" sz="1700" dirty="0"/>
+              <a:t>piloto · público 8-oct</a:t>
+            </a:r>
+            <a:endParaRPr lang="en-US" sz="900" dirty="0"/>
           </a:p>
         </p:txBody>
       </p:sp>
@@ -3255,12 +3248,12 @@
         </p:nvSpPr>
         <p:spPr>
           <a:xfrm>
-            <a:off x="6231636" y="6053328"/>
-            <a:ext cx="2377440" cy="566928"/>
+            <a:off x="4192524" y="5413248"/>
+            <a:ext cx="1847088" cy="493776"/>
           </a:xfrm>
           <a:prstGeom prst="roundRect">
             <a:avLst>
-              <a:gd name="adj" fmla="val 16129"/>
+              <a:gd name="adj" fmla="val 16667"/>
             </a:avLst>
           </a:prstGeom>
           <a:solidFill>
@@ -3282,8 +3275,8 @@
         </p:nvSpPr>
         <p:spPr>
           <a:xfrm>
-            <a:off x="6341364" y="6053328"/>
-            <a:ext cx="2157984" cy="566928"/>
+            <a:off x="4274820" y="5413248"/>
+            <a:ext cx="1682496" cy="493776"/>
           </a:xfrm>
           <a:prstGeom prst="rect">
             <a:avLst/>
@@ -3299,21 +3292,31 @@
               <a:buNone/>
             </a:pPr>
             <a:r>
-              <a:rPr lang="en-US" sz="1700" b="1" dirty="0">
-                <a:solidFill>
-                  <a:srgbClr val="FD400C"/>
-                </a:solidFill>
-                <a:latin typeface="Arial" pitchFamily="34" charset="0"/>
-                <a:ea typeface="Arial" pitchFamily="34" charset="-122"/>
-                <a:cs typeface="Arial" pitchFamily="34" charset="-120"/>
-              </a:rPr>
-              <a:t>14  </a:t>
-            </a:r>
+              <a:rPr lang="en-US" sz="900" b="1" u="sng" dirty="0">
+                <a:solidFill>
+                  <a:srgbClr val="241D1A"/>
+                </a:solidFill>
+                <a:latin typeface="Arial" pitchFamily="34" charset="0"/>
+                <a:ea typeface="Arial" pitchFamily="34" charset="-122"/>
+                <a:cs typeface="Arial" pitchFamily="34" charset="-120"/>
+                <a:hlinkClick r:id="rId7" invalidUrl="" action="" tgtFrame="" tooltip="" history="1" highlightClick="0" endSnd="0">
+                  <a:extLst>
+                    <a:ext uri="{A12FA001-AC4F-418D-AE19-62706E023703}">
+                      <ahyp:hlinkClr xmlns:ahyp="http://schemas.microsoft.com/office/drawing/2018/hyperlinkcolor" val="tx"/>
+                    </a:ext>
+                  </a:extLst>
+                </a:hlinkClick>
+              </a:rPr>
+              <a:t>🌐 nutrisynccollective.com</a:t>
+            </a:r>
+            <a:endParaRPr lang="en-US" sz="900" dirty="0"/>
+          </a:p>
+          <a:p>
             <a:pPr indent="0" marL="0">
               <a:buNone/>
             </a:pPr>
             <a:r>
-              <a:rPr lang="en-US" sz="950" dirty="0">
+              <a:rPr lang="en-US" sz="750" dirty="0">
                 <a:solidFill>
                   <a:srgbClr val="6E655D"/>
                 </a:solidFill>
@@ -3321,9 +3324,9 @@
                 <a:ea typeface="Arial" pitchFamily="34" charset="-122"/>
                 <a:cs typeface="Arial" pitchFamily="34" charset="-120"/>
               </a:rPr>
-              <a:t>idiomas · languages</a:t>
-            </a:r>
-            <a:endParaRPr lang="en-US" sz="1700" dirty="0"/>
+              <a:t>web marketing</a:t>
+            </a:r>
+            <a:endParaRPr lang="en-US" sz="900" dirty="0"/>
           </a:p>
         </p:txBody>
       </p:sp>
@@ -3335,12 +3338,12 @@
         </p:nvSpPr>
         <p:spPr>
           <a:xfrm>
-            <a:off x="8883396" y="6053328"/>
-            <a:ext cx="2377440" cy="566928"/>
+            <a:off x="6149340" y="5413248"/>
+            <a:ext cx="1847088" cy="493776"/>
           </a:xfrm>
           <a:prstGeom prst="roundRect">
             <a:avLst>
-              <a:gd name="adj" fmla="val 16129"/>
+              <a:gd name="adj" fmla="val 16667"/>
             </a:avLst>
           </a:prstGeom>
           <a:solidFill>
@@ -3362,8 +3365,8 @@
         </p:nvSpPr>
         <p:spPr>
           <a:xfrm>
-            <a:off x="8993124" y="6053328"/>
-            <a:ext cx="2157984" cy="566928"/>
+            <a:off x="6231636" y="5413248"/>
+            <a:ext cx="1682496" cy="493776"/>
           </a:xfrm>
           <a:prstGeom prst="rect">
             <a:avLst/>
@@ -3379,21 +3382,31 @@
               <a:buNone/>
             </a:pPr>
             <a:r>
-              <a:rPr lang="en-US" sz="1700" b="1" dirty="0">
-                <a:solidFill>
-                  <a:srgbClr val="FD400C"/>
-                </a:solidFill>
-                <a:latin typeface="Arial" pitchFamily="34" charset="0"/>
-                <a:ea typeface="Arial" pitchFamily="34" charset="-122"/>
-                <a:cs typeface="Arial" pitchFamily="34" charset="-120"/>
-              </a:rPr>
-              <a:t>€74.772  </a:t>
-            </a:r>
+              <a:rPr lang="en-US" sz="900" b="1" u="sng" dirty="0">
+                <a:solidFill>
+                  <a:srgbClr val="241D1A"/>
+                </a:solidFill>
+                <a:latin typeface="Arial" pitchFamily="34" charset="0"/>
+                <a:ea typeface="Arial" pitchFamily="34" charset="-122"/>
+                <a:cs typeface="Arial" pitchFamily="34" charset="-120"/>
+                <a:hlinkClick r:id="rId8" invalidUrl="" action="" tgtFrame="" tooltip="" history="1" highlightClick="0" endSnd="0">
+                  <a:extLst>
+                    <a:ext uri="{A12FA001-AC4F-418D-AE19-62706E023703}">
+                      <ahyp:hlinkClr xmlns:ahyp="http://schemas.microsoft.com/office/drawing/2018/hyperlinkcolor" val="tx"/>
+                    </a:ext>
+                  </a:extLst>
+                </a:hlinkClick>
+              </a:rPr>
+              <a:t>📱 m.nutrisynccollective.com</a:t>
+            </a:r>
+            <a:endParaRPr lang="en-US" sz="900" dirty="0"/>
+          </a:p>
+          <a:p>
             <a:pPr indent="0" marL="0">
               <a:buNone/>
             </a:pPr>
             <a:r>
-              <a:rPr lang="en-US" sz="950" dirty="0">
+              <a:rPr lang="en-US" sz="750" dirty="0">
                 <a:solidFill>
                   <a:srgbClr val="6E655D"/>
                 </a:solidFill>
@@ -3401,22 +3414,49 @@
                 <a:ea typeface="Arial" pitchFamily="34" charset="-122"/>
                 <a:cs typeface="Arial" pitchFamily="34" charset="-120"/>
               </a:rPr>
-              <a:t>ingresos año 1 · year-1 revenue</a:t>
-            </a:r>
-            <a:endParaRPr lang="en-US" sz="1700" dirty="0"/>
+              <a:t>PWA</a:t>
+            </a:r>
+            <a:endParaRPr lang="en-US" sz="900" dirty="0"/>
           </a:p>
         </p:txBody>
       </p:sp>
       <p:sp>
         <p:nvSpPr>
-          <p:cNvPr id="78" name="Text 70"/>
-          <p:cNvSpPr/>
-          <p:nvPr/>
-        </p:nvSpPr>
-        <p:spPr>
-          <a:xfrm>
-            <a:off x="685800" y="6638544"/>
-            <a:ext cx="10789920" cy="219456"/>
+          <p:cNvPr id="78" name="Shape 70"/>
+          <p:cNvSpPr/>
+          <p:nvPr/>
+        </p:nvSpPr>
+        <p:spPr>
+          <a:xfrm>
+            <a:off x="8106156" y="5413248"/>
+            <a:ext cx="1847088" cy="493776"/>
+          </a:xfrm>
+          <a:prstGeom prst="roundRect">
+            <a:avLst>
+              <a:gd name="adj" fmla="val 16667"/>
+            </a:avLst>
+          </a:prstGeom>
+          <a:solidFill>
+            <a:srgbClr val="FFF6F2"/>
+          </a:solidFill>
+          <a:ln w="12700">
+            <a:solidFill>
+              <a:srgbClr val="F3C8B8"/>
+            </a:solidFill>
+            <a:prstDash val="solid"/>
+          </a:ln>
+        </p:spPr>
+      </p:sp>
+      <p:sp>
+        <p:nvSpPr>
+          <p:cNvPr id="79" name="Text 71"/>
+          <p:cNvSpPr/>
+          <p:nvPr/>
+        </p:nvSpPr>
+        <p:spPr>
+          <a:xfrm>
+            <a:off x="8188452" y="5413248"/>
+            <a:ext cx="1682496" cy="493776"/>
           </a:xfrm>
           <a:prstGeom prst="rect">
             <a:avLst/>
@@ -3428,10 +3468,3452 @@
           <a:bodyPr wrap="square" lIns="0" tIns="0" rIns="0" bIns="0" rtlCol="0" anchor="ctr"/>
           <a:lstStyle/>
           <a:p>
+            <a:pPr indent="0" marL="0">
+              <a:buNone/>
+            </a:pPr>
+            <a:r>
+              <a:rPr lang="en-US" sz="900" b="1" u="sng" dirty="0">
+                <a:solidFill>
+                  <a:srgbClr val="241D1A"/>
+                </a:solidFill>
+                <a:latin typeface="Arial" pitchFamily="34" charset="0"/>
+                <a:ea typeface="Arial" pitchFamily="34" charset="-122"/>
+                <a:cs typeface="Arial" pitchFamily="34" charset="-120"/>
+                <a:hlinkClick r:id="rId9" invalidUrl="" action="" tgtFrame="" tooltip="" history="1" highlightClick="0" endSnd="0">
+                  <a:extLst>
+                    <a:ext uri="{A12FA001-AC4F-418D-AE19-62706E023703}">
+                      <ahyp:hlinkClr xmlns:ahyp="http://schemas.microsoft.com/office/drawing/2018/hyperlinkcolor" val="tx"/>
+                    </a:ext>
+                  </a:extLst>
+                </a:hlinkClick>
+              </a:rPr>
+              <a:t>🛠 Builders Hub</a:t>
+            </a:r>
+            <a:endParaRPr lang="en-US" sz="900" dirty="0"/>
+          </a:p>
+          <a:p>
+            <a:pPr indent="0" marL="0">
+              <a:buNone/>
+            </a:pPr>
+            <a:r>
+              <a:rPr lang="en-US" sz="750" dirty="0">
+                <a:solidFill>
+                  <a:srgbClr val="6E655D"/>
+                </a:solidFill>
+                <a:latin typeface="Arial" pitchFamily="34" charset="0"/>
+                <a:ea typeface="Arial" pitchFamily="34" charset="-122"/>
+                <a:cs typeface="Arial" pitchFamily="34" charset="-120"/>
+              </a:rPr>
+              <a:t>hub de founders</a:t>
+            </a:r>
+            <a:endParaRPr lang="en-US" sz="900" dirty="0"/>
+          </a:p>
+        </p:txBody>
+      </p:sp>
+      <p:sp>
+        <p:nvSpPr>
+          <p:cNvPr id="80" name="Shape 72"/>
+          <p:cNvSpPr/>
+          <p:nvPr/>
+        </p:nvSpPr>
+        <p:spPr>
+          <a:xfrm>
+            <a:off x="10062972" y="5413248"/>
+            <a:ext cx="1847088" cy="493776"/>
+          </a:xfrm>
+          <a:prstGeom prst="roundRect">
+            <a:avLst>
+              <a:gd name="adj" fmla="val 16667"/>
+            </a:avLst>
+          </a:prstGeom>
+          <a:solidFill>
+            <a:srgbClr val="FFF6F2"/>
+          </a:solidFill>
+          <a:ln w="12700">
+            <a:solidFill>
+              <a:srgbClr val="F3C8B8"/>
+            </a:solidFill>
+            <a:prstDash val="solid"/>
+          </a:ln>
+        </p:spPr>
+      </p:sp>
+      <p:sp>
+        <p:nvSpPr>
+          <p:cNvPr id="81" name="Text 73"/>
+          <p:cNvSpPr/>
+          <p:nvPr/>
+        </p:nvSpPr>
+        <p:spPr>
+          <a:xfrm>
+            <a:off x="10145268" y="5413248"/>
+            <a:ext cx="1682496" cy="493776"/>
+          </a:xfrm>
+          <a:prstGeom prst="rect">
+            <a:avLst/>
+          </a:prstGeom>
+          <a:noFill/>
+          <a:ln/>
+        </p:spPr>
+        <p:txBody>
+          <a:bodyPr wrap="square" lIns="0" tIns="0" rIns="0" bIns="0" rtlCol="0" anchor="ctr"/>
+          <a:lstStyle/>
+          <a:p>
+            <a:pPr indent="0" marL="0">
+              <a:buNone/>
+            </a:pPr>
+            <a:r>
+              <a:rPr lang="en-US" sz="900" b="1" u="sng" dirty="0">
+                <a:solidFill>
+                  <a:srgbClr val="241D1A"/>
+                </a:solidFill>
+                <a:latin typeface="Arial" pitchFamily="34" charset="0"/>
+                <a:ea typeface="Arial" pitchFamily="34" charset="-122"/>
+                <a:cs typeface="Arial" pitchFamily="34" charset="-120"/>
+                <a:hlinkClick r:id="rId10" invalidUrl="" action="" tgtFrame="" tooltip="" history="1" highlightClick="0" endSnd="0">
+                  <a:extLst>
+                    <a:ext uri="{A12FA001-AC4F-418D-AE19-62706E023703}">
+                      <ahyp:hlinkClr xmlns:ahyp="http://schemas.microsoft.com/office/drawing/2018/hyperlinkcolor" val="tx"/>
+                    </a:ext>
+                  </a:extLst>
+                </a:hlinkClick>
+              </a:rPr>
+              <a:t>🔐 StartUp Admin</a:t>
+            </a:r>
+            <a:endParaRPr lang="en-US" sz="900" dirty="0"/>
+          </a:p>
+          <a:p>
+            <a:pPr indent="0" marL="0">
+              <a:buNone/>
+            </a:pPr>
+            <a:r>
+              <a:rPr lang="en-US" sz="750" dirty="0">
+                <a:solidFill>
+                  <a:srgbClr val="6E655D"/>
+                </a:solidFill>
+                <a:latin typeface="Arial" pitchFamily="34" charset="0"/>
+                <a:ea typeface="Arial" pitchFamily="34" charset="-122"/>
+                <a:cs typeface="Arial" pitchFamily="34" charset="-120"/>
+              </a:rPr>
+              <a:t>contabilidad del build</a:t>
+            </a:r>
+            <a:endParaRPr lang="en-US" sz="900" dirty="0"/>
+          </a:p>
+        </p:txBody>
+      </p:sp>
+      <p:sp>
+        <p:nvSpPr>
+          <p:cNvPr id="82" name="Shape 74"/>
+          <p:cNvSpPr/>
+          <p:nvPr/>
+        </p:nvSpPr>
+        <p:spPr>
+          <a:xfrm>
+            <a:off x="685800" y="6053328"/>
+            <a:ext cx="10817352" cy="0"/>
+          </a:xfrm>
+          <a:prstGeom prst="line">
+            <a:avLst/>
+          </a:prstGeom>
+          <a:noFill/>
+          <a:ln w="12700">
+            <a:solidFill>
+              <a:srgbClr val="EFE3D7"/>
+            </a:solidFill>
+            <a:prstDash val="solid"/>
+          </a:ln>
+        </p:spPr>
+      </p:sp>
+      <p:sp>
+        <p:nvSpPr>
+          <p:cNvPr id="83" name="Text 75"/>
+          <p:cNvSpPr/>
+          <p:nvPr/>
+        </p:nvSpPr>
+        <p:spPr>
+          <a:xfrm>
+            <a:off x="685800" y="6163056"/>
+            <a:ext cx="4023360" cy="658368"/>
+          </a:xfrm>
+          <a:prstGeom prst="rect">
+            <a:avLst/>
+          </a:prstGeom>
+          <a:noFill/>
+          <a:ln/>
+        </p:spPr>
+        <p:txBody>
+          <a:bodyPr wrap="square" lIns="0" tIns="0" rIns="0" bIns="0" rtlCol="0" anchor="ctr"/>
+          <a:lstStyle/>
+          <a:p>
+            <a:pPr indent="0" marL="0">
+              <a:buNone/>
+            </a:pPr>
+            <a:r>
+              <a:rPr lang="en-US" sz="1600" b="1" dirty="0">
+                <a:solidFill>
+                  <a:srgbClr val="FD400C"/>
+                </a:solidFill>
+                <a:latin typeface="Arial" pitchFamily="34" charset="0"/>
+                <a:ea typeface="Arial" pitchFamily="34" charset="-122"/>
+                <a:cs typeface="Arial" pitchFamily="34" charset="-120"/>
+              </a:rPr>
+              <a:t>NutriSync</a:t>
+            </a:r>
+            <a:endParaRPr lang="en-US" sz="1600" dirty="0"/>
+          </a:p>
+          <a:p>
+            <a:pPr indent="0" marL="0">
+              <a:buNone/>
+            </a:pPr>
+            <a:r>
+              <a:rPr lang="en-US" sz="900" dirty="0">
+                <a:solidFill>
+                  <a:srgbClr val="6E655D"/>
+                </a:solidFill>
+                <a:latin typeface="Arial" pitchFamily="34" charset="0"/>
+                <a:ea typeface="Arial" pitchFamily="34" charset="-122"/>
+                <a:cs typeface="Arial" pitchFamily="34" charset="-120"/>
+              </a:rPr>
+              <a:t>Comidas y movimiento en sintonía con tu ciclo</a:t>
+            </a:r>
+            <a:endParaRPr lang="en-US" sz="1600" dirty="0"/>
+          </a:p>
+          <a:p>
+            <a:pPr indent="0" marL="0">
+              <a:buNone/>
+            </a:pPr>
+            <a:r>
+              <a:rPr lang="en-US" sz="900" dirty="0">
+                <a:solidFill>
+                  <a:srgbClr val="8A7F78"/>
+                </a:solidFill>
+                <a:latin typeface="Arial" pitchFamily="34" charset="0"/>
+                <a:ea typeface="Arial" pitchFamily="34" charset="-122"/>
+                <a:cs typeface="Arial" pitchFamily="34" charset="-120"/>
+              </a:rPr>
+              <a:t>contact@nutrisynccollective.com</a:t>
+            </a:r>
+            <a:endParaRPr lang="en-US" sz="1600" dirty="0"/>
+          </a:p>
+        </p:txBody>
+      </p:sp>
+      <p:sp>
+        <p:nvSpPr>
+          <p:cNvPr id="84" name="Text 76"/>
+          <p:cNvSpPr/>
+          <p:nvPr/>
+        </p:nvSpPr>
+        <p:spPr>
+          <a:xfrm>
+            <a:off x="4160520" y="6163056"/>
+            <a:ext cx="4572000" cy="658368"/>
+          </a:xfrm>
+          <a:prstGeom prst="rect">
+            <a:avLst/>
+          </a:prstGeom>
+          <a:noFill/>
+          <a:ln/>
+        </p:spPr>
+        <p:txBody>
+          <a:bodyPr wrap="square" lIns="0" tIns="0" rIns="0" bIns="0" rtlCol="0" anchor="t"/>
+          <a:lstStyle/>
+          <a:p>
+            <a:pPr indent="0" marL="0">
+              <a:buNone/>
+            </a:pPr>
+            <a:r>
+              <a:rPr lang="en-US" sz="900" u="sng" dirty="0">
+                <a:solidFill>
+                  <a:srgbClr val="6E655D"/>
+                </a:solidFill>
+                <a:latin typeface="Arial" pitchFamily="34" charset="0"/>
+                <a:ea typeface="Arial" pitchFamily="34" charset="-122"/>
+                <a:cs typeface="Arial" pitchFamily="34" charset="-120"/>
+                <a:hlinkClick r:id="rId11" invalidUrl="" action="" tgtFrame="" tooltip="" history="1" highlightClick="0" endSnd="0">
+                  <a:extLst>
+                    <a:ext uri="{A12FA001-AC4F-418D-AE19-62706E023703}">
+                      <ahyp:hlinkClr xmlns:ahyp="http://schemas.microsoft.com/office/drawing/2018/hyperlinkcolor" val="tx"/>
+                    </a:ext>
+                  </a:extLst>
+                </a:hlinkClick>
+              </a:rPr>
+              <a:t>Privacidad</a:t>
+            </a:r>
+            <a:pPr indent="0" marL="0">
+              <a:buNone/>
+            </a:pPr>
+            <a:r>
+              <a:rPr lang="en-US" sz="900" dirty="0">
+                <a:solidFill>
+                  <a:srgbClr val="B8AAA0"/>
+                </a:solidFill>
+                <a:latin typeface="Arial" pitchFamily="34" charset="0"/>
+                <a:ea typeface="Arial" pitchFamily="34" charset="-122"/>
+                <a:cs typeface="Arial" pitchFamily="34" charset="-120"/>
+              </a:rPr>
+              <a:t>  ·  </a:t>
+            </a:r>
+            <a:pPr indent="0" marL="0">
+              <a:buNone/>
+            </a:pPr>
+            <a:r>
+              <a:rPr lang="en-US" sz="900" u="sng" dirty="0">
+                <a:solidFill>
+                  <a:srgbClr val="6E655D"/>
+                </a:solidFill>
+                <a:latin typeface="Arial" pitchFamily="34" charset="0"/>
+                <a:ea typeface="Arial" pitchFamily="34" charset="-122"/>
+                <a:cs typeface="Arial" pitchFamily="34" charset="-120"/>
+                <a:hlinkClick r:id="rId12" invalidUrl="" action="" tgtFrame="" tooltip="" history="1" highlightClick="0" endSnd="0">
+                  <a:extLst>
+                    <a:ext uri="{A12FA001-AC4F-418D-AE19-62706E023703}">
+                      <ahyp:hlinkClr xmlns:ahyp="http://schemas.microsoft.com/office/drawing/2018/hyperlinkcolor" val="tx"/>
+                    </a:ext>
+                  </a:extLst>
+                </a:hlinkClick>
+              </a:rPr>
+              <a:t>Términos</a:t>
+            </a:r>
+            <a:pPr indent="0" marL="0">
+              <a:buNone/>
+            </a:pPr>
+            <a:r>
+              <a:rPr lang="en-US" sz="900" dirty="0">
+                <a:solidFill>
+                  <a:srgbClr val="B8AAA0"/>
+                </a:solidFill>
+                <a:latin typeface="Arial" pitchFamily="34" charset="0"/>
+                <a:ea typeface="Arial" pitchFamily="34" charset="-122"/>
+                <a:cs typeface="Arial" pitchFamily="34" charset="-120"/>
+              </a:rPr>
+              <a:t>  ·  </a:t>
+            </a:r>
+            <a:pPr indent="0" marL="0">
+              <a:buNone/>
+            </a:pPr>
+            <a:r>
+              <a:rPr lang="en-US" sz="900" u="sng" dirty="0">
+                <a:solidFill>
+                  <a:srgbClr val="6E655D"/>
+                </a:solidFill>
+                <a:latin typeface="Arial" pitchFamily="34" charset="0"/>
+                <a:ea typeface="Arial" pitchFamily="34" charset="-122"/>
+                <a:cs typeface="Arial" pitchFamily="34" charset="-120"/>
+                <a:hlinkClick r:id="rId13" invalidUrl="" action="" tgtFrame="" tooltip="" history="1" highlightClick="0" endSnd="0">
+                  <a:extLst>
+                    <a:ext uri="{A12FA001-AC4F-418D-AE19-62706E023703}">
+                      <ahyp:hlinkClr xmlns:ahyp="http://schemas.microsoft.com/office/drawing/2018/hyperlinkcolor" val="tx"/>
+                    </a:ext>
+                  </a:extLst>
+                </a:hlinkClick>
+              </a:rPr>
+              <a:t>Cookies</a:t>
+            </a:r>
+            <a:pPr indent="0" marL="0">
+              <a:buNone/>
+            </a:pPr>
+            <a:r>
+              <a:rPr lang="en-US" sz="900" dirty="0">
+                <a:solidFill>
+                  <a:srgbClr val="B8AAA0"/>
+                </a:solidFill>
+                <a:latin typeface="Arial" pitchFamily="34" charset="0"/>
+                <a:ea typeface="Arial" pitchFamily="34" charset="-122"/>
+                <a:cs typeface="Arial" pitchFamily="34" charset="-120"/>
+              </a:rPr>
+              <a:t>  ·  </a:t>
+            </a:r>
+            <a:pPr indent="0" marL="0">
+              <a:buNone/>
+            </a:pPr>
+            <a:r>
+              <a:rPr lang="en-US" sz="900" u="sng" dirty="0">
+                <a:solidFill>
+                  <a:srgbClr val="6E655D"/>
+                </a:solidFill>
+                <a:latin typeface="Arial" pitchFamily="34" charset="0"/>
+                <a:ea typeface="Arial" pitchFamily="34" charset="-122"/>
+                <a:cs typeface="Arial" pitchFamily="34" charset="-120"/>
+                <a:hlinkClick r:id="rId14" invalidUrl="" action="" tgtFrame="" tooltip="" history="1" highlightClick="0" endSnd="0">
+                  <a:extLst>
+                    <a:ext uri="{A12FA001-AC4F-418D-AE19-62706E023703}">
+                      <ahyp:hlinkClr xmlns:ahyp="http://schemas.microsoft.com/office/drawing/2018/hyperlinkcolor" val="tx"/>
+                    </a:ext>
+                  </a:extLst>
+                </a:hlinkClick>
+              </a:rPr>
+              <a:t>Aviso legal</a:t>
+            </a:r>
+            <a:pPr indent="0" marL="0">
+              <a:buNone/>
+            </a:pPr>
+            <a:endParaRPr lang="en-US" sz="900" dirty="0"/>
+          </a:p>
+          <a:p>
+            <a:pPr indent="0" marL="0">
+              <a:buNone/>
+            </a:pPr>
+            <a:r>
+              <a:rPr lang="en-US" sz="800" dirty="0">
+                <a:solidFill>
+                  <a:srgbClr val="B8AAA0"/>
+                </a:solidFill>
+                <a:latin typeface="Arial" pitchFamily="34" charset="0"/>
+                <a:ea typeface="Arial" pitchFamily="34" charset="-122"/>
+                <a:cs typeface="Arial" pitchFamily="34" charset="-120"/>
+              </a:rPr>
+              <a:t>© 2026 NutriSync Collective — piloto interno, aún no en producción</a:t>
+            </a:r>
+            <a:endParaRPr lang="en-US" sz="900" dirty="0"/>
+          </a:p>
+        </p:txBody>
+      </p:sp>
+      <p:pic>
+        <p:nvPicPr>
+          <p:cNvPr id="85" name="Image 6" descr="preencoded.png">    </p:cNvPr>
+          <p:cNvPicPr>
+            <a:picLocks noChangeAspect="1"/>
+          </p:cNvPicPr>
+          <p:nvPr/>
+        </p:nvPicPr>
+        <p:blipFill>
+          <a:blip r:embed="rId15"/>
+          <a:stretch>
+            <a:fillRect/>
+          </a:stretch>
+        </p:blipFill>
+        <p:spPr>
+          <a:xfrm>
+            <a:off x="9646920" y="6071616"/>
+            <a:ext cx="640080" cy="640080"/>
+          </a:xfrm>
+          <a:prstGeom prst="rect">
+            <a:avLst/>
+          </a:prstGeom>
+        </p:spPr>
+      </p:pic>
+      <p:sp>
+        <p:nvSpPr>
+          <p:cNvPr id="86" name="Text 77"/>
+          <p:cNvSpPr/>
+          <p:nvPr/>
+        </p:nvSpPr>
+        <p:spPr>
+          <a:xfrm>
+            <a:off x="9555480" y="6693408"/>
+            <a:ext cx="822960" cy="146304"/>
+          </a:xfrm>
+          <a:prstGeom prst="rect">
+            <a:avLst/>
+          </a:prstGeom>
+          <a:noFill/>
+          <a:ln/>
+        </p:spPr>
+        <p:txBody>
+          <a:bodyPr wrap="square" lIns="0" tIns="0" rIns="0" bIns="0" rtlCol="0" anchor="ctr"/>
+          <a:lstStyle/>
+          <a:p>
             <a:pPr algn="ctr" indent="0" marL="0">
               <a:buNone/>
             </a:pPr>
             <a:r>
+              <a:rPr lang="en-US" sz="750" b="1" dirty="0">
+                <a:solidFill>
+                  <a:srgbClr val="6E655D"/>
+                </a:solidFill>
+                <a:latin typeface="Arial" pitchFamily="34" charset="0"/>
+                <a:ea typeface="Arial" pitchFamily="34" charset="-122"/>
+                <a:cs typeface="Arial" pitchFamily="34" charset="-120"/>
+              </a:rPr>
+              <a:t>Web</a:t>
+            </a:r>
+            <a:endParaRPr lang="en-US" sz="750" dirty="0"/>
+          </a:p>
+        </p:txBody>
+      </p:sp>
+      <p:pic>
+        <p:nvPicPr>
+          <p:cNvPr id="87" name="Image 7" descr="preencoded.png">    </p:cNvPr>
+          <p:cNvPicPr>
+            <a:picLocks noChangeAspect="1"/>
+          </p:cNvPicPr>
+          <p:nvPr/>
+        </p:nvPicPr>
+        <p:blipFill>
+          <a:blip r:embed="rId16"/>
+          <a:stretch>
+            <a:fillRect/>
+          </a:stretch>
+        </p:blipFill>
+        <p:spPr>
+          <a:xfrm>
+            <a:off x="10652760" y="6071616"/>
+            <a:ext cx="640080" cy="640080"/>
+          </a:xfrm>
+          <a:prstGeom prst="rect">
+            <a:avLst/>
+          </a:prstGeom>
+        </p:spPr>
+      </p:pic>
+      <p:sp>
+        <p:nvSpPr>
+          <p:cNvPr id="88" name="Text 78"/>
+          <p:cNvSpPr/>
+          <p:nvPr/>
+        </p:nvSpPr>
+        <p:spPr>
+          <a:xfrm>
+            <a:off x="10561320" y="6693408"/>
+            <a:ext cx="822960" cy="146304"/>
+          </a:xfrm>
+          <a:prstGeom prst="rect">
+            <a:avLst/>
+          </a:prstGeom>
+          <a:noFill/>
+          <a:ln/>
+        </p:spPr>
+        <p:txBody>
+          <a:bodyPr wrap="square" lIns="0" tIns="0" rIns="0" bIns="0" rtlCol="0" anchor="ctr"/>
+          <a:lstStyle/>
+          <a:p>
+            <a:pPr algn="ctr" indent="0" marL="0">
+              <a:buNone/>
+            </a:pPr>
+            <a:r>
+              <a:rPr lang="en-US" sz="750" b="1" dirty="0">
+                <a:solidFill>
+                  <a:srgbClr val="6E655D"/>
+                </a:solidFill>
+                <a:latin typeface="Arial" pitchFamily="34" charset="0"/>
+                <a:ea typeface="Arial" pitchFamily="34" charset="-122"/>
+                <a:cs typeface="Arial" pitchFamily="34" charset="-120"/>
+              </a:rPr>
+              <a:t>PWA</a:t>
+            </a:r>
+            <a:endParaRPr lang="en-US" sz="750" dirty="0"/>
+          </a:p>
+        </p:txBody>
+      </p:sp>
+    </p:spTree>
+  </p:cSld>
+  <p:clrMapOvr>
+    <a:masterClrMapping/>
+  </p:clrMapOvr>
+</p:sld>
+</file>
+
+<file path=ppt/slides/slide2.xml><?xml version="1.0" encoding="utf-8"?>
+<p:sld xmlns:a="http://schemas.openxmlformats.org/drawingml/2006/main" xmlns:r="http://schemas.openxmlformats.org/officeDocument/2006/relationships" xmlns:p="http://schemas.openxmlformats.org/presentationml/2006/main">
+  <p:cSld name="Slide 2">
+    <p:bg>
+      <p:bgPr>
+        <a:solidFill>
+          <a:srgbClr val="FFFFFF"/>
+        </a:solidFill>
+      </p:bgPr>
+    </p:bg>
+    <p:spTree>
+      <p:nvGrpSpPr>
+        <p:cNvPr id="1" name=""/>
+        <p:cNvGrpSpPr/>
+        <p:nvPr/>
+      </p:nvGrpSpPr>
+      <p:grpSpPr>
+        <a:xfrm>
+          <a:off x="0" y="0"/>
+          <a:ext cx="0" cy="0"/>
+          <a:chOff x="0" y="0"/>
+          <a:chExt cx="0" cy="0"/>
+        </a:xfrm>
+      </p:grpSpPr>
+      <p:sp>
+        <p:nvSpPr>
+          <p:cNvPr id="2" name="Shape 0"/>
+          <p:cNvSpPr/>
+          <p:nvPr/>
+        </p:nvSpPr>
+        <p:spPr>
+          <a:xfrm>
+            <a:off x="-1463040" y="-1645920"/>
+            <a:ext cx="4754880" cy="4754880"/>
+          </a:xfrm>
+          <a:prstGeom prst="ellipse">
+            <a:avLst/>
+          </a:prstGeom>
+          <a:solidFill>
+            <a:srgbClr val="FF7600">
+              <a:alpha val="7000"/>
+            </a:srgbClr>
+          </a:solidFill>
+          <a:ln/>
+        </p:spPr>
+      </p:sp>
+      <p:sp>
+        <p:nvSpPr>
+          <p:cNvPr id="3" name="Shape 1"/>
+          <p:cNvSpPr/>
+          <p:nvPr/>
+        </p:nvSpPr>
+        <p:spPr>
+          <a:xfrm>
+            <a:off x="9692640" y="3840480"/>
+            <a:ext cx="4206240" cy="4206240"/>
+          </a:xfrm>
+          <a:prstGeom prst="ellipse">
+            <a:avLst/>
+          </a:prstGeom>
+          <a:solidFill>
+            <a:srgbClr val="FD400C">
+              <a:alpha val="6000"/>
+            </a:srgbClr>
+          </a:solidFill>
+          <a:ln/>
+        </p:spPr>
+      </p:sp>
+      <p:sp>
+        <p:nvSpPr>
+          <p:cNvPr id="4" name="Shape 2"/>
+          <p:cNvSpPr/>
+          <p:nvPr/>
+        </p:nvSpPr>
+        <p:spPr>
+          <a:xfrm>
+            <a:off x="5120640" y="-2194560"/>
+            <a:ext cx="3291840" cy="3291840"/>
+          </a:xfrm>
+          <a:prstGeom prst="ellipse">
+            <a:avLst/>
+          </a:prstGeom>
+          <a:solidFill>
+            <a:srgbClr val="0F6E56">
+              <a:alpha val="6000"/>
+            </a:srgbClr>
+          </a:solidFill>
+          <a:ln/>
+        </p:spPr>
+      </p:sp>
+      <p:sp>
+        <p:nvSpPr>
+          <p:cNvPr id="5" name="Text 3"/>
+          <p:cNvSpPr/>
+          <p:nvPr/>
+        </p:nvSpPr>
+        <p:spPr>
+          <a:xfrm>
+            <a:off x="685800" y="219456"/>
+            <a:ext cx="10789920" cy="621792"/>
+          </a:xfrm>
+          <a:prstGeom prst="rect">
+            <a:avLst/>
+          </a:prstGeom>
+          <a:noFill/>
+          <a:ln/>
+        </p:spPr>
+        <p:txBody>
+          <a:bodyPr wrap="square" lIns="0" tIns="0" rIns="0" bIns="0" rtlCol="0" anchor="ctr"/>
+          <a:lstStyle/>
+          <a:p>
+            <a:pPr indent="0" marL="0">
+              <a:buNone/>
+            </a:pPr>
+            <a:r>
+              <a:rPr lang="en-US" sz="3700" b="1" dirty="0">
+                <a:solidFill>
+                  <a:srgbClr val="FD400C"/>
+                </a:solidFill>
+                <a:latin typeface="Arial" pitchFamily="34" charset="0"/>
+                <a:ea typeface="Arial" pitchFamily="34" charset="-122"/>
+                <a:cs typeface="Arial" pitchFamily="34" charset="-120"/>
+              </a:rPr>
+              <a:t>NutriSync</a:t>
+            </a:r>
+            <a:pPr indent="0" marL="0">
+              <a:buNone/>
+            </a:pPr>
+            <a:r>
+              <a:rPr lang="en-US" sz="3700" b="1" dirty="0">
+                <a:solidFill>
+                  <a:srgbClr val="241D1A"/>
+                </a:solidFill>
+                <a:latin typeface="Arial" pitchFamily="34" charset="0"/>
+                <a:ea typeface="Arial" pitchFamily="34" charset="-122"/>
+                <a:cs typeface="Arial" pitchFamily="34" charset="-120"/>
+              </a:rPr>
+              <a:t>  —  from idea to market</a:t>
+            </a:r>
+            <a:endParaRPr lang="en-US" sz="3700" dirty="0"/>
+          </a:p>
+        </p:txBody>
+      </p:sp>
+      <p:sp>
+        <p:nvSpPr>
+          <p:cNvPr id="6" name="Text 4"/>
+          <p:cNvSpPr/>
+          <p:nvPr/>
+        </p:nvSpPr>
+        <p:spPr>
+          <a:xfrm>
+            <a:off x="713232" y="822960"/>
+            <a:ext cx="10789920" cy="274320"/>
+          </a:xfrm>
+          <a:prstGeom prst="rect">
+            <a:avLst/>
+          </a:prstGeom>
+          <a:noFill/>
+          <a:ln/>
+        </p:spPr>
+        <p:txBody>
+          <a:bodyPr wrap="square" lIns="0" tIns="0" rIns="0" bIns="0" rtlCol="0" anchor="ctr"/>
+          <a:lstStyle/>
+          <a:p>
+            <a:pPr indent="0" marL="0">
+              <a:buNone/>
+            </a:pPr>
+            <a:r>
+              <a:rPr lang="en-US" sz="1300" i="1" dirty="0">
+                <a:solidFill>
+                  <a:srgbClr val="8A7F78"/>
+                </a:solidFill>
+                <a:latin typeface="Arial" pitchFamily="34" charset="0"/>
+                <a:ea typeface="Arial" pitchFamily="34" charset="-122"/>
+                <a:cs typeface="Arial" pitchFamily="34" charset="-120"/>
+              </a:rPr>
+              <a:t>June 2026 → October 8, 2026  ·  cycle science, made product</a:t>
+            </a:r>
+            <a:endParaRPr lang="en-US" sz="1300" dirty="0"/>
+          </a:p>
+        </p:txBody>
+      </p:sp>
+      <p:sp>
+        <p:nvSpPr>
+          <p:cNvPr id="7" name="Shape 5"/>
+          <p:cNvSpPr/>
+          <p:nvPr/>
+        </p:nvSpPr>
+        <p:spPr>
+          <a:xfrm>
+            <a:off x="822960" y="3323844"/>
+            <a:ext cx="3449117" cy="82296"/>
+          </a:xfrm>
+          <a:prstGeom prst="roundRect">
+            <a:avLst>
+              <a:gd name="adj" fmla="val 50000"/>
+            </a:avLst>
+          </a:prstGeom>
+          <a:solidFill>
+            <a:srgbClr val="0F6E56"/>
+          </a:solidFill>
+          <a:ln/>
+        </p:spPr>
+      </p:sp>
+      <p:sp>
+        <p:nvSpPr>
+          <p:cNvPr id="8" name="Shape 6"/>
+          <p:cNvSpPr/>
+          <p:nvPr/>
+        </p:nvSpPr>
+        <p:spPr>
+          <a:xfrm>
+            <a:off x="4217213" y="3323844"/>
+            <a:ext cx="1964131" cy="82296"/>
+          </a:xfrm>
+          <a:prstGeom prst="roundRect">
+            <a:avLst>
+              <a:gd name="adj" fmla="val 50000"/>
+            </a:avLst>
+          </a:prstGeom>
+          <a:solidFill>
+            <a:srgbClr val="1F8A5E"/>
+          </a:solidFill>
+          <a:ln/>
+        </p:spPr>
+      </p:sp>
+      <p:sp>
+        <p:nvSpPr>
+          <p:cNvPr id="9" name="Shape 7"/>
+          <p:cNvSpPr/>
+          <p:nvPr/>
+        </p:nvSpPr>
+        <p:spPr>
+          <a:xfrm>
+            <a:off x="6126480" y="3323844"/>
+            <a:ext cx="2176272" cy="82296"/>
+          </a:xfrm>
+          <a:prstGeom prst="roundRect">
+            <a:avLst>
+              <a:gd name="adj" fmla="val 50000"/>
+            </a:avLst>
+          </a:prstGeom>
+          <a:solidFill>
+            <a:srgbClr val="FF7600"/>
+          </a:solidFill>
+          <a:ln/>
+        </p:spPr>
+      </p:sp>
+      <p:sp>
+        <p:nvSpPr>
+          <p:cNvPr id="10" name="Shape 8"/>
+          <p:cNvSpPr/>
+          <p:nvPr/>
+        </p:nvSpPr>
+        <p:spPr>
+          <a:xfrm>
+            <a:off x="8247888" y="3323844"/>
+            <a:ext cx="1964131" cy="82296"/>
+          </a:xfrm>
+          <a:prstGeom prst="roundRect">
+            <a:avLst>
+              <a:gd name="adj" fmla="val 50000"/>
+            </a:avLst>
+          </a:prstGeom>
+          <a:solidFill>
+            <a:srgbClr val="FD400C"/>
+          </a:solidFill>
+          <a:ln/>
+        </p:spPr>
+      </p:sp>
+      <p:sp>
+        <p:nvSpPr>
+          <p:cNvPr id="11" name="Shape 9"/>
+          <p:cNvSpPr/>
+          <p:nvPr/>
+        </p:nvSpPr>
+        <p:spPr>
+          <a:xfrm>
+            <a:off x="10157155" y="3323844"/>
+            <a:ext cx="1327709" cy="82296"/>
+          </a:xfrm>
+          <a:prstGeom prst="roundRect">
+            <a:avLst>
+              <a:gd name="adj" fmla="val 50000"/>
+            </a:avLst>
+          </a:prstGeom>
+          <a:solidFill>
+            <a:srgbClr val="C73A20"/>
+          </a:solidFill>
+          <a:ln/>
+        </p:spPr>
+      </p:sp>
+      <p:sp>
+        <p:nvSpPr>
+          <p:cNvPr id="12" name="Shape 10"/>
+          <p:cNvSpPr/>
+          <p:nvPr/>
+        </p:nvSpPr>
+        <p:spPr>
+          <a:xfrm rot="5400000">
+            <a:off x="11411712" y="3209544"/>
+            <a:ext cx="310896" cy="310896"/>
+          </a:xfrm>
+          <a:prstGeom prst="triangle">
+            <a:avLst/>
+          </a:prstGeom>
+          <a:solidFill>
+            <a:srgbClr val="C73A20"/>
+          </a:solidFill>
+          <a:ln/>
+        </p:spPr>
+      </p:sp>
+      <p:sp>
+        <p:nvSpPr>
+          <p:cNvPr id="13" name="Shape 11"/>
+          <p:cNvSpPr/>
+          <p:nvPr/>
+        </p:nvSpPr>
+        <p:spPr>
+          <a:xfrm>
+            <a:off x="1380744" y="2816352"/>
+            <a:ext cx="1097280" cy="1097280"/>
+          </a:xfrm>
+          <a:prstGeom prst="ellipse">
+            <a:avLst/>
+          </a:prstGeom>
+          <a:solidFill>
+            <a:srgbClr val="0F6E56">
+              <a:alpha val="16000"/>
+            </a:srgbClr>
+          </a:solidFill>
+          <a:ln/>
+        </p:spPr>
+      </p:sp>
+      <p:sp>
+        <p:nvSpPr>
+          <p:cNvPr id="14" name="Shape 12"/>
+          <p:cNvSpPr/>
+          <p:nvPr/>
+        </p:nvSpPr>
+        <p:spPr>
+          <a:xfrm>
+            <a:off x="1444752" y="2880360"/>
+            <a:ext cx="969264" cy="969264"/>
+          </a:xfrm>
+          <a:prstGeom prst="ellipse">
+            <a:avLst/>
+          </a:prstGeom>
+          <a:solidFill>
+            <a:srgbClr val="FFFFFF"/>
+          </a:solidFill>
+          <a:ln w="50800">
+            <a:solidFill>
+              <a:srgbClr val="0F6E56"/>
+            </a:solidFill>
+            <a:prstDash val="solid"/>
+          </a:ln>
+          <a:effectLst>
+            <a:outerShdw sx="100000" sy="100000" kx="0" ky="0" algn="bl" rotWithShape="0" blurRad="114300" dist="38100" dir="5400000">
+              <a:srgbClr val="241D1A">
+                <a:alpha val="30000"/>
+              </a:srgbClr>
+            </a:outerShdw>
+          </a:effectLst>
+        </p:spPr>
+      </p:sp>
+      <p:pic>
+        <p:nvPicPr>
+          <p:cNvPr id="15" name="Image 0" descr="preencoded.png">    </p:cNvPr>
+          <p:cNvPicPr>
+            <a:picLocks noChangeAspect="1"/>
+          </p:cNvPicPr>
+          <p:nvPr/>
+        </p:nvPicPr>
+        <p:blipFill>
+          <a:blip r:embed="rId1"/>
+          <a:stretch>
+            <a:fillRect/>
+          </a:stretch>
+        </p:blipFill>
+        <p:spPr>
+          <a:xfrm>
+            <a:off x="1591056" y="3026664"/>
+            <a:ext cx="676656" cy="676656"/>
+          </a:xfrm>
+          <a:prstGeom prst="rect">
+            <a:avLst/>
+          </a:prstGeom>
+        </p:spPr>
+      </p:pic>
+      <p:sp>
+        <p:nvSpPr>
+          <p:cNvPr id="16" name="Shape 13"/>
+          <p:cNvSpPr/>
+          <p:nvPr/>
+        </p:nvSpPr>
+        <p:spPr>
+          <a:xfrm>
+            <a:off x="2148840" y="2843784"/>
+            <a:ext cx="310896" cy="310896"/>
+          </a:xfrm>
+          <a:prstGeom prst="ellipse">
+            <a:avLst/>
+          </a:prstGeom>
+          <a:solidFill>
+            <a:srgbClr val="0F6E56"/>
+          </a:solidFill>
+          <a:ln w="25400">
+            <a:solidFill>
+              <a:srgbClr val="FFFFFF"/>
+            </a:solidFill>
+            <a:prstDash val="solid"/>
+          </a:ln>
+        </p:spPr>
+      </p:sp>
+      <p:sp>
+        <p:nvSpPr>
+          <p:cNvPr id="17" name="Text 14"/>
+          <p:cNvSpPr/>
+          <p:nvPr/>
+        </p:nvSpPr>
+        <p:spPr>
+          <a:xfrm>
+            <a:off x="2148840" y="2843784"/>
+            <a:ext cx="310896" cy="310896"/>
+          </a:xfrm>
+          <a:prstGeom prst="rect">
+            <a:avLst/>
+          </a:prstGeom>
+          <a:noFill/>
+          <a:ln/>
+        </p:spPr>
+        <p:txBody>
+          <a:bodyPr wrap="square" lIns="0" tIns="0" rIns="0" bIns="0" rtlCol="0" anchor="ctr"/>
+          <a:lstStyle/>
+          <a:p>
+            <a:pPr algn="ctr" indent="0" marL="0">
+              <a:buNone/>
+            </a:pPr>
+            <a:r>
+              <a:rPr lang="en-US" sz="1200" b="1" dirty="0">
+                <a:solidFill>
+                  <a:srgbClr val="FFFFFF"/>
+                </a:solidFill>
+                <a:latin typeface="Arial" pitchFamily="34" charset="0"/>
+                <a:ea typeface="Arial" pitchFamily="34" charset="-122"/>
+                <a:cs typeface="Arial" pitchFamily="34" charset="-120"/>
+              </a:rPr>
+              <a:t>1</a:t>
+            </a:r>
+            <a:endParaRPr lang="en-US" sz="1200" dirty="0"/>
+          </a:p>
+        </p:txBody>
+      </p:sp>
+      <p:sp>
+        <p:nvSpPr>
+          <p:cNvPr id="18" name="Shape 15"/>
+          <p:cNvSpPr/>
+          <p:nvPr/>
+        </p:nvSpPr>
+        <p:spPr>
+          <a:xfrm>
+            <a:off x="1929384" y="2450592"/>
+            <a:ext cx="0" cy="429768"/>
+          </a:xfrm>
+          <a:prstGeom prst="line">
+            <a:avLst/>
+          </a:prstGeom>
+          <a:noFill/>
+          <a:ln w="25400">
+            <a:solidFill>
+              <a:srgbClr val="0F6E56"/>
+            </a:solidFill>
+            <a:prstDash val="dash"/>
+          </a:ln>
+        </p:spPr>
+      </p:sp>
+      <p:sp>
+        <p:nvSpPr>
+          <p:cNvPr id="19" name="Shape 16"/>
+          <p:cNvSpPr/>
+          <p:nvPr/>
+        </p:nvSpPr>
+        <p:spPr>
+          <a:xfrm>
+            <a:off x="1271016" y="2139696"/>
+            <a:ext cx="1316736" cy="274320"/>
+          </a:xfrm>
+          <a:prstGeom prst="roundRect">
+            <a:avLst>
+              <a:gd name="adj" fmla="val 16667"/>
+            </a:avLst>
+          </a:prstGeom>
+          <a:solidFill>
+            <a:srgbClr val="0F6E56"/>
+          </a:solidFill>
+          <a:ln/>
+          <a:effectLst>
+            <a:outerShdw sx="100000" sy="100000" kx="0" ky="0" algn="bl" rotWithShape="0" blurRad="50800" dist="25400" dir="5400000">
+              <a:srgbClr val="241D1A">
+                <a:alpha val="25000"/>
+              </a:srgbClr>
+            </a:outerShdw>
+          </a:effectLst>
+        </p:spPr>
+      </p:sp>
+      <p:sp>
+        <p:nvSpPr>
+          <p:cNvPr id="20" name="Text 17"/>
+          <p:cNvSpPr/>
+          <p:nvPr/>
+        </p:nvSpPr>
+        <p:spPr>
+          <a:xfrm>
+            <a:off x="1271016" y="2139696"/>
+            <a:ext cx="1316736" cy="274320"/>
+          </a:xfrm>
+          <a:prstGeom prst="rect">
+            <a:avLst/>
+          </a:prstGeom>
+          <a:noFill/>
+          <a:ln/>
+        </p:spPr>
+        <p:txBody>
+          <a:bodyPr wrap="square" lIns="0" tIns="0" rIns="0" bIns="0" rtlCol="0" anchor="ctr"/>
+          <a:lstStyle/>
+          <a:p>
+            <a:pPr algn="ctr" indent="0" marL="0">
+              <a:buNone/>
+            </a:pPr>
+            <a:r>
+              <a:rPr lang="en-US" sz="1100" b="1" spc="100" kern="0" dirty="0">
+                <a:solidFill>
+                  <a:srgbClr val="FFFFFF"/>
+                </a:solidFill>
+                <a:latin typeface="Arial" pitchFamily="34" charset="0"/>
+                <a:ea typeface="Arial" pitchFamily="34" charset="-122"/>
+                <a:cs typeface="Arial" pitchFamily="34" charset="-120"/>
+              </a:rPr>
+              <a:t>JUN 2026</a:t>
+            </a:r>
+            <a:endParaRPr lang="en-US" sz="1100" dirty="0"/>
+          </a:p>
+        </p:txBody>
+      </p:sp>
+      <p:sp>
+        <p:nvSpPr>
+          <p:cNvPr id="21" name="Text 18"/>
+          <p:cNvSpPr/>
+          <p:nvPr/>
+        </p:nvSpPr>
+        <p:spPr>
+          <a:xfrm>
+            <a:off x="996696" y="1188720"/>
+            <a:ext cx="1865376" cy="877824"/>
+          </a:xfrm>
+          <a:prstGeom prst="rect">
+            <a:avLst/>
+          </a:prstGeom>
+          <a:noFill/>
+          <a:ln/>
+        </p:spPr>
+        <p:txBody>
+          <a:bodyPr wrap="square" lIns="0" tIns="0" rIns="0" bIns="0" rtlCol="0" anchor="b"/>
+          <a:lstStyle/>
+          <a:p>
+            <a:pPr algn="ctr" indent="0" marL="0">
+              <a:buNone/>
+            </a:pPr>
+            <a:r>
+              <a:rPr lang="en-US" sz="1300" b="1" dirty="0">
+                <a:solidFill>
+                  <a:srgbClr val="241D1A"/>
+                </a:solidFill>
+                <a:latin typeface="Arial" pitchFamily="34" charset="0"/>
+                <a:ea typeface="Arial" pitchFamily="34" charset="-122"/>
+                <a:cs typeface="Arial" pitchFamily="34" charset="-120"/>
+              </a:rPr>
+              <a:t>Idea &amp; founding team</a:t>
+            </a:r>
+            <a:endParaRPr lang="en-US" sz="1300" dirty="0"/>
+          </a:p>
+          <a:p>
+            <a:pPr algn="ctr" indent="0" marL="0">
+              <a:buNone/>
+            </a:pPr>
+            <a:r>
+              <a:rPr lang="en-US" sz="900" dirty="0">
+                <a:solidFill>
+                  <a:srgbClr val="6E655D"/>
+                </a:solidFill>
+                <a:latin typeface="Arial" pitchFamily="34" charset="0"/>
+                <a:ea typeface="Arial" pitchFamily="34" charset="-122"/>
+                <a:cs typeface="Arial" pitchFamily="34" charset="-120"/>
+              </a:rPr>
+              <a:t>4 founders · cycle science · lean stack</a:t>
+            </a:r>
+            <a:endParaRPr lang="en-US" sz="1300" dirty="0"/>
+          </a:p>
+        </p:txBody>
+      </p:sp>
+      <p:sp>
+        <p:nvSpPr>
+          <p:cNvPr id="22" name="Shape 19"/>
+          <p:cNvSpPr/>
+          <p:nvPr/>
+        </p:nvSpPr>
+        <p:spPr>
+          <a:xfrm>
+            <a:off x="3163824" y="2816352"/>
+            <a:ext cx="1097280" cy="1097280"/>
+          </a:xfrm>
+          <a:prstGeom prst="ellipse">
+            <a:avLst/>
+          </a:prstGeom>
+          <a:solidFill>
+            <a:srgbClr val="1F8A5E">
+              <a:alpha val="16000"/>
+            </a:srgbClr>
+          </a:solidFill>
+          <a:ln/>
+        </p:spPr>
+      </p:sp>
+      <p:sp>
+        <p:nvSpPr>
+          <p:cNvPr id="23" name="Shape 20"/>
+          <p:cNvSpPr/>
+          <p:nvPr/>
+        </p:nvSpPr>
+        <p:spPr>
+          <a:xfrm>
+            <a:off x="3227832" y="2880360"/>
+            <a:ext cx="969264" cy="969264"/>
+          </a:xfrm>
+          <a:prstGeom prst="ellipse">
+            <a:avLst/>
+          </a:prstGeom>
+          <a:solidFill>
+            <a:srgbClr val="FFFFFF"/>
+          </a:solidFill>
+          <a:ln w="50800">
+            <a:solidFill>
+              <a:srgbClr val="1F8A5E"/>
+            </a:solidFill>
+            <a:prstDash val="solid"/>
+          </a:ln>
+          <a:effectLst>
+            <a:outerShdw sx="100000" sy="100000" kx="0" ky="0" algn="bl" rotWithShape="0" blurRad="114300" dist="38100" dir="5400000">
+              <a:srgbClr val="241D1A">
+                <a:alpha val="30000"/>
+              </a:srgbClr>
+            </a:outerShdw>
+          </a:effectLst>
+        </p:spPr>
+      </p:sp>
+      <p:pic>
+        <p:nvPicPr>
+          <p:cNvPr id="24" name="Image 1" descr="preencoded.png">    </p:cNvPr>
+          <p:cNvPicPr>
+            <a:picLocks noChangeAspect="1"/>
+          </p:cNvPicPr>
+          <p:nvPr/>
+        </p:nvPicPr>
+        <p:blipFill>
+          <a:blip r:embed="rId2"/>
+          <a:stretch>
+            <a:fillRect/>
+          </a:stretch>
+        </p:blipFill>
+        <p:spPr>
+          <a:xfrm>
+            <a:off x="3374136" y="3026664"/>
+            <a:ext cx="676656" cy="676656"/>
+          </a:xfrm>
+          <a:prstGeom prst="rect">
+            <a:avLst/>
+          </a:prstGeom>
+        </p:spPr>
+      </p:pic>
+      <p:sp>
+        <p:nvSpPr>
+          <p:cNvPr id="25" name="Shape 21"/>
+          <p:cNvSpPr/>
+          <p:nvPr/>
+        </p:nvSpPr>
+        <p:spPr>
+          <a:xfrm>
+            <a:off x="3931920" y="2843784"/>
+            <a:ext cx="310896" cy="310896"/>
+          </a:xfrm>
+          <a:prstGeom prst="ellipse">
+            <a:avLst/>
+          </a:prstGeom>
+          <a:solidFill>
+            <a:srgbClr val="1F8A5E"/>
+          </a:solidFill>
+          <a:ln w="25400">
+            <a:solidFill>
+              <a:srgbClr val="FFFFFF"/>
+            </a:solidFill>
+            <a:prstDash val="solid"/>
+          </a:ln>
+        </p:spPr>
+      </p:sp>
+      <p:sp>
+        <p:nvSpPr>
+          <p:cNvPr id="26" name="Text 22"/>
+          <p:cNvSpPr/>
+          <p:nvPr/>
+        </p:nvSpPr>
+        <p:spPr>
+          <a:xfrm>
+            <a:off x="3931920" y="2843784"/>
+            <a:ext cx="310896" cy="310896"/>
+          </a:xfrm>
+          <a:prstGeom prst="rect">
+            <a:avLst/>
+          </a:prstGeom>
+          <a:noFill/>
+          <a:ln/>
+        </p:spPr>
+        <p:txBody>
+          <a:bodyPr wrap="square" lIns="0" tIns="0" rIns="0" bIns="0" rtlCol="0" anchor="ctr"/>
+          <a:lstStyle/>
+          <a:p>
+            <a:pPr algn="ctr" indent="0" marL="0">
+              <a:buNone/>
+            </a:pPr>
+            <a:r>
+              <a:rPr lang="en-US" sz="1200" b="1" dirty="0">
+                <a:solidFill>
+                  <a:srgbClr val="FFFFFF"/>
+                </a:solidFill>
+                <a:latin typeface="Arial" pitchFamily="34" charset="0"/>
+                <a:ea typeface="Arial" pitchFamily="34" charset="-122"/>
+                <a:cs typeface="Arial" pitchFamily="34" charset="-120"/>
+              </a:rPr>
+              <a:t>2</a:t>
+            </a:r>
+            <a:endParaRPr lang="en-US" sz="1200" dirty="0"/>
+          </a:p>
+        </p:txBody>
+      </p:sp>
+      <p:sp>
+        <p:nvSpPr>
+          <p:cNvPr id="27" name="Shape 23"/>
+          <p:cNvSpPr/>
+          <p:nvPr/>
+        </p:nvSpPr>
+        <p:spPr>
+          <a:xfrm>
+            <a:off x="3712464" y="3867912"/>
+            <a:ext cx="0" cy="429768"/>
+          </a:xfrm>
+          <a:prstGeom prst="line">
+            <a:avLst/>
+          </a:prstGeom>
+          <a:noFill/>
+          <a:ln w="25400">
+            <a:solidFill>
+              <a:srgbClr val="1F8A5E"/>
+            </a:solidFill>
+            <a:prstDash val="dash"/>
+          </a:ln>
+        </p:spPr>
+      </p:sp>
+      <p:sp>
+        <p:nvSpPr>
+          <p:cNvPr id="28" name="Shape 24"/>
+          <p:cNvSpPr/>
+          <p:nvPr/>
+        </p:nvSpPr>
+        <p:spPr>
+          <a:xfrm>
+            <a:off x="3054096" y="4059936"/>
+            <a:ext cx="1316736" cy="274320"/>
+          </a:xfrm>
+          <a:prstGeom prst="roundRect">
+            <a:avLst>
+              <a:gd name="adj" fmla="val 16667"/>
+            </a:avLst>
+          </a:prstGeom>
+          <a:solidFill>
+            <a:srgbClr val="1F8A5E"/>
+          </a:solidFill>
+          <a:ln/>
+          <a:effectLst>
+            <a:outerShdw sx="100000" sy="100000" kx="0" ky="0" algn="bl" rotWithShape="0" blurRad="50800" dist="25400" dir="5400000">
+              <a:srgbClr val="241D1A">
+                <a:alpha val="25000"/>
+              </a:srgbClr>
+            </a:outerShdw>
+          </a:effectLst>
+        </p:spPr>
+      </p:sp>
+      <p:sp>
+        <p:nvSpPr>
+          <p:cNvPr id="29" name="Text 25"/>
+          <p:cNvSpPr/>
+          <p:nvPr/>
+        </p:nvSpPr>
+        <p:spPr>
+          <a:xfrm>
+            <a:off x="3054096" y="4059936"/>
+            <a:ext cx="1316736" cy="274320"/>
+          </a:xfrm>
+          <a:prstGeom prst="rect">
+            <a:avLst/>
+          </a:prstGeom>
+          <a:noFill/>
+          <a:ln/>
+        </p:spPr>
+        <p:txBody>
+          <a:bodyPr wrap="square" lIns="0" tIns="0" rIns="0" bIns="0" rtlCol="0" anchor="ctr"/>
+          <a:lstStyle/>
+          <a:p>
+            <a:pPr algn="ctr" indent="0" marL="0">
+              <a:buNone/>
+            </a:pPr>
+            <a:r>
+              <a:rPr lang="en-US" sz="1100" b="1" spc="100" kern="0" dirty="0">
+                <a:solidFill>
+                  <a:srgbClr val="FFFFFF"/>
+                </a:solidFill>
+                <a:latin typeface="Arial" pitchFamily="34" charset="0"/>
+                <a:ea typeface="Arial" pitchFamily="34" charset="-122"/>
+                <a:cs typeface="Arial" pitchFamily="34" charset="-120"/>
+              </a:rPr>
+              <a:t>JUL 2026</a:t>
+            </a:r>
+            <a:endParaRPr lang="en-US" sz="1100" dirty="0"/>
+          </a:p>
+        </p:txBody>
+      </p:sp>
+      <p:sp>
+        <p:nvSpPr>
+          <p:cNvPr id="30" name="Text 26"/>
+          <p:cNvSpPr/>
+          <p:nvPr/>
+        </p:nvSpPr>
+        <p:spPr>
+          <a:xfrm>
+            <a:off x="2779776" y="4407408"/>
+            <a:ext cx="1865376" cy="877824"/>
+          </a:xfrm>
+          <a:prstGeom prst="rect">
+            <a:avLst/>
+          </a:prstGeom>
+          <a:noFill/>
+          <a:ln/>
+        </p:spPr>
+        <p:txBody>
+          <a:bodyPr wrap="square" lIns="0" tIns="0" rIns="0" bIns="0" rtlCol="0" anchor="t"/>
+          <a:lstStyle/>
+          <a:p>
+            <a:pPr algn="ctr" indent="0" marL="0">
+              <a:buNone/>
+            </a:pPr>
+            <a:r>
+              <a:rPr lang="en-US" sz="1300" b="1" dirty="0">
+                <a:solidFill>
+                  <a:srgbClr val="241D1A"/>
+                </a:solidFill>
+                <a:latin typeface="Arial" pitchFamily="34" charset="0"/>
+                <a:ea typeface="Arial" pitchFamily="34" charset="-122"/>
+                <a:cs typeface="Arial" pitchFamily="34" charset="-120"/>
+              </a:rPr>
+              <a:t>Building the product</a:t>
+            </a:r>
+            <a:endParaRPr lang="en-US" sz="1300" dirty="0"/>
+          </a:p>
+          <a:p>
+            <a:pPr algn="ctr" indent="0" marL="0">
+              <a:buNone/>
+            </a:pPr>
+            <a:r>
+              <a:rPr lang="en-US" sz="900" dirty="0">
+                <a:solidFill>
+                  <a:srgbClr val="6E655D"/>
+                </a:solidFill>
+                <a:latin typeface="Arial" pitchFamily="34" charset="0"/>
+                <a:ea typeface="Arial" pitchFamily="34" charset="-122"/>
+                <a:cs typeface="Arial" pitchFamily="34" charset="-120"/>
+              </a:rPr>
+              <a:t>iOS/Android app + PWA + web · 14 languages</a:t>
+            </a:r>
+            <a:endParaRPr lang="en-US" sz="1300" dirty="0"/>
+          </a:p>
+        </p:txBody>
+      </p:sp>
+      <p:sp>
+        <p:nvSpPr>
+          <p:cNvPr id="31" name="Shape 27"/>
+          <p:cNvSpPr/>
+          <p:nvPr/>
+        </p:nvSpPr>
+        <p:spPr>
+          <a:xfrm>
+            <a:off x="4946904" y="2816352"/>
+            <a:ext cx="1097280" cy="1097280"/>
+          </a:xfrm>
+          <a:prstGeom prst="ellipse">
+            <a:avLst/>
+          </a:prstGeom>
+          <a:solidFill>
+            <a:srgbClr val="FF7600">
+              <a:alpha val="16000"/>
+            </a:srgbClr>
+          </a:solidFill>
+          <a:ln/>
+        </p:spPr>
+      </p:sp>
+      <p:sp>
+        <p:nvSpPr>
+          <p:cNvPr id="32" name="Shape 28"/>
+          <p:cNvSpPr/>
+          <p:nvPr/>
+        </p:nvSpPr>
+        <p:spPr>
+          <a:xfrm>
+            <a:off x="5010912" y="2880360"/>
+            <a:ext cx="969264" cy="969264"/>
+          </a:xfrm>
+          <a:prstGeom prst="ellipse">
+            <a:avLst/>
+          </a:prstGeom>
+          <a:solidFill>
+            <a:srgbClr val="FFFFFF"/>
+          </a:solidFill>
+          <a:ln w="50800">
+            <a:solidFill>
+              <a:srgbClr val="FF7600"/>
+            </a:solidFill>
+            <a:prstDash val="solid"/>
+          </a:ln>
+          <a:effectLst>
+            <a:outerShdw sx="100000" sy="100000" kx="0" ky="0" algn="bl" rotWithShape="0" blurRad="114300" dist="38100" dir="5400000">
+              <a:srgbClr val="241D1A">
+                <a:alpha val="30000"/>
+              </a:srgbClr>
+            </a:outerShdw>
+          </a:effectLst>
+        </p:spPr>
+      </p:sp>
+      <p:pic>
+        <p:nvPicPr>
+          <p:cNvPr id="33" name="Image 2" descr="preencoded.png">    </p:cNvPr>
+          <p:cNvPicPr>
+            <a:picLocks noChangeAspect="1"/>
+          </p:cNvPicPr>
+          <p:nvPr/>
+        </p:nvPicPr>
+        <p:blipFill>
+          <a:blip r:embed="rId3"/>
+          <a:stretch>
+            <a:fillRect/>
+          </a:stretch>
+        </p:blipFill>
+        <p:spPr>
+          <a:xfrm>
+            <a:off x="5157216" y="3026664"/>
+            <a:ext cx="676656" cy="676656"/>
+          </a:xfrm>
+          <a:prstGeom prst="rect">
+            <a:avLst/>
+          </a:prstGeom>
+        </p:spPr>
+      </p:pic>
+      <p:sp>
+        <p:nvSpPr>
+          <p:cNvPr id="34" name="Shape 29"/>
+          <p:cNvSpPr/>
+          <p:nvPr/>
+        </p:nvSpPr>
+        <p:spPr>
+          <a:xfrm>
+            <a:off x="5715000" y="2843784"/>
+            <a:ext cx="310896" cy="310896"/>
+          </a:xfrm>
+          <a:prstGeom prst="ellipse">
+            <a:avLst/>
+          </a:prstGeom>
+          <a:solidFill>
+            <a:srgbClr val="FF7600"/>
+          </a:solidFill>
+          <a:ln w="25400">
+            <a:solidFill>
+              <a:srgbClr val="FFFFFF"/>
+            </a:solidFill>
+            <a:prstDash val="solid"/>
+          </a:ln>
+        </p:spPr>
+      </p:sp>
+      <p:sp>
+        <p:nvSpPr>
+          <p:cNvPr id="35" name="Text 30"/>
+          <p:cNvSpPr/>
+          <p:nvPr/>
+        </p:nvSpPr>
+        <p:spPr>
+          <a:xfrm>
+            <a:off x="5715000" y="2843784"/>
+            <a:ext cx="310896" cy="310896"/>
+          </a:xfrm>
+          <a:prstGeom prst="rect">
+            <a:avLst/>
+          </a:prstGeom>
+          <a:noFill/>
+          <a:ln/>
+        </p:spPr>
+        <p:txBody>
+          <a:bodyPr wrap="square" lIns="0" tIns="0" rIns="0" bIns="0" rtlCol="0" anchor="ctr"/>
+          <a:lstStyle/>
+          <a:p>
+            <a:pPr algn="ctr" indent="0" marL="0">
+              <a:buNone/>
+            </a:pPr>
+            <a:r>
+              <a:rPr lang="en-US" sz="1200" b="1" dirty="0">
+                <a:solidFill>
+                  <a:srgbClr val="FFFFFF"/>
+                </a:solidFill>
+                <a:latin typeface="Arial" pitchFamily="34" charset="0"/>
+                <a:ea typeface="Arial" pitchFamily="34" charset="-122"/>
+                <a:cs typeface="Arial" pitchFamily="34" charset="-120"/>
+              </a:rPr>
+              <a:t>3</a:t>
+            </a:r>
+            <a:endParaRPr lang="en-US" sz="1200" dirty="0"/>
+          </a:p>
+        </p:txBody>
+      </p:sp>
+      <p:sp>
+        <p:nvSpPr>
+          <p:cNvPr id="36" name="Shape 31"/>
+          <p:cNvSpPr/>
+          <p:nvPr/>
+        </p:nvSpPr>
+        <p:spPr>
+          <a:xfrm>
+            <a:off x="5495544" y="2450592"/>
+            <a:ext cx="0" cy="429768"/>
+          </a:xfrm>
+          <a:prstGeom prst="line">
+            <a:avLst/>
+          </a:prstGeom>
+          <a:noFill/>
+          <a:ln w="25400">
+            <a:solidFill>
+              <a:srgbClr val="FF7600"/>
+            </a:solidFill>
+            <a:prstDash val="dash"/>
+          </a:ln>
+        </p:spPr>
+      </p:sp>
+      <p:sp>
+        <p:nvSpPr>
+          <p:cNvPr id="37" name="Shape 32"/>
+          <p:cNvSpPr/>
+          <p:nvPr/>
+        </p:nvSpPr>
+        <p:spPr>
+          <a:xfrm>
+            <a:off x="4837176" y="2139696"/>
+            <a:ext cx="1316736" cy="274320"/>
+          </a:xfrm>
+          <a:prstGeom prst="roundRect">
+            <a:avLst>
+              <a:gd name="adj" fmla="val 16667"/>
+            </a:avLst>
+          </a:prstGeom>
+          <a:solidFill>
+            <a:srgbClr val="FF7600"/>
+          </a:solidFill>
+          <a:ln/>
+          <a:effectLst>
+            <a:outerShdw sx="100000" sy="100000" kx="0" ky="0" algn="bl" rotWithShape="0" blurRad="50800" dist="25400" dir="5400000">
+              <a:srgbClr val="241D1A">
+                <a:alpha val="25000"/>
+              </a:srgbClr>
+            </a:outerShdw>
+          </a:effectLst>
+        </p:spPr>
+      </p:sp>
+      <p:sp>
+        <p:nvSpPr>
+          <p:cNvPr id="38" name="Text 33"/>
+          <p:cNvSpPr/>
+          <p:nvPr/>
+        </p:nvSpPr>
+        <p:spPr>
+          <a:xfrm>
+            <a:off x="4837176" y="2139696"/>
+            <a:ext cx="1316736" cy="274320"/>
+          </a:xfrm>
+          <a:prstGeom prst="rect">
+            <a:avLst/>
+          </a:prstGeom>
+          <a:noFill/>
+          <a:ln/>
+        </p:spPr>
+        <p:txBody>
+          <a:bodyPr wrap="square" lIns="0" tIns="0" rIns="0" bIns="0" rtlCol="0" anchor="ctr"/>
+          <a:lstStyle/>
+          <a:p>
+            <a:pPr algn="ctr" indent="0" marL="0">
+              <a:buNone/>
+            </a:pPr>
+            <a:r>
+              <a:rPr lang="en-US" sz="1100" b="1" spc="100" kern="0" dirty="0">
+                <a:solidFill>
+                  <a:srgbClr val="FFFFFF"/>
+                </a:solidFill>
+                <a:latin typeface="Arial" pitchFamily="34" charset="0"/>
+                <a:ea typeface="Arial" pitchFamily="34" charset="-122"/>
+                <a:cs typeface="Arial" pitchFamily="34" charset="-120"/>
+              </a:rPr>
+              <a:t>AUG 2026</a:t>
+            </a:r>
+            <a:endParaRPr lang="en-US" sz="1100" dirty="0"/>
+          </a:p>
+        </p:txBody>
+      </p:sp>
+      <p:sp>
+        <p:nvSpPr>
+          <p:cNvPr id="39" name="Text 34"/>
+          <p:cNvSpPr/>
+          <p:nvPr/>
+        </p:nvSpPr>
+        <p:spPr>
+          <a:xfrm>
+            <a:off x="4562856" y="1188720"/>
+            <a:ext cx="1865376" cy="877824"/>
+          </a:xfrm>
+          <a:prstGeom prst="rect">
+            <a:avLst/>
+          </a:prstGeom>
+          <a:noFill/>
+          <a:ln/>
+        </p:spPr>
+        <p:txBody>
+          <a:bodyPr wrap="square" lIns="0" tIns="0" rIns="0" bIns="0" rtlCol="0" anchor="b"/>
+          <a:lstStyle/>
+          <a:p>
+            <a:pPr algn="ctr" indent="0" marL="0">
+              <a:buNone/>
+            </a:pPr>
+            <a:r>
+              <a:rPr lang="en-US" sz="1300" b="1" dirty="0">
+                <a:solidFill>
+                  <a:srgbClr val="241D1A"/>
+                </a:solidFill>
+                <a:latin typeface="Arial" pitchFamily="34" charset="0"/>
+                <a:ea typeface="Arial" pitchFamily="34" charset="-122"/>
+                <a:cs typeface="Arial" pitchFamily="34" charset="-120"/>
+              </a:rPr>
+              <a:t>Live pilot on both stores</a:t>
+            </a:r>
+            <a:endParaRPr lang="en-US" sz="1300" dirty="0"/>
+          </a:p>
+          <a:p>
+            <a:pPr algn="ctr" indent="0" marL="0">
+              <a:buNone/>
+            </a:pPr>
+            <a:r>
+              <a:rPr lang="en-US" sz="900" dirty="0">
+                <a:solidFill>
+                  <a:srgbClr val="6E655D"/>
+                </a:solidFill>
+                <a:latin typeface="Arial" pitchFamily="34" charset="0"/>
+                <a:ea typeface="Arial" pitchFamily="34" charset="-122"/>
+                <a:cs typeface="Arial" pitchFamily="34" charset="-120"/>
+              </a:rPr>
+              <a:t>32 testers · auditable consent · v0.20</a:t>
+            </a:r>
+            <a:endParaRPr lang="en-US" sz="1300" dirty="0"/>
+          </a:p>
+        </p:txBody>
+      </p:sp>
+      <p:sp>
+        <p:nvSpPr>
+          <p:cNvPr id="40" name="Shape 35"/>
+          <p:cNvSpPr/>
+          <p:nvPr/>
+        </p:nvSpPr>
+        <p:spPr>
+          <a:xfrm>
+            <a:off x="6729984" y="2816352"/>
+            <a:ext cx="1097280" cy="1097280"/>
+          </a:xfrm>
+          <a:prstGeom prst="ellipse">
+            <a:avLst/>
+          </a:prstGeom>
+          <a:solidFill>
+            <a:srgbClr val="F59E0B">
+              <a:alpha val="16000"/>
+            </a:srgbClr>
+          </a:solidFill>
+          <a:ln/>
+        </p:spPr>
+      </p:sp>
+      <p:sp>
+        <p:nvSpPr>
+          <p:cNvPr id="41" name="Shape 36"/>
+          <p:cNvSpPr/>
+          <p:nvPr/>
+        </p:nvSpPr>
+        <p:spPr>
+          <a:xfrm>
+            <a:off x="6793992" y="2880360"/>
+            <a:ext cx="969264" cy="969264"/>
+          </a:xfrm>
+          <a:prstGeom prst="ellipse">
+            <a:avLst/>
+          </a:prstGeom>
+          <a:solidFill>
+            <a:srgbClr val="FFFFFF"/>
+          </a:solidFill>
+          <a:ln w="50800">
+            <a:solidFill>
+              <a:srgbClr val="F59E0B"/>
+            </a:solidFill>
+            <a:prstDash val="solid"/>
+          </a:ln>
+          <a:effectLst>
+            <a:outerShdw sx="100000" sy="100000" kx="0" ky="0" algn="bl" rotWithShape="0" blurRad="114300" dist="38100" dir="5400000">
+              <a:srgbClr val="241D1A">
+                <a:alpha val="30000"/>
+              </a:srgbClr>
+            </a:outerShdw>
+          </a:effectLst>
+        </p:spPr>
+      </p:sp>
+      <p:pic>
+        <p:nvPicPr>
+          <p:cNvPr id="42" name="Image 3" descr="preencoded.png">    </p:cNvPr>
+          <p:cNvPicPr>
+            <a:picLocks noChangeAspect="1"/>
+          </p:cNvPicPr>
+          <p:nvPr/>
+        </p:nvPicPr>
+        <p:blipFill>
+          <a:blip r:embed="rId4"/>
+          <a:stretch>
+            <a:fillRect/>
+          </a:stretch>
+        </p:blipFill>
+        <p:spPr>
+          <a:xfrm>
+            <a:off x="6940296" y="3026664"/>
+            <a:ext cx="676656" cy="676656"/>
+          </a:xfrm>
+          <a:prstGeom prst="rect">
+            <a:avLst/>
+          </a:prstGeom>
+        </p:spPr>
+      </p:pic>
+      <p:sp>
+        <p:nvSpPr>
+          <p:cNvPr id="43" name="Shape 37"/>
+          <p:cNvSpPr/>
+          <p:nvPr/>
+        </p:nvSpPr>
+        <p:spPr>
+          <a:xfrm>
+            <a:off x="7498080" y="2843784"/>
+            <a:ext cx="310896" cy="310896"/>
+          </a:xfrm>
+          <a:prstGeom prst="ellipse">
+            <a:avLst/>
+          </a:prstGeom>
+          <a:solidFill>
+            <a:srgbClr val="F59E0B"/>
+          </a:solidFill>
+          <a:ln w="25400">
+            <a:solidFill>
+              <a:srgbClr val="FFFFFF"/>
+            </a:solidFill>
+            <a:prstDash val="solid"/>
+          </a:ln>
+        </p:spPr>
+      </p:sp>
+      <p:sp>
+        <p:nvSpPr>
+          <p:cNvPr id="44" name="Text 38"/>
+          <p:cNvSpPr/>
+          <p:nvPr/>
+        </p:nvSpPr>
+        <p:spPr>
+          <a:xfrm>
+            <a:off x="7498080" y="2843784"/>
+            <a:ext cx="310896" cy="310896"/>
+          </a:xfrm>
+          <a:prstGeom prst="rect">
+            <a:avLst/>
+          </a:prstGeom>
+          <a:noFill/>
+          <a:ln/>
+        </p:spPr>
+        <p:txBody>
+          <a:bodyPr wrap="square" lIns="0" tIns="0" rIns="0" bIns="0" rtlCol="0" anchor="ctr"/>
+          <a:lstStyle/>
+          <a:p>
+            <a:pPr algn="ctr" indent="0" marL="0">
+              <a:buNone/>
+            </a:pPr>
+            <a:r>
+              <a:rPr lang="en-US" sz="1200" b="1" dirty="0">
+                <a:solidFill>
+                  <a:srgbClr val="FFFFFF"/>
+                </a:solidFill>
+                <a:latin typeface="Arial" pitchFamily="34" charset="0"/>
+                <a:ea typeface="Arial" pitchFamily="34" charset="-122"/>
+                <a:cs typeface="Arial" pitchFamily="34" charset="-120"/>
+              </a:rPr>
+              <a:t>4</a:t>
+            </a:r>
+            <a:endParaRPr lang="en-US" sz="1200" dirty="0"/>
+          </a:p>
+        </p:txBody>
+      </p:sp>
+      <p:sp>
+        <p:nvSpPr>
+          <p:cNvPr id="45" name="Shape 39"/>
+          <p:cNvSpPr/>
+          <p:nvPr/>
+        </p:nvSpPr>
+        <p:spPr>
+          <a:xfrm>
+            <a:off x="7278624" y="3867912"/>
+            <a:ext cx="0" cy="429768"/>
+          </a:xfrm>
+          <a:prstGeom prst="line">
+            <a:avLst/>
+          </a:prstGeom>
+          <a:noFill/>
+          <a:ln w="25400">
+            <a:solidFill>
+              <a:srgbClr val="F59E0B"/>
+            </a:solidFill>
+            <a:prstDash val="dash"/>
+          </a:ln>
+        </p:spPr>
+      </p:sp>
+      <p:sp>
+        <p:nvSpPr>
+          <p:cNvPr id="46" name="Shape 40"/>
+          <p:cNvSpPr/>
+          <p:nvPr/>
+        </p:nvSpPr>
+        <p:spPr>
+          <a:xfrm>
+            <a:off x="6620256" y="4059936"/>
+            <a:ext cx="1316736" cy="274320"/>
+          </a:xfrm>
+          <a:prstGeom prst="roundRect">
+            <a:avLst>
+              <a:gd name="adj" fmla="val 16667"/>
+            </a:avLst>
+          </a:prstGeom>
+          <a:solidFill>
+            <a:srgbClr val="F59E0B"/>
+          </a:solidFill>
+          <a:ln/>
+          <a:effectLst>
+            <a:outerShdw sx="100000" sy="100000" kx="0" ky="0" algn="bl" rotWithShape="0" blurRad="50800" dist="25400" dir="5400000">
+              <a:srgbClr val="241D1A">
+                <a:alpha val="25000"/>
+              </a:srgbClr>
+            </a:outerShdw>
+          </a:effectLst>
+        </p:spPr>
+      </p:sp>
+      <p:sp>
+        <p:nvSpPr>
+          <p:cNvPr id="47" name="Text 41"/>
+          <p:cNvSpPr/>
+          <p:nvPr/>
+        </p:nvSpPr>
+        <p:spPr>
+          <a:xfrm>
+            <a:off x="6620256" y="4059936"/>
+            <a:ext cx="1316736" cy="274320"/>
+          </a:xfrm>
+          <a:prstGeom prst="rect">
+            <a:avLst/>
+          </a:prstGeom>
+          <a:noFill/>
+          <a:ln/>
+        </p:spPr>
+        <p:txBody>
+          <a:bodyPr wrap="square" lIns="0" tIns="0" rIns="0" bIns="0" rtlCol="0" anchor="ctr"/>
+          <a:lstStyle/>
+          <a:p>
+            <a:pPr algn="ctr" indent="0" marL="0">
+              <a:buNone/>
+            </a:pPr>
+            <a:r>
+              <a:rPr lang="en-US" sz="1100" b="1" spc="100" kern="0" dirty="0">
+                <a:solidFill>
+                  <a:srgbClr val="FFFFFF"/>
+                </a:solidFill>
+                <a:latin typeface="Arial" pitchFamily="34" charset="0"/>
+                <a:ea typeface="Arial" pitchFamily="34" charset="-122"/>
+                <a:cs typeface="Arial" pitchFamily="34" charset="-120"/>
+              </a:rPr>
+              <a:t>SEP 2026</a:t>
+            </a:r>
+            <a:endParaRPr lang="en-US" sz="1100" dirty="0"/>
+          </a:p>
+        </p:txBody>
+      </p:sp>
+      <p:sp>
+        <p:nvSpPr>
+          <p:cNvPr id="48" name="Text 42"/>
+          <p:cNvSpPr/>
+          <p:nvPr/>
+        </p:nvSpPr>
+        <p:spPr>
+          <a:xfrm>
+            <a:off x="6345936" y="4407408"/>
+            <a:ext cx="1865376" cy="877824"/>
+          </a:xfrm>
+          <a:prstGeom prst="rect">
+            <a:avLst/>
+          </a:prstGeom>
+          <a:noFill/>
+          <a:ln/>
+        </p:spPr>
+        <p:txBody>
+          <a:bodyPr wrap="square" lIns="0" tIns="0" rIns="0" bIns="0" rtlCol="0" anchor="t"/>
+          <a:lstStyle/>
+          <a:p>
+            <a:pPr algn="ctr" indent="0" marL="0">
+              <a:buNone/>
+            </a:pPr>
+            <a:r>
+              <a:rPr lang="en-US" sz="1300" b="1" dirty="0">
+                <a:solidFill>
+                  <a:srgbClr val="241D1A"/>
+                </a:solidFill>
+                <a:latin typeface="Arial" pitchFamily="34" charset="0"/>
+                <a:ea typeface="Arial" pitchFamily="34" charset="-122"/>
+                <a:cs typeface="Arial" pitchFamily="34" charset="-120"/>
+              </a:rPr>
+              <a:t>Expanded pilot + payments</a:t>
+            </a:r>
+            <a:endParaRPr lang="en-US" sz="1300" dirty="0"/>
+          </a:p>
+          <a:p>
+            <a:pPr algn="ctr" indent="0" marL="0">
+              <a:buNone/>
+            </a:pPr>
+            <a:r>
+              <a:rPr lang="en-US" sz="900" dirty="0">
+                <a:solidFill>
+                  <a:srgbClr val="6E655D"/>
+                </a:solidFill>
+                <a:latin typeface="Arial" pitchFamily="34" charset="0"/>
+                <a:ea typeface="Arial" pitchFamily="34" charset="-122"/>
+                <a:cs typeface="Arial" pitchFamily="34" charset="-120"/>
+              </a:rPr>
+              <a:t>Phases 1-2 · legal published · store listings</a:t>
+            </a:r>
+            <a:endParaRPr lang="en-US" sz="1300" dirty="0"/>
+          </a:p>
+        </p:txBody>
+      </p:sp>
+      <p:sp>
+        <p:nvSpPr>
+          <p:cNvPr id="49" name="Shape 43"/>
+          <p:cNvSpPr/>
+          <p:nvPr/>
+        </p:nvSpPr>
+        <p:spPr>
+          <a:xfrm>
+            <a:off x="8513064" y="2816352"/>
+            <a:ext cx="1097280" cy="1097280"/>
+          </a:xfrm>
+          <a:prstGeom prst="ellipse">
+            <a:avLst/>
+          </a:prstGeom>
+          <a:solidFill>
+            <a:srgbClr val="FD400C">
+              <a:alpha val="16000"/>
+            </a:srgbClr>
+          </a:solidFill>
+          <a:ln/>
+        </p:spPr>
+      </p:sp>
+      <p:sp>
+        <p:nvSpPr>
+          <p:cNvPr id="50" name="Shape 44"/>
+          <p:cNvSpPr/>
+          <p:nvPr/>
+        </p:nvSpPr>
+        <p:spPr>
+          <a:xfrm>
+            <a:off x="8577072" y="2880360"/>
+            <a:ext cx="969264" cy="969264"/>
+          </a:xfrm>
+          <a:prstGeom prst="ellipse">
+            <a:avLst/>
+          </a:prstGeom>
+          <a:solidFill>
+            <a:srgbClr val="FFFFFF"/>
+          </a:solidFill>
+          <a:ln w="50800">
+            <a:solidFill>
+              <a:srgbClr val="FD400C"/>
+            </a:solidFill>
+            <a:prstDash val="solid"/>
+          </a:ln>
+          <a:effectLst>
+            <a:outerShdw sx="100000" sy="100000" kx="0" ky="0" algn="bl" rotWithShape="0" blurRad="114300" dist="38100" dir="5400000">
+              <a:srgbClr val="241D1A">
+                <a:alpha val="30000"/>
+              </a:srgbClr>
+            </a:outerShdw>
+          </a:effectLst>
+        </p:spPr>
+      </p:sp>
+      <p:pic>
+        <p:nvPicPr>
+          <p:cNvPr id="51" name="Image 4" descr="preencoded.png">    </p:cNvPr>
+          <p:cNvPicPr>
+            <a:picLocks noChangeAspect="1"/>
+          </p:cNvPicPr>
+          <p:nvPr/>
+        </p:nvPicPr>
+        <p:blipFill>
+          <a:blip r:embed="rId5"/>
+          <a:stretch>
+            <a:fillRect/>
+          </a:stretch>
+        </p:blipFill>
+        <p:spPr>
+          <a:xfrm>
+            <a:off x="8723376" y="3026664"/>
+            <a:ext cx="676656" cy="676656"/>
+          </a:xfrm>
+          <a:prstGeom prst="rect">
+            <a:avLst/>
+          </a:prstGeom>
+        </p:spPr>
+      </p:pic>
+      <p:sp>
+        <p:nvSpPr>
+          <p:cNvPr id="52" name="Shape 45"/>
+          <p:cNvSpPr/>
+          <p:nvPr/>
+        </p:nvSpPr>
+        <p:spPr>
+          <a:xfrm>
+            <a:off x="9281160" y="2843784"/>
+            <a:ext cx="310896" cy="310896"/>
+          </a:xfrm>
+          <a:prstGeom prst="ellipse">
+            <a:avLst/>
+          </a:prstGeom>
+          <a:solidFill>
+            <a:srgbClr val="FD400C"/>
+          </a:solidFill>
+          <a:ln w="25400">
+            <a:solidFill>
+              <a:srgbClr val="FFFFFF"/>
+            </a:solidFill>
+            <a:prstDash val="solid"/>
+          </a:ln>
+        </p:spPr>
+      </p:sp>
+      <p:sp>
+        <p:nvSpPr>
+          <p:cNvPr id="53" name="Text 46"/>
+          <p:cNvSpPr/>
+          <p:nvPr/>
+        </p:nvSpPr>
+        <p:spPr>
+          <a:xfrm>
+            <a:off x="9281160" y="2843784"/>
+            <a:ext cx="310896" cy="310896"/>
+          </a:xfrm>
+          <a:prstGeom prst="rect">
+            <a:avLst/>
+          </a:prstGeom>
+          <a:noFill/>
+          <a:ln/>
+        </p:spPr>
+        <p:txBody>
+          <a:bodyPr wrap="square" lIns="0" tIns="0" rIns="0" bIns="0" rtlCol="0" anchor="ctr"/>
+          <a:lstStyle/>
+          <a:p>
+            <a:pPr algn="ctr" indent="0" marL="0">
+              <a:buNone/>
+            </a:pPr>
+            <a:r>
+              <a:rPr lang="en-US" sz="1200" b="1" dirty="0">
+                <a:solidFill>
+                  <a:srgbClr val="FFFFFF"/>
+                </a:solidFill>
+                <a:latin typeface="Arial" pitchFamily="34" charset="0"/>
+                <a:ea typeface="Arial" pitchFamily="34" charset="-122"/>
+                <a:cs typeface="Arial" pitchFamily="34" charset="-120"/>
+              </a:rPr>
+              <a:t>5</a:t>
+            </a:r>
+            <a:endParaRPr lang="en-US" sz="1200" dirty="0"/>
+          </a:p>
+        </p:txBody>
+      </p:sp>
+      <p:sp>
+        <p:nvSpPr>
+          <p:cNvPr id="54" name="Shape 47"/>
+          <p:cNvSpPr/>
+          <p:nvPr/>
+        </p:nvSpPr>
+        <p:spPr>
+          <a:xfrm>
+            <a:off x="9061704" y="2450592"/>
+            <a:ext cx="0" cy="429768"/>
+          </a:xfrm>
+          <a:prstGeom prst="line">
+            <a:avLst/>
+          </a:prstGeom>
+          <a:noFill/>
+          <a:ln w="25400">
+            <a:solidFill>
+              <a:srgbClr val="FD400C"/>
+            </a:solidFill>
+            <a:prstDash val="dash"/>
+          </a:ln>
+        </p:spPr>
+      </p:sp>
+      <p:sp>
+        <p:nvSpPr>
+          <p:cNvPr id="55" name="Shape 48"/>
+          <p:cNvSpPr/>
+          <p:nvPr/>
+        </p:nvSpPr>
+        <p:spPr>
+          <a:xfrm>
+            <a:off x="8403336" y="2139696"/>
+            <a:ext cx="1316736" cy="274320"/>
+          </a:xfrm>
+          <a:prstGeom prst="roundRect">
+            <a:avLst>
+              <a:gd name="adj" fmla="val 16667"/>
+            </a:avLst>
+          </a:prstGeom>
+          <a:solidFill>
+            <a:srgbClr val="FD400C"/>
+          </a:solidFill>
+          <a:ln/>
+          <a:effectLst>
+            <a:outerShdw sx="100000" sy="100000" kx="0" ky="0" algn="bl" rotWithShape="0" blurRad="50800" dist="25400" dir="5400000">
+              <a:srgbClr val="241D1A">
+                <a:alpha val="25000"/>
+              </a:srgbClr>
+            </a:outerShdw>
+          </a:effectLst>
+        </p:spPr>
+      </p:sp>
+      <p:sp>
+        <p:nvSpPr>
+          <p:cNvPr id="56" name="Text 49"/>
+          <p:cNvSpPr/>
+          <p:nvPr/>
+        </p:nvSpPr>
+        <p:spPr>
+          <a:xfrm>
+            <a:off x="8403336" y="2139696"/>
+            <a:ext cx="1316736" cy="274320"/>
+          </a:xfrm>
+          <a:prstGeom prst="rect">
+            <a:avLst/>
+          </a:prstGeom>
+          <a:noFill/>
+          <a:ln/>
+        </p:spPr>
+        <p:txBody>
+          <a:bodyPr wrap="square" lIns="0" tIns="0" rIns="0" bIns="0" rtlCol="0" anchor="ctr"/>
+          <a:lstStyle/>
+          <a:p>
+            <a:pPr algn="ctr" indent="0" marL="0">
+              <a:buNone/>
+            </a:pPr>
+            <a:r>
+              <a:rPr lang="en-US" sz="1100" b="1" spc="100" kern="0" dirty="0">
+                <a:solidFill>
+                  <a:srgbClr val="FFFFFF"/>
+                </a:solidFill>
+                <a:latin typeface="Arial" pitchFamily="34" charset="0"/>
+                <a:ea typeface="Arial" pitchFamily="34" charset="-122"/>
+                <a:cs typeface="Arial" pitchFamily="34" charset="-120"/>
+              </a:rPr>
+              <a:t>OCT 8 2026</a:t>
+            </a:r>
+            <a:endParaRPr lang="en-US" sz="1100" dirty="0"/>
+          </a:p>
+        </p:txBody>
+      </p:sp>
+      <p:sp>
+        <p:nvSpPr>
+          <p:cNvPr id="57" name="Text 50"/>
+          <p:cNvSpPr/>
+          <p:nvPr/>
+        </p:nvSpPr>
+        <p:spPr>
+          <a:xfrm>
+            <a:off x="8129016" y="1188720"/>
+            <a:ext cx="1865376" cy="877824"/>
+          </a:xfrm>
+          <a:prstGeom prst="rect">
+            <a:avLst/>
+          </a:prstGeom>
+          <a:noFill/>
+          <a:ln/>
+        </p:spPr>
+        <p:txBody>
+          <a:bodyPr wrap="square" lIns="0" tIns="0" rIns="0" bIns="0" rtlCol="0" anchor="b"/>
+          <a:lstStyle/>
+          <a:p>
+            <a:pPr algn="ctr" indent="0" marL="0">
+              <a:buNone/>
+            </a:pPr>
+            <a:r>
+              <a:rPr lang="en-US" sz="1300" b="1" dirty="0">
+                <a:solidFill>
+                  <a:srgbClr val="241D1A"/>
+                </a:solidFill>
+                <a:latin typeface="Arial" pitchFamily="34" charset="0"/>
+                <a:ea typeface="Arial" pitchFamily="34" charset="-122"/>
+                <a:cs typeface="Arial" pitchFamily="34" charset="-120"/>
+              </a:rPr>
+              <a:t>Commercial launch</a:t>
+            </a:r>
+            <a:endParaRPr lang="en-US" sz="1300" dirty="0"/>
+          </a:p>
+          <a:p>
+            <a:pPr algn="ctr" indent="0" marL="0">
+              <a:buNone/>
+            </a:pPr>
+            <a:r>
+              <a:rPr lang="en-US" sz="900" dirty="0">
+                <a:solidFill>
+                  <a:srgbClr val="6E655D"/>
+                </a:solidFill>
+                <a:latin typeface="Arial" pitchFamily="34" charset="0"/>
+                <a:ea typeface="Arial" pitchFamily="34" charset="-122"/>
+                <a:cs typeface="Arial" pitchFamily="34" charset="-120"/>
+              </a:rPr>
+              <a:t>App Store + Google Play · payments on</a:t>
+            </a:r>
+            <a:endParaRPr lang="en-US" sz="1300" dirty="0"/>
+          </a:p>
+        </p:txBody>
+      </p:sp>
+      <p:sp>
+        <p:nvSpPr>
+          <p:cNvPr id="58" name="Shape 51"/>
+          <p:cNvSpPr/>
+          <p:nvPr/>
+        </p:nvSpPr>
+        <p:spPr>
+          <a:xfrm>
+            <a:off x="10296144" y="2816352"/>
+            <a:ext cx="1097280" cy="1097280"/>
+          </a:xfrm>
+          <a:prstGeom prst="ellipse">
+            <a:avLst/>
+          </a:prstGeom>
+          <a:solidFill>
+            <a:srgbClr val="C73A20">
+              <a:alpha val="16000"/>
+            </a:srgbClr>
+          </a:solidFill>
+          <a:ln/>
+        </p:spPr>
+      </p:sp>
+      <p:sp>
+        <p:nvSpPr>
+          <p:cNvPr id="59" name="Shape 52"/>
+          <p:cNvSpPr/>
+          <p:nvPr/>
+        </p:nvSpPr>
+        <p:spPr>
+          <a:xfrm>
+            <a:off x="10360152" y="2880360"/>
+            <a:ext cx="969264" cy="969264"/>
+          </a:xfrm>
+          <a:prstGeom prst="ellipse">
+            <a:avLst/>
+          </a:prstGeom>
+          <a:solidFill>
+            <a:srgbClr val="FFFFFF"/>
+          </a:solidFill>
+          <a:ln w="50800">
+            <a:solidFill>
+              <a:srgbClr val="C73A20"/>
+            </a:solidFill>
+            <a:prstDash val="solid"/>
+          </a:ln>
+          <a:effectLst>
+            <a:outerShdw sx="100000" sy="100000" kx="0" ky="0" algn="bl" rotWithShape="0" blurRad="114300" dist="38100" dir="5400000">
+              <a:srgbClr val="241D1A">
+                <a:alpha val="30000"/>
+              </a:srgbClr>
+            </a:outerShdw>
+          </a:effectLst>
+        </p:spPr>
+      </p:sp>
+      <p:pic>
+        <p:nvPicPr>
+          <p:cNvPr id="60" name="Image 5" descr="preencoded.png">    </p:cNvPr>
+          <p:cNvPicPr>
+            <a:picLocks noChangeAspect="1"/>
+          </p:cNvPicPr>
+          <p:nvPr/>
+        </p:nvPicPr>
+        <p:blipFill>
+          <a:blip r:embed="rId6"/>
+          <a:stretch>
+            <a:fillRect/>
+          </a:stretch>
+        </p:blipFill>
+        <p:spPr>
+          <a:xfrm>
+            <a:off x="10506456" y="3026664"/>
+            <a:ext cx="676656" cy="676656"/>
+          </a:xfrm>
+          <a:prstGeom prst="rect">
+            <a:avLst/>
+          </a:prstGeom>
+        </p:spPr>
+      </p:pic>
+      <p:sp>
+        <p:nvSpPr>
+          <p:cNvPr id="61" name="Shape 53"/>
+          <p:cNvSpPr/>
+          <p:nvPr/>
+        </p:nvSpPr>
+        <p:spPr>
+          <a:xfrm>
+            <a:off x="11064240" y="2843784"/>
+            <a:ext cx="310896" cy="310896"/>
+          </a:xfrm>
+          <a:prstGeom prst="ellipse">
+            <a:avLst/>
+          </a:prstGeom>
+          <a:solidFill>
+            <a:srgbClr val="C73A20"/>
+          </a:solidFill>
+          <a:ln w="25400">
+            <a:solidFill>
+              <a:srgbClr val="FFFFFF"/>
+            </a:solidFill>
+            <a:prstDash val="solid"/>
+          </a:ln>
+        </p:spPr>
+      </p:sp>
+      <p:sp>
+        <p:nvSpPr>
+          <p:cNvPr id="62" name="Text 54"/>
+          <p:cNvSpPr/>
+          <p:nvPr/>
+        </p:nvSpPr>
+        <p:spPr>
+          <a:xfrm>
+            <a:off x="11064240" y="2843784"/>
+            <a:ext cx="310896" cy="310896"/>
+          </a:xfrm>
+          <a:prstGeom prst="rect">
+            <a:avLst/>
+          </a:prstGeom>
+          <a:noFill/>
+          <a:ln/>
+        </p:spPr>
+        <p:txBody>
+          <a:bodyPr wrap="square" lIns="0" tIns="0" rIns="0" bIns="0" rtlCol="0" anchor="ctr"/>
+          <a:lstStyle/>
+          <a:p>
+            <a:pPr algn="ctr" indent="0" marL="0">
+              <a:buNone/>
+            </a:pPr>
+            <a:r>
+              <a:rPr lang="en-US" sz="1200" b="1" dirty="0">
+                <a:solidFill>
+                  <a:srgbClr val="FFFFFF"/>
+                </a:solidFill>
+                <a:latin typeface="Arial" pitchFamily="34" charset="0"/>
+                <a:ea typeface="Arial" pitchFamily="34" charset="-122"/>
+                <a:cs typeface="Arial" pitchFamily="34" charset="-120"/>
+              </a:rPr>
+              <a:t>6</a:t>
+            </a:r>
+            <a:endParaRPr lang="en-US" sz="1200" dirty="0"/>
+          </a:p>
+        </p:txBody>
+      </p:sp>
+      <p:sp>
+        <p:nvSpPr>
+          <p:cNvPr id="63" name="Shape 55"/>
+          <p:cNvSpPr/>
+          <p:nvPr/>
+        </p:nvSpPr>
+        <p:spPr>
+          <a:xfrm>
+            <a:off x="10844784" y="3867912"/>
+            <a:ext cx="0" cy="429768"/>
+          </a:xfrm>
+          <a:prstGeom prst="line">
+            <a:avLst/>
+          </a:prstGeom>
+          <a:noFill/>
+          <a:ln w="25400">
+            <a:solidFill>
+              <a:srgbClr val="C73A20"/>
+            </a:solidFill>
+            <a:prstDash val="dash"/>
+          </a:ln>
+        </p:spPr>
+      </p:sp>
+      <p:sp>
+        <p:nvSpPr>
+          <p:cNvPr id="64" name="Shape 56"/>
+          <p:cNvSpPr/>
+          <p:nvPr/>
+        </p:nvSpPr>
+        <p:spPr>
+          <a:xfrm>
+            <a:off x="10186416" y="4059936"/>
+            <a:ext cx="1316736" cy="274320"/>
+          </a:xfrm>
+          <a:prstGeom prst="roundRect">
+            <a:avLst>
+              <a:gd name="adj" fmla="val 16667"/>
+            </a:avLst>
+          </a:prstGeom>
+          <a:solidFill>
+            <a:srgbClr val="C73A20"/>
+          </a:solidFill>
+          <a:ln/>
+          <a:effectLst>
+            <a:outerShdw sx="100000" sy="100000" kx="0" ky="0" algn="bl" rotWithShape="0" blurRad="50800" dist="25400" dir="5400000">
+              <a:srgbClr val="241D1A">
+                <a:alpha val="25000"/>
+              </a:srgbClr>
+            </a:outerShdw>
+          </a:effectLst>
+        </p:spPr>
+      </p:sp>
+      <p:sp>
+        <p:nvSpPr>
+          <p:cNvPr id="65" name="Text 57"/>
+          <p:cNvSpPr/>
+          <p:nvPr/>
+        </p:nvSpPr>
+        <p:spPr>
+          <a:xfrm>
+            <a:off x="10186416" y="4059936"/>
+            <a:ext cx="1316736" cy="274320"/>
+          </a:xfrm>
+          <a:prstGeom prst="rect">
+            <a:avLst/>
+          </a:prstGeom>
+          <a:noFill/>
+          <a:ln/>
+        </p:spPr>
+        <p:txBody>
+          <a:bodyPr wrap="square" lIns="0" tIns="0" rIns="0" bIns="0" rtlCol="0" anchor="ctr"/>
+          <a:lstStyle/>
+          <a:p>
+            <a:pPr algn="ctr" indent="0" marL="0">
+              <a:buNone/>
+            </a:pPr>
+            <a:r>
+              <a:rPr lang="en-US" sz="1100" b="1" spc="100" kern="0" dirty="0">
+                <a:solidFill>
+                  <a:srgbClr val="FFFFFF"/>
+                </a:solidFill>
+                <a:latin typeface="Arial" pitchFamily="34" charset="0"/>
+                <a:ea typeface="Arial" pitchFamily="34" charset="-122"/>
+                <a:cs typeface="Arial" pitchFamily="34" charset="-120"/>
+              </a:rPr>
+              <a:t>YEAR 1</a:t>
+            </a:r>
+            <a:endParaRPr lang="en-US" sz="1100" dirty="0"/>
+          </a:p>
+        </p:txBody>
+      </p:sp>
+      <p:sp>
+        <p:nvSpPr>
+          <p:cNvPr id="66" name="Text 58"/>
+          <p:cNvSpPr/>
+          <p:nvPr/>
+        </p:nvSpPr>
+        <p:spPr>
+          <a:xfrm>
+            <a:off x="9912096" y="4407408"/>
+            <a:ext cx="1865376" cy="877824"/>
+          </a:xfrm>
+          <a:prstGeom prst="rect">
+            <a:avLst/>
+          </a:prstGeom>
+          <a:noFill/>
+          <a:ln/>
+        </p:spPr>
+        <p:txBody>
+          <a:bodyPr wrap="square" lIns="0" tIns="0" rIns="0" bIns="0" rtlCol="0" anchor="t"/>
+          <a:lstStyle/>
+          <a:p>
+            <a:pPr algn="ctr" indent="0" marL="0">
+              <a:buNone/>
+            </a:pPr>
+            <a:r>
+              <a:rPr lang="en-US" sz="1300" b="1" dirty="0">
+                <a:solidFill>
+                  <a:srgbClr val="241D1A"/>
+                </a:solidFill>
+                <a:latin typeface="Arial" pitchFamily="34" charset="0"/>
+                <a:ea typeface="Arial" pitchFamily="34" charset="-122"/>
+                <a:cs typeface="Arial" pitchFamily="34" charset="-120"/>
+              </a:rPr>
+              <a:t>Where we are going</a:t>
+            </a:r>
+            <a:endParaRPr lang="en-US" sz="1300" dirty="0"/>
+          </a:p>
+          <a:p>
+            <a:pPr algn="ctr" indent="0" marL="0">
+              <a:buNone/>
+            </a:pPr>
+            <a:r>
+              <a:rPr lang="en-US" sz="900" dirty="0">
+                <a:solidFill>
+                  <a:srgbClr val="6E655D"/>
+                </a:solidFill>
+                <a:latin typeface="Arial" pitchFamily="34" charset="0"/>
+                <a:ea typeface="Arial" pitchFamily="34" charset="-122"/>
+                <a:cs typeface="Arial" pitchFamily="34" charset="-120"/>
+              </a:rPr>
+              <a:t>2,634 subscriptions · €74,772 · scale across EU</a:t>
+            </a:r>
+            <a:endParaRPr lang="en-US" sz="1300" dirty="0"/>
+          </a:p>
+        </p:txBody>
+      </p:sp>
+      <p:sp>
+        <p:nvSpPr>
+          <p:cNvPr id="67" name="Shape 59"/>
+          <p:cNvSpPr/>
+          <p:nvPr/>
+        </p:nvSpPr>
+        <p:spPr>
+          <a:xfrm>
+            <a:off x="5504688" y="3483864"/>
+            <a:ext cx="1463040" cy="256032"/>
+          </a:xfrm>
+          <a:prstGeom prst="roundRect">
+            <a:avLst>
+              <a:gd name="adj" fmla="val 50000"/>
+            </a:avLst>
+          </a:prstGeom>
+          <a:solidFill>
+            <a:srgbClr val="241D1A"/>
+          </a:solidFill>
+          <a:ln/>
+          <a:effectLst>
+            <a:outerShdw sx="100000" sy="100000" kx="0" ky="0" algn="bl" rotWithShape="0" blurRad="63500" dist="25400" dir="5400000">
+              <a:srgbClr val="241D1A">
+                <a:alpha val="35000"/>
+              </a:srgbClr>
+            </a:outerShdw>
+          </a:effectLst>
+        </p:spPr>
+      </p:sp>
+      <p:sp>
+        <p:nvSpPr>
+          <p:cNvPr id="68" name="Shape 60"/>
+          <p:cNvSpPr/>
+          <p:nvPr/>
+        </p:nvSpPr>
+        <p:spPr>
+          <a:xfrm>
+            <a:off x="6153912" y="3346704"/>
+            <a:ext cx="164592" cy="118872"/>
+          </a:xfrm>
+          <a:prstGeom prst="triangle">
+            <a:avLst/>
+          </a:prstGeom>
+          <a:solidFill>
+            <a:srgbClr val="241D1A"/>
+          </a:solidFill>
+          <a:ln/>
+        </p:spPr>
+      </p:sp>
+      <p:sp>
+        <p:nvSpPr>
+          <p:cNvPr id="69" name="Text 61"/>
+          <p:cNvSpPr/>
+          <p:nvPr/>
+        </p:nvSpPr>
+        <p:spPr>
+          <a:xfrm>
+            <a:off x="5504688" y="3483864"/>
+            <a:ext cx="1463040" cy="256032"/>
+          </a:xfrm>
+          <a:prstGeom prst="rect">
+            <a:avLst/>
+          </a:prstGeom>
+          <a:noFill/>
+          <a:ln/>
+        </p:spPr>
+        <p:txBody>
+          <a:bodyPr wrap="square" lIns="0" tIns="0" rIns="0" bIns="0" rtlCol="0" anchor="ctr"/>
+          <a:lstStyle/>
+          <a:p>
+            <a:pPr algn="ctr" indent="0" marL="0">
+              <a:buNone/>
+            </a:pPr>
+            <a:r>
+              <a:rPr lang="en-US" sz="700" b="1" spc="50" kern="0" dirty="0">
+                <a:solidFill>
+                  <a:srgbClr val="FFFFFF"/>
+                </a:solidFill>
+                <a:latin typeface="Arial" pitchFamily="34" charset="0"/>
+                <a:ea typeface="Arial" pitchFamily="34" charset="-122"/>
+                <a:cs typeface="Arial" pitchFamily="34" charset="-120"/>
+              </a:rPr>
+              <a:t>WE ARE HERE · AUG 2026</a:t>
+            </a:r>
+            <a:endParaRPr lang="en-US" sz="700" dirty="0"/>
+          </a:p>
+        </p:txBody>
+      </p:sp>
+      <p:sp>
+        <p:nvSpPr>
+          <p:cNvPr id="70" name="Shape 62"/>
+          <p:cNvSpPr/>
+          <p:nvPr/>
+        </p:nvSpPr>
+        <p:spPr>
+          <a:xfrm>
+            <a:off x="278892" y="5413248"/>
+            <a:ext cx="1847088" cy="493776"/>
+          </a:xfrm>
+          <a:prstGeom prst="roundRect">
+            <a:avLst>
+              <a:gd name="adj" fmla="val 16667"/>
+            </a:avLst>
+          </a:prstGeom>
+          <a:solidFill>
+            <a:srgbClr val="FFF6F2"/>
+          </a:solidFill>
+          <a:ln w="12700">
+            <a:solidFill>
+              <a:srgbClr val="F3C8B8"/>
+            </a:solidFill>
+            <a:prstDash val="solid"/>
+          </a:ln>
+        </p:spPr>
+      </p:sp>
+      <p:sp>
+        <p:nvSpPr>
+          <p:cNvPr id="71" name="Text 63"/>
+          <p:cNvSpPr/>
+          <p:nvPr/>
+        </p:nvSpPr>
+        <p:spPr>
+          <a:xfrm>
+            <a:off x="361188" y="5413248"/>
+            <a:ext cx="1682496" cy="493776"/>
+          </a:xfrm>
+          <a:prstGeom prst="rect">
+            <a:avLst/>
+          </a:prstGeom>
+          <a:noFill/>
+          <a:ln/>
+        </p:spPr>
+        <p:txBody>
+          <a:bodyPr wrap="square" lIns="0" tIns="0" rIns="0" bIns="0" rtlCol="0" anchor="ctr"/>
+          <a:lstStyle/>
+          <a:p>
+            <a:pPr indent="0" marL="0">
+              <a:buNone/>
+            </a:pPr>
+            <a:r>
+              <a:rPr lang="en-US" sz="900" b="1" dirty="0">
+                <a:solidFill>
+                  <a:srgbClr val="241D1A"/>
+                </a:solidFill>
+                <a:latin typeface="Arial" pitchFamily="34" charset="0"/>
+                <a:ea typeface="Arial" pitchFamily="34" charset="-122"/>
+                <a:cs typeface="Arial" pitchFamily="34" charset="-120"/>
+              </a:rPr>
+              <a:t>🍎 App Store</a:t>
+            </a:r>
+            <a:endParaRPr lang="en-US" sz="900" dirty="0"/>
+          </a:p>
+          <a:p>
+            <a:pPr indent="0" marL="0">
+              <a:buNone/>
+            </a:pPr>
+            <a:r>
+              <a:rPr lang="en-US" sz="750" dirty="0">
+                <a:solidFill>
+                  <a:srgbClr val="6E655D"/>
+                </a:solidFill>
+                <a:latin typeface="Arial" pitchFamily="34" charset="0"/>
+                <a:ea typeface="Arial" pitchFamily="34" charset="-122"/>
+                <a:cs typeface="Arial" pitchFamily="34" charset="-120"/>
+              </a:rPr>
+              <a:t>pilot · public Oct 8</a:t>
+            </a:r>
+            <a:endParaRPr lang="en-US" sz="900" dirty="0"/>
+          </a:p>
+        </p:txBody>
+      </p:sp>
+      <p:sp>
+        <p:nvSpPr>
+          <p:cNvPr id="72" name="Shape 64"/>
+          <p:cNvSpPr/>
+          <p:nvPr/>
+        </p:nvSpPr>
+        <p:spPr>
+          <a:xfrm>
+            <a:off x="2235708" y="5413248"/>
+            <a:ext cx="1847088" cy="493776"/>
+          </a:xfrm>
+          <a:prstGeom prst="roundRect">
+            <a:avLst>
+              <a:gd name="adj" fmla="val 16667"/>
+            </a:avLst>
+          </a:prstGeom>
+          <a:solidFill>
+            <a:srgbClr val="FFF6F2"/>
+          </a:solidFill>
+          <a:ln w="12700">
+            <a:solidFill>
+              <a:srgbClr val="F3C8B8"/>
+            </a:solidFill>
+            <a:prstDash val="solid"/>
+          </a:ln>
+        </p:spPr>
+      </p:sp>
+      <p:sp>
+        <p:nvSpPr>
+          <p:cNvPr id="73" name="Text 65"/>
+          <p:cNvSpPr/>
+          <p:nvPr/>
+        </p:nvSpPr>
+        <p:spPr>
+          <a:xfrm>
+            <a:off x="2318004" y="5413248"/>
+            <a:ext cx="1682496" cy="493776"/>
+          </a:xfrm>
+          <a:prstGeom prst="rect">
+            <a:avLst/>
+          </a:prstGeom>
+          <a:noFill/>
+          <a:ln/>
+        </p:spPr>
+        <p:txBody>
+          <a:bodyPr wrap="square" lIns="0" tIns="0" rIns="0" bIns="0" rtlCol="0" anchor="ctr"/>
+          <a:lstStyle/>
+          <a:p>
+            <a:pPr indent="0" marL="0">
+              <a:buNone/>
+            </a:pPr>
+            <a:r>
+              <a:rPr lang="en-US" sz="900" b="1" dirty="0">
+                <a:solidFill>
+                  <a:srgbClr val="241D1A"/>
+                </a:solidFill>
+                <a:latin typeface="Arial" pitchFamily="34" charset="0"/>
+                <a:ea typeface="Arial" pitchFamily="34" charset="-122"/>
+                <a:cs typeface="Arial" pitchFamily="34" charset="-120"/>
+              </a:rPr>
+              <a:t>🤖 Google Play</a:t>
+            </a:r>
+            <a:endParaRPr lang="en-US" sz="900" dirty="0"/>
+          </a:p>
+          <a:p>
+            <a:pPr indent="0" marL="0">
+              <a:buNone/>
+            </a:pPr>
+            <a:r>
+              <a:rPr lang="en-US" sz="750" dirty="0">
+                <a:solidFill>
+                  <a:srgbClr val="6E655D"/>
+                </a:solidFill>
+                <a:latin typeface="Arial" pitchFamily="34" charset="0"/>
+                <a:ea typeface="Arial" pitchFamily="34" charset="-122"/>
+                <a:cs typeface="Arial" pitchFamily="34" charset="-120"/>
+              </a:rPr>
+              <a:t>pilot · public Oct 8</a:t>
+            </a:r>
+            <a:endParaRPr lang="en-US" sz="900" dirty="0"/>
+          </a:p>
+        </p:txBody>
+      </p:sp>
+      <p:sp>
+        <p:nvSpPr>
+          <p:cNvPr id="74" name="Shape 66"/>
+          <p:cNvSpPr/>
+          <p:nvPr/>
+        </p:nvSpPr>
+        <p:spPr>
+          <a:xfrm>
+            <a:off x="4192524" y="5413248"/>
+            <a:ext cx="1847088" cy="493776"/>
+          </a:xfrm>
+          <a:prstGeom prst="roundRect">
+            <a:avLst>
+              <a:gd name="adj" fmla="val 16667"/>
+            </a:avLst>
+          </a:prstGeom>
+          <a:solidFill>
+            <a:srgbClr val="FFF6F2"/>
+          </a:solidFill>
+          <a:ln w="12700">
+            <a:solidFill>
+              <a:srgbClr val="F3C8B8"/>
+            </a:solidFill>
+            <a:prstDash val="solid"/>
+          </a:ln>
+        </p:spPr>
+      </p:sp>
+      <p:sp>
+        <p:nvSpPr>
+          <p:cNvPr id="75" name="Text 67"/>
+          <p:cNvSpPr/>
+          <p:nvPr/>
+        </p:nvSpPr>
+        <p:spPr>
+          <a:xfrm>
+            <a:off x="4274820" y="5413248"/>
+            <a:ext cx="1682496" cy="493776"/>
+          </a:xfrm>
+          <a:prstGeom prst="rect">
+            <a:avLst/>
+          </a:prstGeom>
+          <a:noFill/>
+          <a:ln/>
+        </p:spPr>
+        <p:txBody>
+          <a:bodyPr wrap="square" lIns="0" tIns="0" rIns="0" bIns="0" rtlCol="0" anchor="ctr"/>
+          <a:lstStyle/>
+          <a:p>
+            <a:pPr indent="0" marL="0">
+              <a:buNone/>
+            </a:pPr>
+            <a:r>
+              <a:rPr lang="en-US" sz="900" b="1" u="sng" dirty="0">
+                <a:solidFill>
+                  <a:srgbClr val="241D1A"/>
+                </a:solidFill>
+                <a:latin typeface="Arial" pitchFamily="34" charset="0"/>
+                <a:ea typeface="Arial" pitchFamily="34" charset="-122"/>
+                <a:cs typeface="Arial" pitchFamily="34" charset="-120"/>
+                <a:hlinkClick r:id="rId7" invalidUrl="" action="" tgtFrame="" tooltip="" history="1" highlightClick="0" endSnd="0">
+                  <a:extLst>
+                    <a:ext uri="{A12FA001-AC4F-418D-AE19-62706E023703}">
+                      <ahyp:hlinkClr xmlns:ahyp="http://schemas.microsoft.com/office/drawing/2018/hyperlinkcolor" val="tx"/>
+                    </a:ext>
+                  </a:extLst>
+                </a:hlinkClick>
+              </a:rPr>
+              <a:t>🌐 nutrisynccollective.com</a:t>
+            </a:r>
+            <a:endParaRPr lang="en-US" sz="900" dirty="0"/>
+          </a:p>
+          <a:p>
+            <a:pPr indent="0" marL="0">
+              <a:buNone/>
+            </a:pPr>
+            <a:r>
+              <a:rPr lang="en-US" sz="750" dirty="0">
+                <a:solidFill>
+                  <a:srgbClr val="6E655D"/>
+                </a:solidFill>
+                <a:latin typeface="Arial" pitchFamily="34" charset="0"/>
+                <a:ea typeface="Arial" pitchFamily="34" charset="-122"/>
+                <a:cs typeface="Arial" pitchFamily="34" charset="-120"/>
+              </a:rPr>
+              <a:t>marketing site</a:t>
+            </a:r>
+            <a:endParaRPr lang="en-US" sz="900" dirty="0"/>
+          </a:p>
+        </p:txBody>
+      </p:sp>
+      <p:sp>
+        <p:nvSpPr>
+          <p:cNvPr id="76" name="Shape 68"/>
+          <p:cNvSpPr/>
+          <p:nvPr/>
+        </p:nvSpPr>
+        <p:spPr>
+          <a:xfrm>
+            <a:off x="6149340" y="5413248"/>
+            <a:ext cx="1847088" cy="493776"/>
+          </a:xfrm>
+          <a:prstGeom prst="roundRect">
+            <a:avLst>
+              <a:gd name="adj" fmla="val 16667"/>
+            </a:avLst>
+          </a:prstGeom>
+          <a:solidFill>
+            <a:srgbClr val="FFF6F2"/>
+          </a:solidFill>
+          <a:ln w="12700">
+            <a:solidFill>
+              <a:srgbClr val="F3C8B8"/>
+            </a:solidFill>
+            <a:prstDash val="solid"/>
+          </a:ln>
+        </p:spPr>
+      </p:sp>
+      <p:sp>
+        <p:nvSpPr>
+          <p:cNvPr id="77" name="Text 69"/>
+          <p:cNvSpPr/>
+          <p:nvPr/>
+        </p:nvSpPr>
+        <p:spPr>
+          <a:xfrm>
+            <a:off x="6231636" y="5413248"/>
+            <a:ext cx="1682496" cy="493776"/>
+          </a:xfrm>
+          <a:prstGeom prst="rect">
+            <a:avLst/>
+          </a:prstGeom>
+          <a:noFill/>
+          <a:ln/>
+        </p:spPr>
+        <p:txBody>
+          <a:bodyPr wrap="square" lIns="0" tIns="0" rIns="0" bIns="0" rtlCol="0" anchor="ctr"/>
+          <a:lstStyle/>
+          <a:p>
+            <a:pPr indent="0" marL="0">
+              <a:buNone/>
+            </a:pPr>
+            <a:r>
+              <a:rPr lang="en-US" sz="900" b="1" u="sng" dirty="0">
+                <a:solidFill>
+                  <a:srgbClr val="241D1A"/>
+                </a:solidFill>
+                <a:latin typeface="Arial" pitchFamily="34" charset="0"/>
+                <a:ea typeface="Arial" pitchFamily="34" charset="-122"/>
+                <a:cs typeface="Arial" pitchFamily="34" charset="-120"/>
+                <a:hlinkClick r:id="rId8" invalidUrl="" action="" tgtFrame="" tooltip="" history="1" highlightClick="0" endSnd="0">
+                  <a:extLst>
+                    <a:ext uri="{A12FA001-AC4F-418D-AE19-62706E023703}">
+                      <ahyp:hlinkClr xmlns:ahyp="http://schemas.microsoft.com/office/drawing/2018/hyperlinkcolor" val="tx"/>
+                    </a:ext>
+                  </a:extLst>
+                </a:hlinkClick>
+              </a:rPr>
+              <a:t>📱 m.nutrisynccollective.com</a:t>
+            </a:r>
+            <a:endParaRPr lang="en-US" sz="900" dirty="0"/>
+          </a:p>
+          <a:p>
+            <a:pPr indent="0" marL="0">
+              <a:buNone/>
+            </a:pPr>
+            <a:r>
+              <a:rPr lang="en-US" sz="750" dirty="0">
+                <a:solidFill>
+                  <a:srgbClr val="6E655D"/>
+                </a:solidFill>
+                <a:latin typeface="Arial" pitchFamily="34" charset="0"/>
+                <a:ea typeface="Arial" pitchFamily="34" charset="-122"/>
+                <a:cs typeface="Arial" pitchFamily="34" charset="-120"/>
+              </a:rPr>
+              <a:t>PWA</a:t>
+            </a:r>
+            <a:endParaRPr lang="en-US" sz="900" dirty="0"/>
+          </a:p>
+        </p:txBody>
+      </p:sp>
+      <p:sp>
+        <p:nvSpPr>
+          <p:cNvPr id="78" name="Shape 70"/>
+          <p:cNvSpPr/>
+          <p:nvPr/>
+        </p:nvSpPr>
+        <p:spPr>
+          <a:xfrm>
+            <a:off x="8106156" y="5413248"/>
+            <a:ext cx="1847088" cy="493776"/>
+          </a:xfrm>
+          <a:prstGeom prst="roundRect">
+            <a:avLst>
+              <a:gd name="adj" fmla="val 16667"/>
+            </a:avLst>
+          </a:prstGeom>
+          <a:solidFill>
+            <a:srgbClr val="FFF6F2"/>
+          </a:solidFill>
+          <a:ln w="12700">
+            <a:solidFill>
+              <a:srgbClr val="F3C8B8"/>
+            </a:solidFill>
+            <a:prstDash val="solid"/>
+          </a:ln>
+        </p:spPr>
+      </p:sp>
+      <p:sp>
+        <p:nvSpPr>
+          <p:cNvPr id="79" name="Text 71"/>
+          <p:cNvSpPr/>
+          <p:nvPr/>
+        </p:nvSpPr>
+        <p:spPr>
+          <a:xfrm>
+            <a:off x="8188452" y="5413248"/>
+            <a:ext cx="1682496" cy="493776"/>
+          </a:xfrm>
+          <a:prstGeom prst="rect">
+            <a:avLst/>
+          </a:prstGeom>
+          <a:noFill/>
+          <a:ln/>
+        </p:spPr>
+        <p:txBody>
+          <a:bodyPr wrap="square" lIns="0" tIns="0" rIns="0" bIns="0" rtlCol="0" anchor="ctr"/>
+          <a:lstStyle/>
+          <a:p>
+            <a:pPr indent="0" marL="0">
+              <a:buNone/>
+            </a:pPr>
+            <a:r>
+              <a:rPr lang="en-US" sz="900" b="1" u="sng" dirty="0">
+                <a:solidFill>
+                  <a:srgbClr val="241D1A"/>
+                </a:solidFill>
+                <a:latin typeface="Arial" pitchFamily="34" charset="0"/>
+                <a:ea typeface="Arial" pitchFamily="34" charset="-122"/>
+                <a:cs typeface="Arial" pitchFamily="34" charset="-120"/>
+                <a:hlinkClick r:id="rId9" invalidUrl="" action="" tgtFrame="" tooltip="" history="1" highlightClick="0" endSnd="0">
+                  <a:extLst>
+                    <a:ext uri="{A12FA001-AC4F-418D-AE19-62706E023703}">
+                      <ahyp:hlinkClr xmlns:ahyp="http://schemas.microsoft.com/office/drawing/2018/hyperlinkcolor" val="tx"/>
+                    </a:ext>
+                  </a:extLst>
+                </a:hlinkClick>
+              </a:rPr>
+              <a:t>🛠 Builders Hub</a:t>
+            </a:r>
+            <a:endParaRPr lang="en-US" sz="900" dirty="0"/>
+          </a:p>
+          <a:p>
+            <a:pPr indent="0" marL="0">
+              <a:buNone/>
+            </a:pPr>
+            <a:r>
+              <a:rPr lang="en-US" sz="750" dirty="0">
+                <a:solidFill>
+                  <a:srgbClr val="6E655D"/>
+                </a:solidFill>
+                <a:latin typeface="Arial" pitchFamily="34" charset="0"/>
+                <a:ea typeface="Arial" pitchFamily="34" charset="-122"/>
+                <a:cs typeface="Arial" pitchFamily="34" charset="-120"/>
+              </a:rPr>
+              <a:t>founders hub</a:t>
+            </a:r>
+            <a:endParaRPr lang="en-US" sz="900" dirty="0"/>
+          </a:p>
+        </p:txBody>
+      </p:sp>
+      <p:sp>
+        <p:nvSpPr>
+          <p:cNvPr id="80" name="Shape 72"/>
+          <p:cNvSpPr/>
+          <p:nvPr/>
+        </p:nvSpPr>
+        <p:spPr>
+          <a:xfrm>
+            <a:off x="10062972" y="5413248"/>
+            <a:ext cx="1847088" cy="493776"/>
+          </a:xfrm>
+          <a:prstGeom prst="roundRect">
+            <a:avLst>
+              <a:gd name="adj" fmla="val 16667"/>
+            </a:avLst>
+          </a:prstGeom>
+          <a:solidFill>
+            <a:srgbClr val="FFF6F2"/>
+          </a:solidFill>
+          <a:ln w="12700">
+            <a:solidFill>
+              <a:srgbClr val="F3C8B8"/>
+            </a:solidFill>
+            <a:prstDash val="solid"/>
+          </a:ln>
+        </p:spPr>
+      </p:sp>
+      <p:sp>
+        <p:nvSpPr>
+          <p:cNvPr id="81" name="Text 73"/>
+          <p:cNvSpPr/>
+          <p:nvPr/>
+        </p:nvSpPr>
+        <p:spPr>
+          <a:xfrm>
+            <a:off x="10145268" y="5413248"/>
+            <a:ext cx="1682496" cy="493776"/>
+          </a:xfrm>
+          <a:prstGeom prst="rect">
+            <a:avLst/>
+          </a:prstGeom>
+          <a:noFill/>
+          <a:ln/>
+        </p:spPr>
+        <p:txBody>
+          <a:bodyPr wrap="square" lIns="0" tIns="0" rIns="0" bIns="0" rtlCol="0" anchor="ctr"/>
+          <a:lstStyle/>
+          <a:p>
+            <a:pPr indent="0" marL="0">
+              <a:buNone/>
+            </a:pPr>
+            <a:r>
+              <a:rPr lang="en-US" sz="900" b="1" u="sng" dirty="0">
+                <a:solidFill>
+                  <a:srgbClr val="241D1A"/>
+                </a:solidFill>
+                <a:latin typeface="Arial" pitchFamily="34" charset="0"/>
+                <a:ea typeface="Arial" pitchFamily="34" charset="-122"/>
+                <a:cs typeface="Arial" pitchFamily="34" charset="-120"/>
+                <a:hlinkClick r:id="rId10" invalidUrl="" action="" tgtFrame="" tooltip="" history="1" highlightClick="0" endSnd="0">
+                  <a:extLst>
+                    <a:ext uri="{A12FA001-AC4F-418D-AE19-62706E023703}">
+                      <ahyp:hlinkClr xmlns:ahyp="http://schemas.microsoft.com/office/drawing/2018/hyperlinkcolor" val="tx"/>
+                    </a:ext>
+                  </a:extLst>
+                </a:hlinkClick>
+              </a:rPr>
+              <a:t>🔐 StartUp Admin</a:t>
+            </a:r>
+            <a:endParaRPr lang="en-US" sz="900" dirty="0"/>
+          </a:p>
+          <a:p>
+            <a:pPr indent="0" marL="0">
+              <a:buNone/>
+            </a:pPr>
+            <a:r>
+              <a:rPr lang="en-US" sz="750" dirty="0">
+                <a:solidFill>
+                  <a:srgbClr val="6E655D"/>
+                </a:solidFill>
+                <a:latin typeface="Arial" pitchFamily="34" charset="0"/>
+                <a:ea typeface="Arial" pitchFamily="34" charset="-122"/>
+                <a:cs typeface="Arial" pitchFamily="34" charset="-120"/>
+              </a:rPr>
+              <a:t>build accounting</a:t>
+            </a:r>
+            <a:endParaRPr lang="en-US" sz="900" dirty="0"/>
+          </a:p>
+        </p:txBody>
+      </p:sp>
+      <p:sp>
+        <p:nvSpPr>
+          <p:cNvPr id="82" name="Shape 74"/>
+          <p:cNvSpPr/>
+          <p:nvPr/>
+        </p:nvSpPr>
+        <p:spPr>
+          <a:xfrm>
+            <a:off x="685800" y="6053328"/>
+            <a:ext cx="10817352" cy="0"/>
+          </a:xfrm>
+          <a:prstGeom prst="line">
+            <a:avLst/>
+          </a:prstGeom>
+          <a:noFill/>
+          <a:ln w="12700">
+            <a:solidFill>
+              <a:srgbClr val="EFE3D7"/>
+            </a:solidFill>
+            <a:prstDash val="solid"/>
+          </a:ln>
+        </p:spPr>
+      </p:sp>
+      <p:sp>
+        <p:nvSpPr>
+          <p:cNvPr id="83" name="Text 75"/>
+          <p:cNvSpPr/>
+          <p:nvPr/>
+        </p:nvSpPr>
+        <p:spPr>
+          <a:xfrm>
+            <a:off x="685800" y="6163056"/>
+            <a:ext cx="4023360" cy="658368"/>
+          </a:xfrm>
+          <a:prstGeom prst="rect">
+            <a:avLst/>
+          </a:prstGeom>
+          <a:noFill/>
+          <a:ln/>
+        </p:spPr>
+        <p:txBody>
+          <a:bodyPr wrap="square" lIns="0" tIns="0" rIns="0" bIns="0" rtlCol="0" anchor="ctr"/>
+          <a:lstStyle/>
+          <a:p>
+            <a:pPr indent="0" marL="0">
+              <a:buNone/>
+            </a:pPr>
+            <a:r>
+              <a:rPr lang="en-US" sz="1600" b="1" dirty="0">
+                <a:solidFill>
+                  <a:srgbClr val="FD400C"/>
+                </a:solidFill>
+                <a:latin typeface="Arial" pitchFamily="34" charset="0"/>
+                <a:ea typeface="Arial" pitchFamily="34" charset="-122"/>
+                <a:cs typeface="Arial" pitchFamily="34" charset="-120"/>
+              </a:rPr>
+              <a:t>NutriSync</a:t>
+            </a:r>
+            <a:endParaRPr lang="en-US" sz="1600" dirty="0"/>
+          </a:p>
+          <a:p>
+            <a:pPr indent="0" marL="0">
+              <a:buNone/>
+            </a:pPr>
+            <a:r>
+              <a:rPr lang="en-US" sz="900" dirty="0">
+                <a:solidFill>
+                  <a:srgbClr val="6E655D"/>
+                </a:solidFill>
+                <a:latin typeface="Arial" pitchFamily="34" charset="0"/>
+                <a:ea typeface="Arial" pitchFamily="34" charset="-122"/>
+                <a:cs typeface="Arial" pitchFamily="34" charset="-120"/>
+              </a:rPr>
+              <a:t>Sync meals and movement to your cycle</a:t>
+            </a:r>
+            <a:endParaRPr lang="en-US" sz="1600" dirty="0"/>
+          </a:p>
+          <a:p>
+            <a:pPr indent="0" marL="0">
+              <a:buNone/>
+            </a:pPr>
+            <a:r>
+              <a:rPr lang="en-US" sz="900" dirty="0">
+                <a:solidFill>
+                  <a:srgbClr val="8A7F78"/>
+                </a:solidFill>
+                <a:latin typeface="Arial" pitchFamily="34" charset="0"/>
+                <a:ea typeface="Arial" pitchFamily="34" charset="-122"/>
+                <a:cs typeface="Arial" pitchFamily="34" charset="-120"/>
+              </a:rPr>
+              <a:t>contact@nutrisynccollective.com</a:t>
+            </a:r>
+            <a:endParaRPr lang="en-US" sz="1600" dirty="0"/>
+          </a:p>
+        </p:txBody>
+      </p:sp>
+      <p:sp>
+        <p:nvSpPr>
+          <p:cNvPr id="84" name="Text 76"/>
+          <p:cNvSpPr/>
+          <p:nvPr/>
+        </p:nvSpPr>
+        <p:spPr>
+          <a:xfrm>
+            <a:off x="4160520" y="6163056"/>
+            <a:ext cx="4572000" cy="658368"/>
+          </a:xfrm>
+          <a:prstGeom prst="rect">
+            <a:avLst/>
+          </a:prstGeom>
+          <a:noFill/>
+          <a:ln/>
+        </p:spPr>
+        <p:txBody>
+          <a:bodyPr wrap="square" lIns="0" tIns="0" rIns="0" bIns="0" rtlCol="0" anchor="t"/>
+          <a:lstStyle/>
+          <a:p>
+            <a:pPr indent="0" marL="0">
+              <a:buNone/>
+            </a:pPr>
+            <a:r>
+              <a:rPr lang="en-US" sz="900" u="sng" dirty="0">
+                <a:solidFill>
+                  <a:srgbClr val="6E655D"/>
+                </a:solidFill>
+                <a:latin typeface="Arial" pitchFamily="34" charset="0"/>
+                <a:ea typeface="Arial" pitchFamily="34" charset="-122"/>
+                <a:cs typeface="Arial" pitchFamily="34" charset="-120"/>
+                <a:hlinkClick r:id="rId11" invalidUrl="" action="" tgtFrame="" tooltip="" history="1" highlightClick="0" endSnd="0">
+                  <a:extLst>
+                    <a:ext uri="{A12FA001-AC4F-418D-AE19-62706E023703}">
+                      <ahyp:hlinkClr xmlns:ahyp="http://schemas.microsoft.com/office/drawing/2018/hyperlinkcolor" val="tx"/>
+                    </a:ext>
+                  </a:extLst>
+                </a:hlinkClick>
+              </a:rPr>
+              <a:t>Privacy</a:t>
+            </a:r>
+            <a:pPr indent="0" marL="0">
+              <a:buNone/>
+            </a:pPr>
+            <a:r>
+              <a:rPr lang="en-US" sz="900" dirty="0">
+                <a:solidFill>
+                  <a:srgbClr val="B8AAA0"/>
+                </a:solidFill>
+                <a:latin typeface="Arial" pitchFamily="34" charset="0"/>
+                <a:ea typeface="Arial" pitchFamily="34" charset="-122"/>
+                <a:cs typeface="Arial" pitchFamily="34" charset="-120"/>
+              </a:rPr>
+              <a:t>  ·  </a:t>
+            </a:r>
+            <a:pPr indent="0" marL="0">
+              <a:buNone/>
+            </a:pPr>
+            <a:r>
+              <a:rPr lang="en-US" sz="900" u="sng" dirty="0">
+                <a:solidFill>
+                  <a:srgbClr val="6E655D"/>
+                </a:solidFill>
+                <a:latin typeface="Arial" pitchFamily="34" charset="0"/>
+                <a:ea typeface="Arial" pitchFamily="34" charset="-122"/>
+                <a:cs typeface="Arial" pitchFamily="34" charset="-120"/>
+                <a:hlinkClick r:id="rId12" invalidUrl="" action="" tgtFrame="" tooltip="" history="1" highlightClick="0" endSnd="0">
+                  <a:extLst>
+                    <a:ext uri="{A12FA001-AC4F-418D-AE19-62706E023703}">
+                      <ahyp:hlinkClr xmlns:ahyp="http://schemas.microsoft.com/office/drawing/2018/hyperlinkcolor" val="tx"/>
+                    </a:ext>
+                  </a:extLst>
+                </a:hlinkClick>
+              </a:rPr>
+              <a:t>Terms</a:t>
+            </a:r>
+            <a:pPr indent="0" marL="0">
+              <a:buNone/>
+            </a:pPr>
+            <a:r>
+              <a:rPr lang="en-US" sz="900" dirty="0">
+                <a:solidFill>
+                  <a:srgbClr val="B8AAA0"/>
+                </a:solidFill>
+                <a:latin typeface="Arial" pitchFamily="34" charset="0"/>
+                <a:ea typeface="Arial" pitchFamily="34" charset="-122"/>
+                <a:cs typeface="Arial" pitchFamily="34" charset="-120"/>
+              </a:rPr>
+              <a:t>  ·  </a:t>
+            </a:r>
+            <a:pPr indent="0" marL="0">
+              <a:buNone/>
+            </a:pPr>
+            <a:r>
+              <a:rPr lang="en-US" sz="900" u="sng" dirty="0">
+                <a:solidFill>
+                  <a:srgbClr val="6E655D"/>
+                </a:solidFill>
+                <a:latin typeface="Arial" pitchFamily="34" charset="0"/>
+                <a:ea typeface="Arial" pitchFamily="34" charset="-122"/>
+                <a:cs typeface="Arial" pitchFamily="34" charset="-120"/>
+                <a:hlinkClick r:id="rId13" invalidUrl="" action="" tgtFrame="" tooltip="" history="1" highlightClick="0" endSnd="0">
+                  <a:extLst>
+                    <a:ext uri="{A12FA001-AC4F-418D-AE19-62706E023703}">
+                      <ahyp:hlinkClr xmlns:ahyp="http://schemas.microsoft.com/office/drawing/2018/hyperlinkcolor" val="tx"/>
+                    </a:ext>
+                  </a:extLst>
+                </a:hlinkClick>
+              </a:rPr>
+              <a:t>Cookies</a:t>
+            </a:r>
+            <a:pPr indent="0" marL="0">
+              <a:buNone/>
+            </a:pPr>
+            <a:r>
+              <a:rPr lang="en-US" sz="900" dirty="0">
+                <a:solidFill>
+                  <a:srgbClr val="B8AAA0"/>
+                </a:solidFill>
+                <a:latin typeface="Arial" pitchFamily="34" charset="0"/>
+                <a:ea typeface="Arial" pitchFamily="34" charset="-122"/>
+                <a:cs typeface="Arial" pitchFamily="34" charset="-120"/>
+              </a:rPr>
+              <a:t>  ·  </a:t>
+            </a:r>
+            <a:pPr indent="0" marL="0">
+              <a:buNone/>
+            </a:pPr>
+            <a:r>
+              <a:rPr lang="en-US" sz="900" u="sng" dirty="0">
+                <a:solidFill>
+                  <a:srgbClr val="6E655D"/>
+                </a:solidFill>
+                <a:latin typeface="Arial" pitchFamily="34" charset="0"/>
+                <a:ea typeface="Arial" pitchFamily="34" charset="-122"/>
+                <a:cs typeface="Arial" pitchFamily="34" charset="-120"/>
+                <a:hlinkClick r:id="rId14" invalidUrl="" action="" tgtFrame="" tooltip="" history="1" highlightClick="0" endSnd="0">
+                  <a:extLst>
+                    <a:ext uri="{A12FA001-AC4F-418D-AE19-62706E023703}">
+                      <ahyp:hlinkClr xmlns:ahyp="http://schemas.microsoft.com/office/drawing/2018/hyperlinkcolor" val="tx"/>
+                    </a:ext>
+                  </a:extLst>
+                </a:hlinkClick>
+              </a:rPr>
+              <a:t>Legal notice</a:t>
+            </a:r>
+            <a:pPr indent="0" marL="0">
+              <a:buNone/>
+            </a:pPr>
+            <a:endParaRPr lang="en-US" sz="900" dirty="0"/>
+          </a:p>
+          <a:p>
+            <a:pPr indent="0" marL="0">
+              <a:buNone/>
+            </a:pPr>
+            <a:r>
               <a:rPr lang="en-US" sz="800" dirty="0">
                 <a:solidFill>
                   <a:srgbClr val="B8AAA0"/>
@@ -3440,9 +6922,135 @@
                 <a:ea typeface="Arial" pitchFamily="34" charset="-122"/>
                 <a:cs typeface="Arial" pitchFamily="34" charset="-120"/>
               </a:rPr>
-              <a:t>Piloto interno en curso — no en producción · internal pilot, not in production yet          nutrisynccollective.com</a:t>
-            </a:r>
-            <a:endParaRPr lang="en-US" sz="800" dirty="0"/>
+              <a:t>© 2026 NutriSync Collective — internal pilot, not in production yet</a:t>
+            </a:r>
+            <a:endParaRPr lang="en-US" sz="900" dirty="0"/>
+          </a:p>
+        </p:txBody>
+      </p:sp>
+      <p:pic>
+        <p:nvPicPr>
+          <p:cNvPr id="85" name="Image 6" descr="preencoded.png">    </p:cNvPr>
+          <p:cNvPicPr>
+            <a:picLocks noChangeAspect="1"/>
+          </p:cNvPicPr>
+          <p:nvPr/>
+        </p:nvPicPr>
+        <p:blipFill>
+          <a:blip r:embed="rId15"/>
+          <a:stretch>
+            <a:fillRect/>
+          </a:stretch>
+        </p:blipFill>
+        <p:spPr>
+          <a:xfrm>
+            <a:off x="9646920" y="6071616"/>
+            <a:ext cx="640080" cy="640080"/>
+          </a:xfrm>
+          <a:prstGeom prst="rect">
+            <a:avLst/>
+          </a:prstGeom>
+        </p:spPr>
+      </p:pic>
+      <p:sp>
+        <p:nvSpPr>
+          <p:cNvPr id="86" name="Text 77"/>
+          <p:cNvSpPr/>
+          <p:nvPr/>
+        </p:nvSpPr>
+        <p:spPr>
+          <a:xfrm>
+            <a:off x="9555480" y="6693408"/>
+            <a:ext cx="822960" cy="146304"/>
+          </a:xfrm>
+          <a:prstGeom prst="rect">
+            <a:avLst/>
+          </a:prstGeom>
+          <a:noFill/>
+          <a:ln/>
+        </p:spPr>
+        <p:txBody>
+          <a:bodyPr wrap="square" lIns="0" tIns="0" rIns="0" bIns="0" rtlCol="0" anchor="ctr"/>
+          <a:lstStyle/>
+          <a:p>
+            <a:pPr algn="ctr" indent="0" marL="0">
+              <a:buNone/>
+            </a:pPr>
+            <a:r>
+              <a:rPr lang="en-US" sz="750" b="1" dirty="0">
+                <a:solidFill>
+                  <a:srgbClr val="6E655D"/>
+                </a:solidFill>
+                <a:latin typeface="Arial" pitchFamily="34" charset="0"/>
+                <a:ea typeface="Arial" pitchFamily="34" charset="-122"/>
+                <a:cs typeface="Arial" pitchFamily="34" charset="-120"/>
+              </a:rPr>
+              <a:t>Web</a:t>
+            </a:r>
+            <a:endParaRPr lang="en-US" sz="750" dirty="0"/>
+          </a:p>
+        </p:txBody>
+      </p:sp>
+      <p:pic>
+        <p:nvPicPr>
+          <p:cNvPr id="87" name="Image 7" descr="preencoded.png">    </p:cNvPr>
+          <p:cNvPicPr>
+            <a:picLocks noChangeAspect="1"/>
+          </p:cNvPicPr>
+          <p:nvPr/>
+        </p:nvPicPr>
+        <p:blipFill>
+          <a:blip r:embed="rId16"/>
+          <a:stretch>
+            <a:fillRect/>
+          </a:stretch>
+        </p:blipFill>
+        <p:spPr>
+          <a:xfrm>
+            <a:off x="10652760" y="6071616"/>
+            <a:ext cx="640080" cy="640080"/>
+          </a:xfrm>
+          <a:prstGeom prst="rect">
+            <a:avLst/>
+          </a:prstGeom>
+        </p:spPr>
+      </p:pic>
+      <p:sp>
+        <p:nvSpPr>
+          <p:cNvPr id="88" name="Text 78"/>
+          <p:cNvSpPr/>
+          <p:nvPr/>
+        </p:nvSpPr>
+        <p:spPr>
+          <a:xfrm>
+            <a:off x="10561320" y="6693408"/>
+            <a:ext cx="822960" cy="146304"/>
+          </a:xfrm>
+          <a:prstGeom prst="rect">
+            <a:avLst/>
+          </a:prstGeom>
+          <a:noFill/>
+          <a:ln/>
+        </p:spPr>
+        <p:txBody>
+          <a:bodyPr wrap="square" lIns="0" tIns="0" rIns="0" bIns="0" rtlCol="0" anchor="ctr"/>
+          <a:lstStyle/>
+          <a:p>
+            <a:pPr algn="ctr" indent="0" marL="0">
+              <a:buNone/>
+            </a:pPr>
+            <a:r>
+              <a:rPr lang="en-US" sz="750" b="1" dirty="0">
+                <a:solidFill>
+                  <a:srgbClr val="6E655D"/>
+                </a:solidFill>
+                <a:latin typeface="Arial" pitchFamily="34" charset="0"/>
+                <a:ea typeface="Arial" pitchFamily="34" charset="-122"/>
+                <a:cs typeface="Arial" pitchFamily="34" charset="-120"/>
+              </a:rPr>
+              <a:t>PWA</a:t>
+            </a:r>
+            <a:endParaRPr lang="en-US" sz="750" dirty="0"/>
           </a:p>
         </p:txBody>
       </p:sp>
